--- a/public/slides/aa203/lecture_2.pptx
+++ b/public/slides/aa203/lecture_2.pptx
@@ -180,37 +180,140 @@
 </p:presentation>
 </file>
 
-<file path=ppt/revisionInfo.xml><?xml version="1.0" encoding="utf-8"?>
-<p1510:revInfo xmlns:a="http://schemas.openxmlformats.org/drawingml/2006/main" xmlns:r="http://schemas.openxmlformats.org/officeDocument/2006/relationships" xmlns:p1510="http://schemas.microsoft.com/office/powerpoint/2015/10/main">
-  <p1510:revLst>
-    <p1510:client id="{338E4FBB-A91D-774B-B883-0EB894175B62}" v="2" dt="2026-04-06T04:10:29.435"/>
-  </p1510:revLst>
-</p1510:revInfo>
-</file>
-
 <file path=ppt/changesInfos/changesInfo1.xml><?xml version="1.0" encoding="utf-8"?>
 <pc:chgInfo xmlns:a="http://schemas.openxmlformats.org/drawingml/2006/main" xmlns:r="http://schemas.openxmlformats.org/officeDocument/2006/relationships" xmlns:ac="http://schemas.microsoft.com/office/drawing/2013/main/command" xmlns:pc="http://schemas.microsoft.com/office/powerpoint/2013/main/command">
   <pc:docChgLst>
     <pc:chgData name="Daniele Gammelli" userId="292b8a31-f1ba-4b4c-b196-a231dc095d13" providerId="ADAL" clId="{6E670754-AB6A-5789-AA0A-6F6FD9CE3EEA}"/>
     <pc:docChg chg="modSld">
-      <pc:chgData name="Daniele Gammelli" userId="292b8a31-f1ba-4b4c-b196-a231dc095d13" providerId="ADAL" clId="{6E670754-AB6A-5789-AA0A-6F6FD9CE3EEA}" dt="2026-04-06T04:10:29.435" v="1" actId="20577"/>
+      <pc:chgData name="Daniele Gammelli" userId="292b8a31-f1ba-4b4c-b196-a231dc095d13" providerId="ADAL" clId="{6E670754-AB6A-5789-AA0A-6F6FD9CE3EEA}" dt="2026-08-13T21:08:31.560" v="21" actId="20577"/>
       <pc:docMkLst>
         <pc:docMk/>
       </pc:docMkLst>
-      <pc:sldChg chg="modSp">
-        <pc:chgData name="Daniele Gammelli" userId="292b8a31-f1ba-4b4c-b196-a231dc095d13" providerId="ADAL" clId="{6E670754-AB6A-5789-AA0A-6F6FD9CE3EEA}" dt="2026-04-06T04:10:29.435" v="1" actId="20577"/>
+      <pc:sldChg chg="modNotesTx">
+        <pc:chgData name="Daniele Gammelli" userId="292b8a31-f1ba-4b4c-b196-a231dc095d13" providerId="ADAL" clId="{6E670754-AB6A-5789-AA0A-6F6FD9CE3EEA}" dt="2026-08-13T21:08:31.560" v="21" actId="20577"/>
+        <pc:sldMkLst>
+          <pc:docMk/>
+          <pc:sldMk cId="2637145198" sldId="354"/>
+        </pc:sldMkLst>
+      </pc:sldChg>
+      <pc:sldChg chg="modNotesTx">
+        <pc:chgData name="Daniele Gammelli" userId="292b8a31-f1ba-4b4c-b196-a231dc095d13" providerId="ADAL" clId="{6E670754-AB6A-5789-AA0A-6F6FD9CE3EEA}" dt="2026-08-13T21:08:10.761" v="12" actId="20577"/>
+        <pc:sldMkLst>
+          <pc:docMk/>
+          <pc:sldMk cId="2329187192" sldId="358"/>
+        </pc:sldMkLst>
+      </pc:sldChg>
+      <pc:sldChg chg="modNotesTx">
+        <pc:chgData name="Daniele Gammelli" userId="292b8a31-f1ba-4b4c-b196-a231dc095d13" providerId="ADAL" clId="{6E670754-AB6A-5789-AA0A-6F6FD9CE3EEA}" dt="2026-08-13T21:08:13.412" v="15" actId="20577"/>
+        <pc:sldMkLst>
+          <pc:docMk/>
+          <pc:sldMk cId="3080339459" sldId="359"/>
+        </pc:sldMkLst>
+      </pc:sldChg>
+      <pc:sldChg chg="modNotesTx">
+        <pc:chgData name="Daniele Gammelli" userId="292b8a31-f1ba-4b4c-b196-a231dc095d13" providerId="ADAL" clId="{6E670754-AB6A-5789-AA0A-6F6FD9CE3EEA}" dt="2026-08-13T21:08:16.023" v="16" actId="20577"/>
+        <pc:sldMkLst>
+          <pc:docMk/>
+          <pc:sldMk cId="173501174" sldId="360"/>
+        </pc:sldMkLst>
+      </pc:sldChg>
+      <pc:sldChg chg="modNotesTx">
+        <pc:chgData name="Daniele Gammelli" userId="292b8a31-f1ba-4b4c-b196-a231dc095d13" providerId="ADAL" clId="{6E670754-AB6A-5789-AA0A-6F6FD9CE3EEA}" dt="2026-08-13T21:08:26.116" v="19" actId="20577"/>
+        <pc:sldMkLst>
+          <pc:docMk/>
+          <pc:sldMk cId="249181732" sldId="369"/>
+        </pc:sldMkLst>
+      </pc:sldChg>
+      <pc:sldChg chg="modNotesTx">
+        <pc:chgData name="Daniele Gammelli" userId="292b8a31-f1ba-4b4c-b196-a231dc095d13" providerId="ADAL" clId="{6E670754-AB6A-5789-AA0A-6F6FD9CE3EEA}" dt="2026-08-13T21:08:27.740" v="20" actId="20577"/>
         <pc:sldMkLst>
           <pc:docMk/>
           <pc:sldMk cId="2141153767" sldId="370"/>
         </pc:sldMkLst>
-        <pc:spChg chg="mod">
-          <ac:chgData name="Daniele Gammelli" userId="292b8a31-f1ba-4b4c-b196-a231dc095d13" providerId="ADAL" clId="{6E670754-AB6A-5789-AA0A-6F6FD9CE3EEA}" dt="2026-04-06T04:10:29.435" v="1" actId="20577"/>
-          <ac:spMkLst>
-            <pc:docMk/>
-            <pc:sldMk cId="2141153767" sldId="370"/>
-            <ac:spMk id="3" creationId="{8DACBF41-C212-174B-A3AF-AD9C11624BF3}"/>
-          </ac:spMkLst>
-        </pc:spChg>
+      </pc:sldChg>
+      <pc:sldChg chg="modNotesTx">
+        <pc:chgData name="Daniele Gammelli" userId="292b8a31-f1ba-4b4c-b196-a231dc095d13" providerId="ADAL" clId="{6E670754-AB6A-5789-AA0A-6F6FD9CE3EEA}" dt="2026-08-13T21:07:47.002" v="2" actId="20577"/>
+        <pc:sldMkLst>
+          <pc:docMk/>
+          <pc:sldMk cId="1139333676" sldId="392"/>
+        </pc:sldMkLst>
+      </pc:sldChg>
+      <pc:sldChg chg="modNotesTx">
+        <pc:chgData name="Daniele Gammelli" userId="292b8a31-f1ba-4b4c-b196-a231dc095d13" providerId="ADAL" clId="{6E670754-AB6A-5789-AA0A-6F6FD9CE3EEA}" dt="2026-08-13T21:07:48.851" v="3" actId="20577"/>
+        <pc:sldMkLst>
+          <pc:docMk/>
+          <pc:sldMk cId="403143498" sldId="393"/>
+        </pc:sldMkLst>
+      </pc:sldChg>
+      <pc:sldChg chg="modNotesTx">
+        <pc:chgData name="Daniele Gammelli" userId="292b8a31-f1ba-4b4c-b196-a231dc095d13" providerId="ADAL" clId="{6E670754-AB6A-5789-AA0A-6F6FD9CE3EEA}" dt="2026-08-13T21:07:50.439" v="4" actId="20577"/>
+        <pc:sldMkLst>
+          <pc:docMk/>
+          <pc:sldMk cId="2440584164" sldId="394"/>
+        </pc:sldMkLst>
+      </pc:sldChg>
+      <pc:sldChg chg="modNotesTx">
+        <pc:chgData name="Daniele Gammelli" userId="292b8a31-f1ba-4b4c-b196-a231dc095d13" providerId="ADAL" clId="{6E670754-AB6A-5789-AA0A-6F6FD9CE3EEA}" dt="2026-08-13T21:07:52.562" v="5" actId="20577"/>
+        <pc:sldMkLst>
+          <pc:docMk/>
+          <pc:sldMk cId="1416312384" sldId="395"/>
+        </pc:sldMkLst>
+      </pc:sldChg>
+      <pc:sldChg chg="modNotesTx">
+        <pc:chgData name="Daniele Gammelli" userId="292b8a31-f1ba-4b4c-b196-a231dc095d13" providerId="ADAL" clId="{6E670754-AB6A-5789-AA0A-6F6FD9CE3EEA}" dt="2026-08-13T21:07:55.462" v="6" actId="20577"/>
+        <pc:sldMkLst>
+          <pc:docMk/>
+          <pc:sldMk cId="3927201397" sldId="396"/>
+        </pc:sldMkLst>
+      </pc:sldChg>
+      <pc:sldChg chg="modNotesTx">
+        <pc:chgData name="Daniele Gammelli" userId="292b8a31-f1ba-4b4c-b196-a231dc095d13" providerId="ADAL" clId="{6E670754-AB6A-5789-AA0A-6F6FD9CE3EEA}" dt="2026-08-13T21:07:57.190" v="7" actId="20577"/>
+        <pc:sldMkLst>
+          <pc:docMk/>
+          <pc:sldMk cId="3789623588" sldId="397"/>
+        </pc:sldMkLst>
+      </pc:sldChg>
+      <pc:sldChg chg="modNotesTx">
+        <pc:chgData name="Daniele Gammelli" userId="292b8a31-f1ba-4b4c-b196-a231dc095d13" providerId="ADAL" clId="{6E670754-AB6A-5789-AA0A-6F6FD9CE3EEA}" dt="2026-08-13T21:07:59.111" v="8" actId="20577"/>
+        <pc:sldMkLst>
+          <pc:docMk/>
+          <pc:sldMk cId="2134738447" sldId="398"/>
+        </pc:sldMkLst>
+      </pc:sldChg>
+      <pc:sldChg chg="modNotesTx">
+        <pc:chgData name="Daniele Gammelli" userId="292b8a31-f1ba-4b4c-b196-a231dc095d13" providerId="ADAL" clId="{6E670754-AB6A-5789-AA0A-6F6FD9CE3EEA}" dt="2026-08-13T21:08:05.119" v="9" actId="20577"/>
+        <pc:sldMkLst>
+          <pc:docMk/>
+          <pc:sldMk cId="2254063259" sldId="401"/>
+        </pc:sldMkLst>
+      </pc:sldChg>
+      <pc:sldChg chg="modNotesTx">
+        <pc:chgData name="Daniele Gammelli" userId="292b8a31-f1ba-4b4c-b196-a231dc095d13" providerId="ADAL" clId="{6E670754-AB6A-5789-AA0A-6F6FD9CE3EEA}" dt="2026-08-13T21:08:19.564" v="17" actId="20577"/>
+        <pc:sldMkLst>
+          <pc:docMk/>
+          <pc:sldMk cId="113416890" sldId="402"/>
+        </pc:sldMkLst>
+      </pc:sldChg>
+      <pc:sldChg chg="modNotesTx">
+        <pc:chgData name="Daniele Gammelli" userId="292b8a31-f1ba-4b4c-b196-a231dc095d13" providerId="ADAL" clId="{6E670754-AB6A-5789-AA0A-6F6FD9CE3EEA}" dt="2026-08-13T21:08:07.316" v="10" actId="20577"/>
+        <pc:sldMkLst>
+          <pc:docMk/>
+          <pc:sldMk cId="63711672" sldId="403"/>
+        </pc:sldMkLst>
+      </pc:sldChg>
+      <pc:sldChg chg="modNotesTx">
+        <pc:chgData name="Daniele Gammelli" userId="292b8a31-f1ba-4b4c-b196-a231dc095d13" providerId="ADAL" clId="{6E670754-AB6A-5789-AA0A-6F6FD9CE3EEA}" dt="2026-08-13T21:08:09.094" v="11" actId="20577"/>
+        <pc:sldMkLst>
+          <pc:docMk/>
+          <pc:sldMk cId="3702537692" sldId="404"/>
+        </pc:sldMkLst>
+      </pc:sldChg>
+      <pc:sldChg chg="modNotesTx">
+        <pc:chgData name="Daniele Gammelli" userId="292b8a31-f1ba-4b4c-b196-a231dc095d13" providerId="ADAL" clId="{6E670754-AB6A-5789-AA0A-6F6FD9CE3EEA}" dt="2026-08-13T21:08:21.907" v="18" actId="20577"/>
+        <pc:sldMkLst>
+          <pc:docMk/>
+          <pc:sldMk cId="1046509055" sldId="406"/>
+        </pc:sldMkLst>
       </pc:sldChg>
     </pc:docChg>
   </pc:docChgLst>
@@ -299,7 +402,7 @@
           <a:p>
             <a:fld id="{EBD6F028-2067-3740-AA48-A91E93570B1D}" type="datetimeFigureOut">
               <a:rPr lang="en-US" smtClean="0"/>
-              <a:t>4/5/26</a:t>
+              <a:t>8/13/26</a:t>
             </a:fld>
             <a:endParaRPr lang="en-US"/>
           </a:p>
@@ -694,203 +797,6 @@
           <a:bodyPr/>
           <a:lstStyle/>
           <a:p>
-            <a:r>
-              <a:rPr lang="en-US" sz="1200" kern="1200" dirty="0">
-                <a:solidFill>
-                  <a:schemeClr val="tx1"/>
-                </a:solidFill>
-                <a:effectLst/>
-                <a:latin typeface="+mn-lt"/>
-                <a:ea typeface="+mn-ea"/>
-                <a:cs typeface="+mn-cs"/>
-              </a:rPr>
-              <a:t>\begin{</a:t>
-            </a:r>
-            <a:r>
-              <a:rPr lang="en-US" sz="1200" kern="1200" dirty="0" err="1">
-                <a:solidFill>
-                  <a:schemeClr val="tx1"/>
-                </a:solidFill>
-                <a:effectLst/>
-                <a:latin typeface="+mn-lt"/>
-                <a:ea typeface="+mn-ea"/>
-                <a:cs typeface="+mn-cs"/>
-              </a:rPr>
-              <a:t>alignat</a:t>
-            </a:r>
-            <a:r>
-              <a:rPr lang="en-US" sz="1200" kern="1200" dirty="0">
-                <a:solidFill>
-                  <a:schemeClr val="tx1"/>
-                </a:solidFill>
-                <a:effectLst/>
-                <a:latin typeface="+mn-lt"/>
-                <a:ea typeface="+mn-ea"/>
-                <a:cs typeface="+mn-cs"/>
-              </a:rPr>
-              <a:t>*}{3}</a:t>
-            </a:r>
-          </a:p>
-          <a:p>
-            <a:r>
-              <a:rPr lang="en-US" sz="1200" kern="1200" dirty="0">
-                <a:solidFill>
-                  <a:schemeClr val="tx1"/>
-                </a:solidFill>
-                <a:effectLst/>
-                <a:latin typeface="+mn-lt"/>
-                <a:ea typeface="+mn-ea"/>
-                <a:cs typeface="+mn-cs"/>
-              </a:rPr>
-              <a:t>\min &amp;  &amp;\quad &amp; f(\x)\\  </a:t>
-            </a:r>
-          </a:p>
-          <a:p>
-            <a:r>
-              <a:rPr lang="en-US" sz="1200" kern="1200" dirty="0">
-                <a:solidFill>
-                  <a:schemeClr val="tx1"/>
-                </a:solidFill>
-                <a:effectLst/>
-                <a:latin typeface="+mn-lt"/>
-                <a:ea typeface="+mn-ea"/>
-                <a:cs typeface="+mn-cs"/>
-              </a:rPr>
-              <a:t>\text{subject to}&amp;  &amp; \quad &amp; </a:t>
-            </a:r>
-            <a:r>
-              <a:rPr lang="en-US" sz="1200" kern="1200" dirty="0" err="1">
-                <a:solidFill>
-                  <a:schemeClr val="tx1"/>
-                </a:solidFill>
-                <a:effectLst/>
-                <a:latin typeface="+mn-lt"/>
-                <a:ea typeface="+mn-ea"/>
-                <a:cs typeface="+mn-cs"/>
-              </a:rPr>
-              <a:t>h_i</a:t>
-            </a:r>
-            <a:r>
-              <a:rPr lang="en-US" sz="1200" kern="1200" dirty="0">
-                <a:solidFill>
-                  <a:schemeClr val="tx1"/>
-                </a:solidFill>
-                <a:effectLst/>
-                <a:latin typeface="+mn-lt"/>
-                <a:ea typeface="+mn-ea"/>
-                <a:cs typeface="+mn-cs"/>
-              </a:rPr>
-              <a:t>(\x) = 0, \</a:t>
-            </a:r>
-            <a:r>
-              <a:rPr lang="en-US" sz="1200" kern="1200" dirty="0" err="1">
-                <a:solidFill>
-                  <a:schemeClr val="tx1"/>
-                </a:solidFill>
-                <a:effectLst/>
-                <a:latin typeface="+mn-lt"/>
-                <a:ea typeface="+mn-ea"/>
-                <a:cs typeface="+mn-cs"/>
-              </a:rPr>
-              <a:t>qquad</a:t>
-            </a:r>
-            <a:r>
-              <a:rPr lang="en-US" sz="1200" kern="1200" dirty="0">
-                <a:solidFill>
-                  <a:schemeClr val="tx1"/>
-                </a:solidFill>
-                <a:effectLst/>
-                <a:latin typeface="+mn-lt"/>
-                <a:ea typeface="+mn-ea"/>
-                <a:cs typeface="+mn-cs"/>
-              </a:rPr>
-              <a:t> </a:t>
-            </a:r>
-            <a:r>
-              <a:rPr lang="en-US" sz="1200" kern="1200" dirty="0" err="1">
-                <a:solidFill>
-                  <a:schemeClr val="tx1"/>
-                </a:solidFill>
-                <a:effectLst/>
-                <a:latin typeface="+mn-lt"/>
-                <a:ea typeface="+mn-ea"/>
-                <a:cs typeface="+mn-cs"/>
-              </a:rPr>
-              <a:t>i</a:t>
-            </a:r>
-            <a:r>
-              <a:rPr lang="en-US" sz="1200" kern="1200" dirty="0">
-                <a:solidFill>
-                  <a:schemeClr val="tx1"/>
-                </a:solidFill>
-                <a:effectLst/>
-                <a:latin typeface="+mn-lt"/>
-                <a:ea typeface="+mn-ea"/>
-                <a:cs typeface="+mn-cs"/>
-              </a:rPr>
-              <a:t>=1,\</a:t>
-            </a:r>
-            <a:r>
-              <a:rPr lang="en-US" sz="1200" kern="1200" dirty="0" err="1">
-                <a:solidFill>
-                  <a:schemeClr val="tx1"/>
-                </a:solidFill>
-                <a:effectLst/>
-                <a:latin typeface="+mn-lt"/>
-                <a:ea typeface="+mn-ea"/>
-                <a:cs typeface="+mn-cs"/>
-              </a:rPr>
-              <a:t>ldots,m</a:t>
-            </a:r>
-            <a:endParaRPr lang="en-US" sz="1200" kern="1200" dirty="0">
-              <a:solidFill>
-                <a:schemeClr val="tx1"/>
-              </a:solidFill>
-              <a:effectLst/>
-              <a:latin typeface="+mn-lt"/>
-              <a:ea typeface="+mn-ea"/>
-              <a:cs typeface="+mn-cs"/>
-            </a:endParaRPr>
-          </a:p>
-          <a:p>
-            <a:r>
-              <a:rPr lang="en-US" sz="1200" kern="1200" dirty="0">
-                <a:solidFill>
-                  <a:schemeClr val="tx1"/>
-                </a:solidFill>
-                <a:effectLst/>
-                <a:latin typeface="+mn-lt"/>
-                <a:ea typeface="+mn-ea"/>
-                <a:cs typeface="+mn-cs"/>
-              </a:rPr>
-              <a:t>\end{</a:t>
-            </a:r>
-            <a:r>
-              <a:rPr lang="en-US" sz="1200" kern="1200" dirty="0" err="1">
-                <a:solidFill>
-                  <a:schemeClr val="tx1"/>
-                </a:solidFill>
-                <a:effectLst/>
-                <a:latin typeface="+mn-lt"/>
-                <a:ea typeface="+mn-ea"/>
-                <a:cs typeface="+mn-cs"/>
-              </a:rPr>
-              <a:t>alignat</a:t>
-            </a:r>
-            <a:r>
-              <a:rPr lang="en-US" sz="1200" kern="1200" dirty="0">
-                <a:solidFill>
-                  <a:schemeClr val="tx1"/>
-                </a:solidFill>
-                <a:effectLst/>
-                <a:latin typeface="+mn-lt"/>
-                <a:ea typeface="+mn-ea"/>
-                <a:cs typeface="+mn-cs"/>
-              </a:rPr>
-              <a:t>*}</a:t>
-            </a:r>
-          </a:p>
-          <a:p>
             <a:endParaRPr lang="en-US" dirty="0"/>
           </a:p>
         </p:txBody>
@@ -975,157 +881,6 @@
           <a:bodyPr/>
           <a:lstStyle/>
           <a:p>
-            <a:pPr marL="0" marR="0" lvl="0" indent="0" algn="l" defTabSz="914400" rtl="0" eaLnBrk="1" fontAlgn="auto" latinLnBrk="0" hangingPunct="1">
-              <a:lnSpc>
-                <a:spcPct val="100000"/>
-              </a:lnSpc>
-              <a:spcBef>
-                <a:spcPts val="0"/>
-              </a:spcBef>
-              <a:spcAft>
-                <a:spcPts val="0"/>
-              </a:spcAft>
-              <a:buClrTx/>
-              <a:buSzTx/>
-              <a:buFontTx/>
-              <a:buNone/>
-              <a:tabLst/>
-              <a:defRPr/>
-            </a:pPr>
-            <a:r>
-              <a:rPr lang="en-US" sz="1200" kern="1200" dirty="0">
-                <a:solidFill>
-                  <a:schemeClr val="tx1"/>
-                </a:solidFill>
-                <a:effectLst/>
-                <a:latin typeface="+mn-lt"/>
-                <a:ea typeface="+mn-ea"/>
-                <a:cs typeface="+mn-cs"/>
-              </a:rPr>
-              <a:t>\</a:t>
-            </a:r>
-            <a:r>
-              <a:rPr lang="en-US" sz="1200" kern="1200" dirty="0" err="1">
-                <a:solidFill>
-                  <a:schemeClr val="tx1"/>
-                </a:solidFill>
-                <a:effectLst/>
-                <a:latin typeface="+mn-lt"/>
-                <a:ea typeface="+mn-ea"/>
-                <a:cs typeface="+mn-cs"/>
-              </a:rPr>
-              <a:t>nabla</a:t>
-            </a:r>
-            <a:r>
-              <a:rPr lang="en-US" sz="1200" kern="1200" dirty="0">
-                <a:solidFill>
-                  <a:schemeClr val="tx1"/>
-                </a:solidFill>
-                <a:effectLst/>
-                <a:latin typeface="+mn-lt"/>
-                <a:ea typeface="+mn-ea"/>
-                <a:cs typeface="+mn-cs"/>
-              </a:rPr>
-              <a:t> f(\x^*) + \sum_{</a:t>
-            </a:r>
-            <a:r>
-              <a:rPr lang="en-US" sz="1200" kern="1200" dirty="0" err="1">
-                <a:solidFill>
-                  <a:schemeClr val="tx1"/>
-                </a:solidFill>
-                <a:effectLst/>
-                <a:latin typeface="+mn-lt"/>
-                <a:ea typeface="+mn-ea"/>
-                <a:cs typeface="+mn-cs"/>
-              </a:rPr>
-              <a:t>i</a:t>
-            </a:r>
-            <a:r>
-              <a:rPr lang="en-US" sz="1200" kern="1200" dirty="0">
-                <a:solidFill>
-                  <a:schemeClr val="tx1"/>
-                </a:solidFill>
-                <a:effectLst/>
-                <a:latin typeface="+mn-lt"/>
-                <a:ea typeface="+mn-ea"/>
-                <a:cs typeface="+mn-cs"/>
-              </a:rPr>
-              <a:t>=1}^m \</a:t>
-            </a:r>
-            <a:r>
-              <a:rPr lang="en-US" sz="1200" kern="1200" dirty="0" err="1">
-                <a:solidFill>
-                  <a:schemeClr val="tx1"/>
-                </a:solidFill>
-                <a:effectLst/>
-                <a:latin typeface="+mn-lt"/>
-                <a:ea typeface="+mn-ea"/>
-                <a:cs typeface="+mn-cs"/>
-              </a:rPr>
-              <a:t>lambda_i</a:t>
-            </a:r>
-            <a:r>
-              <a:rPr lang="en-US" sz="1200" kern="1200" dirty="0">
-                <a:solidFill>
-                  <a:schemeClr val="tx1"/>
-                </a:solidFill>
-                <a:effectLst/>
-                <a:latin typeface="+mn-lt"/>
-                <a:ea typeface="+mn-ea"/>
-                <a:cs typeface="+mn-cs"/>
-              </a:rPr>
-              <a:t> \</a:t>
-            </a:r>
-            <a:r>
-              <a:rPr lang="en-US" sz="1200" kern="1200" dirty="0" err="1">
-                <a:solidFill>
-                  <a:schemeClr val="tx1"/>
-                </a:solidFill>
-                <a:effectLst/>
-                <a:latin typeface="+mn-lt"/>
-                <a:ea typeface="+mn-ea"/>
-                <a:cs typeface="+mn-cs"/>
-              </a:rPr>
-              <a:t>nabla</a:t>
-            </a:r>
-            <a:r>
-              <a:rPr lang="en-US" sz="1200" kern="1200" dirty="0">
-                <a:solidFill>
-                  <a:schemeClr val="tx1"/>
-                </a:solidFill>
-                <a:effectLst/>
-                <a:latin typeface="+mn-lt"/>
-                <a:ea typeface="+mn-ea"/>
-                <a:cs typeface="+mn-cs"/>
-              </a:rPr>
-              <a:t> </a:t>
-            </a:r>
-            <a:r>
-              <a:rPr lang="en-US" sz="1200" kern="1200" dirty="0" err="1">
-                <a:solidFill>
-                  <a:schemeClr val="tx1"/>
-                </a:solidFill>
-                <a:effectLst/>
-                <a:latin typeface="+mn-lt"/>
-                <a:ea typeface="+mn-ea"/>
-                <a:cs typeface="+mn-cs"/>
-              </a:rPr>
-              <a:t>h_i</a:t>
-            </a:r>
-            <a:r>
-              <a:rPr lang="en-US" sz="1200" kern="1200" dirty="0">
-                <a:solidFill>
-                  <a:schemeClr val="tx1"/>
-                </a:solidFill>
-                <a:effectLst/>
-                <a:latin typeface="+mn-lt"/>
-                <a:ea typeface="+mn-ea"/>
-                <a:cs typeface="+mn-cs"/>
-              </a:rPr>
-              <a:t>(\x^*) = 0</a:t>
-            </a:r>
-          </a:p>
-          <a:p>
             <a:endParaRPr lang="en-US" dirty="0"/>
           </a:p>
         </p:txBody>
@@ -1227,138 +982,15 @@
               <a:tabLst/>
               <a:defRPr/>
             </a:pPr>
-            <a:r>
-              <a:rPr lang="en-US" sz="1200" kern="1200" dirty="0">
-                <a:solidFill>
-                  <a:schemeClr val="tx1"/>
-                </a:solidFill>
-                <a:effectLst/>
-                <a:latin typeface="+mn-lt"/>
-                <a:ea typeface="+mn-ea"/>
-                <a:cs typeface="+mn-cs"/>
-              </a:rPr>
-              <a:t>\</a:t>
-            </a:r>
-            <a:r>
-              <a:rPr lang="en-US" sz="1200" kern="1200" dirty="0" err="1">
-                <a:solidFill>
-                  <a:schemeClr val="tx1"/>
-                </a:solidFill>
-                <a:effectLst/>
-                <a:latin typeface="+mn-lt"/>
-                <a:ea typeface="+mn-ea"/>
-                <a:cs typeface="+mn-cs"/>
-              </a:rPr>
-              <a:t>nabla</a:t>
-            </a:r>
-            <a:r>
-              <a:rPr lang="en-US" sz="1200" kern="1200" dirty="0">
-                <a:solidFill>
-                  <a:schemeClr val="tx1"/>
-                </a:solidFill>
-                <a:effectLst/>
-                <a:latin typeface="+mn-lt"/>
-                <a:ea typeface="+mn-ea"/>
-                <a:cs typeface="+mn-cs"/>
-              </a:rPr>
-              <a:t> f(\x^*) + \sum_{</a:t>
-            </a:r>
-            <a:r>
-              <a:rPr lang="en-US" sz="1200" kern="1200" dirty="0" err="1">
-                <a:solidFill>
-                  <a:schemeClr val="tx1"/>
-                </a:solidFill>
-                <a:effectLst/>
-                <a:latin typeface="+mn-lt"/>
-                <a:ea typeface="+mn-ea"/>
-                <a:cs typeface="+mn-cs"/>
-              </a:rPr>
-              <a:t>i</a:t>
-            </a:r>
-            <a:r>
-              <a:rPr lang="en-US" sz="1200" kern="1200" dirty="0">
-                <a:solidFill>
-                  <a:schemeClr val="tx1"/>
-                </a:solidFill>
-                <a:effectLst/>
-                <a:latin typeface="+mn-lt"/>
-                <a:ea typeface="+mn-ea"/>
-                <a:cs typeface="+mn-cs"/>
-              </a:rPr>
-              <a:t>=1}^m \</a:t>
-            </a:r>
-            <a:r>
-              <a:rPr lang="en-US" sz="1200" kern="1200" dirty="0" err="1">
-                <a:solidFill>
-                  <a:schemeClr val="tx1"/>
-                </a:solidFill>
-                <a:effectLst/>
-                <a:latin typeface="+mn-lt"/>
-                <a:ea typeface="+mn-ea"/>
-                <a:cs typeface="+mn-cs"/>
-              </a:rPr>
-              <a:t>lambda_i</a:t>
-            </a:r>
-            <a:r>
-              <a:rPr lang="en-US" sz="1200" kern="1200" dirty="0">
-                <a:solidFill>
-                  <a:schemeClr val="tx1"/>
-                </a:solidFill>
-                <a:effectLst/>
-                <a:latin typeface="+mn-lt"/>
-                <a:ea typeface="+mn-ea"/>
-                <a:cs typeface="+mn-cs"/>
-              </a:rPr>
-              <a:t> \</a:t>
-            </a:r>
-            <a:r>
-              <a:rPr lang="en-US" sz="1200" kern="1200" dirty="0" err="1">
-                <a:solidFill>
-                  <a:schemeClr val="tx1"/>
-                </a:solidFill>
-                <a:effectLst/>
-                <a:latin typeface="+mn-lt"/>
-                <a:ea typeface="+mn-ea"/>
-                <a:cs typeface="+mn-cs"/>
-              </a:rPr>
-              <a:t>nabla</a:t>
-            </a:r>
-            <a:r>
-              <a:rPr lang="en-US" sz="1200" kern="1200" dirty="0">
-                <a:solidFill>
-                  <a:schemeClr val="tx1"/>
-                </a:solidFill>
-                <a:effectLst/>
-                <a:latin typeface="+mn-lt"/>
-                <a:ea typeface="+mn-ea"/>
-                <a:cs typeface="+mn-cs"/>
-              </a:rPr>
-              <a:t> </a:t>
-            </a:r>
-            <a:r>
-              <a:rPr lang="en-US" sz="1200" kern="1200" dirty="0" err="1">
-                <a:solidFill>
-                  <a:schemeClr val="tx1"/>
-                </a:solidFill>
-                <a:effectLst/>
-                <a:latin typeface="+mn-lt"/>
-                <a:ea typeface="+mn-ea"/>
-                <a:cs typeface="+mn-cs"/>
-              </a:rPr>
-              <a:t>h_i</a:t>
-            </a:r>
-            <a:r>
-              <a:rPr lang="en-US" sz="1200" kern="1200" dirty="0">
-                <a:solidFill>
-                  <a:schemeClr val="tx1"/>
-                </a:solidFill>
-                <a:effectLst/>
-                <a:latin typeface="+mn-lt"/>
-                <a:ea typeface="+mn-ea"/>
-                <a:cs typeface="+mn-cs"/>
-              </a:rPr>
-              <a:t>(\x^*) = 0</a:t>
-            </a:r>
+            <a:endParaRPr lang="en-US" sz="1200" kern="1200" dirty="0">
+              <a:solidFill>
+                <a:schemeClr val="tx1"/>
+              </a:solidFill>
+              <a:effectLst/>
+              <a:latin typeface="+mn-lt"/>
+              <a:ea typeface="+mn-ea"/>
+              <a:cs typeface="+mn-cs"/>
+            </a:endParaRPr>
           </a:p>
         </p:txBody>
       </p:sp>
@@ -1442,157 +1074,6 @@
           <a:bodyPr/>
           <a:lstStyle/>
           <a:p>
-            <a:pPr marL="0" marR="0" lvl="0" indent="0" algn="l" defTabSz="914400" rtl="0" eaLnBrk="1" fontAlgn="auto" latinLnBrk="0" hangingPunct="1">
-              <a:lnSpc>
-                <a:spcPct val="100000"/>
-              </a:lnSpc>
-              <a:spcBef>
-                <a:spcPts val="0"/>
-              </a:spcBef>
-              <a:spcAft>
-                <a:spcPts val="0"/>
-              </a:spcAft>
-              <a:buClrTx/>
-              <a:buSzTx/>
-              <a:buFontTx/>
-              <a:buNone/>
-              <a:tabLst/>
-              <a:defRPr/>
-            </a:pPr>
-            <a:r>
-              <a:rPr lang="en-US" sz="1200" kern="1200" dirty="0">
-                <a:solidFill>
-                  <a:schemeClr val="tx1"/>
-                </a:solidFill>
-                <a:effectLst/>
-                <a:latin typeface="+mn-lt"/>
-                <a:ea typeface="+mn-ea"/>
-                <a:cs typeface="+mn-cs"/>
-              </a:rPr>
-              <a:t>\</a:t>
-            </a:r>
-            <a:r>
-              <a:rPr lang="en-US" sz="1200" kern="1200" dirty="0" err="1">
-                <a:solidFill>
-                  <a:schemeClr val="tx1"/>
-                </a:solidFill>
-                <a:effectLst/>
-                <a:latin typeface="+mn-lt"/>
-                <a:ea typeface="+mn-ea"/>
-                <a:cs typeface="+mn-cs"/>
-              </a:rPr>
-              <a:t>nabla</a:t>
-            </a:r>
-            <a:r>
-              <a:rPr lang="en-US" sz="1200" kern="1200" dirty="0">
-                <a:solidFill>
-                  <a:schemeClr val="tx1"/>
-                </a:solidFill>
-                <a:effectLst/>
-                <a:latin typeface="+mn-lt"/>
-                <a:ea typeface="+mn-ea"/>
-                <a:cs typeface="+mn-cs"/>
-              </a:rPr>
-              <a:t> f(\x^*) + \sum_{</a:t>
-            </a:r>
-            <a:r>
-              <a:rPr lang="en-US" sz="1200" kern="1200" dirty="0" err="1">
-                <a:solidFill>
-                  <a:schemeClr val="tx1"/>
-                </a:solidFill>
-                <a:effectLst/>
-                <a:latin typeface="+mn-lt"/>
-                <a:ea typeface="+mn-ea"/>
-                <a:cs typeface="+mn-cs"/>
-              </a:rPr>
-              <a:t>i</a:t>
-            </a:r>
-            <a:r>
-              <a:rPr lang="en-US" sz="1200" kern="1200" dirty="0">
-                <a:solidFill>
-                  <a:schemeClr val="tx1"/>
-                </a:solidFill>
-                <a:effectLst/>
-                <a:latin typeface="+mn-lt"/>
-                <a:ea typeface="+mn-ea"/>
-                <a:cs typeface="+mn-cs"/>
-              </a:rPr>
-              <a:t>=1}^m \</a:t>
-            </a:r>
-            <a:r>
-              <a:rPr lang="en-US" sz="1200" kern="1200" dirty="0" err="1">
-                <a:solidFill>
-                  <a:schemeClr val="tx1"/>
-                </a:solidFill>
-                <a:effectLst/>
-                <a:latin typeface="+mn-lt"/>
-                <a:ea typeface="+mn-ea"/>
-                <a:cs typeface="+mn-cs"/>
-              </a:rPr>
-              <a:t>lambda_i</a:t>
-            </a:r>
-            <a:r>
-              <a:rPr lang="en-US" sz="1200" kern="1200" dirty="0">
-                <a:solidFill>
-                  <a:schemeClr val="tx1"/>
-                </a:solidFill>
-                <a:effectLst/>
-                <a:latin typeface="+mn-lt"/>
-                <a:ea typeface="+mn-ea"/>
-                <a:cs typeface="+mn-cs"/>
-              </a:rPr>
-              <a:t> \</a:t>
-            </a:r>
-            <a:r>
-              <a:rPr lang="en-US" sz="1200" kern="1200" dirty="0" err="1">
-                <a:solidFill>
-                  <a:schemeClr val="tx1"/>
-                </a:solidFill>
-                <a:effectLst/>
-                <a:latin typeface="+mn-lt"/>
-                <a:ea typeface="+mn-ea"/>
-                <a:cs typeface="+mn-cs"/>
-              </a:rPr>
-              <a:t>nabla</a:t>
-            </a:r>
-            <a:r>
-              <a:rPr lang="en-US" sz="1200" kern="1200" dirty="0">
-                <a:solidFill>
-                  <a:schemeClr val="tx1"/>
-                </a:solidFill>
-                <a:effectLst/>
-                <a:latin typeface="+mn-lt"/>
-                <a:ea typeface="+mn-ea"/>
-                <a:cs typeface="+mn-cs"/>
-              </a:rPr>
-              <a:t> </a:t>
-            </a:r>
-            <a:r>
-              <a:rPr lang="en-US" sz="1200" kern="1200" dirty="0" err="1">
-                <a:solidFill>
-                  <a:schemeClr val="tx1"/>
-                </a:solidFill>
-                <a:effectLst/>
-                <a:latin typeface="+mn-lt"/>
-                <a:ea typeface="+mn-ea"/>
-                <a:cs typeface="+mn-cs"/>
-              </a:rPr>
-              <a:t>h_i</a:t>
-            </a:r>
-            <a:r>
-              <a:rPr lang="en-US" sz="1200" kern="1200" dirty="0">
-                <a:solidFill>
-                  <a:schemeClr val="tx1"/>
-                </a:solidFill>
-                <a:effectLst/>
-                <a:latin typeface="+mn-lt"/>
-                <a:ea typeface="+mn-ea"/>
-                <a:cs typeface="+mn-cs"/>
-              </a:rPr>
-              <a:t>(\x^*) = 0</a:t>
-            </a:r>
-          </a:p>
-          <a:p>
             <a:endParaRPr lang="en-US" dirty="0"/>
           </a:p>
         </p:txBody>
@@ -1677,37 +1158,6 @@
           <a:bodyPr/>
           <a:lstStyle/>
           <a:p>
-            <a:pPr marL="0" marR="0" lvl="0" indent="0" algn="l" defTabSz="914400" rtl="0" eaLnBrk="1" fontAlgn="auto" latinLnBrk="0" hangingPunct="1">
-              <a:lnSpc>
-                <a:spcPct val="100000"/>
-              </a:lnSpc>
-              <a:spcBef>
-                <a:spcPts val="0"/>
-              </a:spcBef>
-              <a:spcAft>
-                <a:spcPts val="0"/>
-              </a:spcAft>
-              <a:buClrTx/>
-              <a:buSzTx/>
-              <a:buFontTx/>
-              <a:buNone/>
-              <a:tabLst/>
-              <a:defRPr/>
-            </a:pPr>
-            <a:r>
-              <a:rPr lang="sv" sz="1200" kern="1200" dirty="0">
-                <a:solidFill>
-                  <a:schemeClr val="tx1"/>
-                </a:solidFill>
-                <a:effectLst/>
-                <a:latin typeface="+mn-lt"/>
-                <a:ea typeface="+mn-ea"/>
-                <a:cs typeface="+mn-cs"/>
-              </a:rPr>
-              <a:t>V(\x^*) = \left\{\Delta \x \big \vert \nabla h_i(\x^*)^{\prime}\Delta \x = 0, \, \,i=1, \ldots, m \right\}</a:t>
-            </a:r>
-          </a:p>
-          <a:p>
             <a:endParaRPr lang="en-US" dirty="0"/>
           </a:p>
         </p:txBody>
@@ -1792,50 +1242,7 @@
           <a:bodyPr/>
           <a:lstStyle/>
           <a:p>
-            <a:r>
-              <a:rPr lang="en-US" dirty="0"/>
-              <a:t>\</a:t>
-            </a:r>
-            <a:r>
-              <a:rPr lang="en-US" dirty="0" err="1"/>
-              <a:t>nabla</a:t>
-            </a:r>
-            <a:r>
-              <a:rPr lang="en-US" dirty="0"/>
-              <a:t> f(\x^*) + \sum_{</a:t>
-            </a:r>
-            <a:r>
-              <a:rPr lang="en-US" dirty="0" err="1"/>
-              <a:t>i</a:t>
-            </a:r>
-            <a:r>
-              <a:rPr lang="en-US" dirty="0"/>
-              <a:t>=1}^m \</a:t>
-            </a:r>
-            <a:r>
-              <a:rPr lang="en-US" dirty="0" err="1"/>
-              <a:t>lambda_i</a:t>
-            </a:r>
-            <a:r>
-              <a:rPr lang="en-US" dirty="0"/>
-              <a:t> \</a:t>
-            </a:r>
-            <a:r>
-              <a:rPr lang="en-US" dirty="0" err="1"/>
-              <a:t>nabla</a:t>
-            </a:r>
-            <a:r>
-              <a:rPr lang="en-US" dirty="0"/>
-              <a:t> </a:t>
-            </a:r>
-            <a:r>
-              <a:rPr lang="en-US" dirty="0" err="1"/>
-              <a:t>h_i</a:t>
-            </a:r>
-            <a:r>
-              <a:rPr lang="en-US" dirty="0"/>
-              <a:t>(\x^*) = 0</a:t>
-            </a:r>
+            <a:endParaRPr lang="en-US" dirty="0"/>
           </a:p>
         </p:txBody>
       </p:sp>
@@ -1919,203 +1326,6 @@
           <a:bodyPr/>
           <a:lstStyle/>
           <a:p>
-            <a:r>
-              <a:rPr lang="pt" dirty="0"/>
-              <a:t>L(\</a:t>
-            </a:r>
-            <a:r>
-              <a:rPr lang="pt" dirty="0" err="1"/>
-              <a:t>x</a:t>
-            </a:r>
-            <a:r>
-              <a:rPr lang="pt" dirty="0"/>
-              <a:t>, \lambda) = </a:t>
-            </a:r>
-            <a:r>
-              <a:rPr lang="pt" dirty="0" err="1"/>
-              <a:t>f</a:t>
-            </a:r>
-            <a:r>
-              <a:rPr lang="pt" dirty="0"/>
-              <a:t>(\</a:t>
-            </a:r>
-            <a:r>
-              <a:rPr lang="pt" dirty="0" err="1"/>
-              <a:t>x</a:t>
-            </a:r>
-            <a:r>
-              <a:rPr lang="pt" dirty="0"/>
-              <a:t>) + \sum_{</a:t>
-            </a:r>
-            <a:r>
-              <a:rPr lang="pt" dirty="0" err="1"/>
-              <a:t>i</a:t>
-            </a:r>
-            <a:r>
-              <a:rPr lang="pt" dirty="0"/>
-              <a:t>=1}^m \</a:t>
-            </a:r>
-            <a:r>
-              <a:rPr lang="pt" dirty="0" err="1"/>
-              <a:t>lambda_i</a:t>
-            </a:r>
-            <a:r>
-              <a:rPr lang="pt" dirty="0"/>
-              <a:t> </a:t>
-            </a:r>
-            <a:r>
-              <a:rPr lang="pt" dirty="0" err="1"/>
-              <a:t>h_i</a:t>
-            </a:r>
-            <a:r>
-              <a:rPr lang="pt" dirty="0"/>
-              <a:t>(\</a:t>
-            </a:r>
-            <a:r>
-              <a:rPr lang="pt" dirty="0" err="1"/>
-              <a:t>x</a:t>
-            </a:r>
-            <a:r>
-              <a:rPr lang="pt" dirty="0"/>
-              <a:t>)</a:t>
-            </a:r>
-          </a:p>
-          <a:p>
-            <a:endParaRPr lang="pt" dirty="0"/>
-          </a:p>
-          <a:p>
-            <a:r>
-              <a:rPr lang="en-US" sz="1200" kern="1200" dirty="0">
-                <a:solidFill>
-                  <a:schemeClr val="tx1"/>
-                </a:solidFill>
-                <a:effectLst/>
-                <a:latin typeface="+mn-lt"/>
-                <a:ea typeface="+mn-ea"/>
-                <a:cs typeface="+mn-cs"/>
-              </a:rPr>
-              <a:t>\begin{equation*}</a:t>
-            </a:r>
-          </a:p>
-          <a:p>
-            <a:r>
-              <a:rPr lang="en-US" sz="1200" kern="1200" dirty="0">
-                <a:solidFill>
-                  <a:schemeClr val="tx1"/>
-                </a:solidFill>
-                <a:effectLst/>
-                <a:latin typeface="+mn-lt"/>
-                <a:ea typeface="+mn-ea"/>
-                <a:cs typeface="+mn-cs"/>
-              </a:rPr>
-              <a:t>\begin{split}</a:t>
-            </a:r>
-          </a:p>
-          <a:p>
-            <a:r>
-              <a:rPr lang="en-US" sz="1200" kern="1200" dirty="0">
-                <a:solidFill>
-                  <a:schemeClr val="tx1"/>
-                </a:solidFill>
-                <a:effectLst/>
-                <a:latin typeface="+mn-lt"/>
-                <a:ea typeface="+mn-ea"/>
-                <a:cs typeface="+mn-cs"/>
-              </a:rPr>
-              <a:t>&amp; \</a:t>
-            </a:r>
-            <a:r>
-              <a:rPr lang="en-US" sz="1200" kern="1200" dirty="0" err="1">
-                <a:solidFill>
-                  <a:schemeClr val="tx1"/>
-                </a:solidFill>
-                <a:effectLst/>
-                <a:latin typeface="+mn-lt"/>
-                <a:ea typeface="+mn-ea"/>
-                <a:cs typeface="+mn-cs"/>
-              </a:rPr>
-              <a:t>nabla</a:t>
-            </a:r>
-            <a:r>
-              <a:rPr lang="en-US" sz="1200" kern="1200" dirty="0">
-                <a:solidFill>
-                  <a:schemeClr val="tx1"/>
-                </a:solidFill>
-                <a:effectLst/>
-                <a:latin typeface="+mn-lt"/>
-                <a:ea typeface="+mn-ea"/>
-                <a:cs typeface="+mn-cs"/>
-              </a:rPr>
-              <a:t>_{\x}L(\x^*, \lambda^*) = 0\\</a:t>
-            </a:r>
-          </a:p>
-          <a:p>
-            <a:r>
-              <a:rPr lang="en-US" sz="1200" kern="1200" dirty="0">
-                <a:solidFill>
-                  <a:schemeClr val="tx1"/>
-                </a:solidFill>
-                <a:effectLst/>
-                <a:latin typeface="+mn-lt"/>
-                <a:ea typeface="+mn-ea"/>
-                <a:cs typeface="+mn-cs"/>
-              </a:rPr>
-              <a:t>&amp; \</a:t>
-            </a:r>
-            <a:r>
-              <a:rPr lang="en-US" sz="1200" kern="1200" dirty="0" err="1">
-                <a:solidFill>
-                  <a:schemeClr val="tx1"/>
-                </a:solidFill>
-                <a:effectLst/>
-                <a:latin typeface="+mn-lt"/>
-                <a:ea typeface="+mn-ea"/>
-                <a:cs typeface="+mn-cs"/>
-              </a:rPr>
-              <a:t>nabla</a:t>
-            </a:r>
-            <a:r>
-              <a:rPr lang="en-US" sz="1200" kern="1200" dirty="0">
-                <a:solidFill>
-                  <a:schemeClr val="tx1"/>
-                </a:solidFill>
-                <a:effectLst/>
-                <a:latin typeface="+mn-lt"/>
-                <a:ea typeface="+mn-ea"/>
-                <a:cs typeface="+mn-cs"/>
-              </a:rPr>
-              <a:t>_{\lambda}L(\x^*, \lambda^*) = 0</a:t>
-            </a:r>
-          </a:p>
-          <a:p>
-            <a:r>
-              <a:rPr lang="en-US" sz="1200" kern="1200" dirty="0">
-                <a:solidFill>
-                  <a:schemeClr val="tx1"/>
-                </a:solidFill>
-                <a:effectLst/>
-                <a:latin typeface="+mn-lt"/>
-                <a:ea typeface="+mn-ea"/>
-                <a:cs typeface="+mn-cs"/>
-              </a:rPr>
-              <a:t>\end{split}</a:t>
-            </a:r>
-          </a:p>
-          <a:p>
-            <a:r>
-              <a:rPr lang="en-US" sz="1200" kern="1200" dirty="0">
-                <a:solidFill>
-                  <a:schemeClr val="tx1"/>
-                </a:solidFill>
-                <a:effectLst/>
-                <a:latin typeface="+mn-lt"/>
-                <a:ea typeface="+mn-ea"/>
-                <a:cs typeface="+mn-cs"/>
-              </a:rPr>
-              <a:t>\end{equation*}</a:t>
-            </a:r>
-          </a:p>
-          <a:p>
             <a:endParaRPr lang="en-US" dirty="0"/>
           </a:p>
         </p:txBody>
@@ -2200,477 +1410,6 @@
           <a:bodyPr/>
           <a:lstStyle/>
           <a:p>
-            <a:r>
-              <a:rPr lang="en-US" sz="1200" kern="1200" dirty="0">
-                <a:solidFill>
-                  <a:schemeClr val="tx1"/>
-                </a:solidFill>
-                <a:effectLst/>
-                <a:latin typeface="+mn-lt"/>
-                <a:ea typeface="+mn-ea"/>
-                <a:cs typeface="+mn-cs"/>
-              </a:rPr>
-              <a:t>\begin{</a:t>
-            </a:r>
-            <a:r>
-              <a:rPr lang="en-US" sz="1200" kern="1200" dirty="0" err="1">
-                <a:solidFill>
-                  <a:schemeClr val="tx1"/>
-                </a:solidFill>
-                <a:effectLst/>
-                <a:latin typeface="+mn-lt"/>
-                <a:ea typeface="+mn-ea"/>
-                <a:cs typeface="+mn-cs"/>
-              </a:rPr>
-              <a:t>alignat</a:t>
-            </a:r>
-            <a:r>
-              <a:rPr lang="en-US" sz="1200" kern="1200" dirty="0">
-                <a:solidFill>
-                  <a:schemeClr val="tx1"/>
-                </a:solidFill>
-                <a:effectLst/>
-                <a:latin typeface="+mn-lt"/>
-                <a:ea typeface="+mn-ea"/>
-                <a:cs typeface="+mn-cs"/>
-              </a:rPr>
-              <a:t>*}{3}</a:t>
-            </a:r>
-          </a:p>
-          <a:p>
-            <a:r>
-              <a:rPr lang="en-US" sz="1200" kern="1200" dirty="0">
-                <a:solidFill>
-                  <a:schemeClr val="tx1"/>
-                </a:solidFill>
-                <a:effectLst/>
-                <a:latin typeface="+mn-lt"/>
-                <a:ea typeface="+mn-ea"/>
-                <a:cs typeface="+mn-cs"/>
-              </a:rPr>
-              <a:t>\min &amp;  &amp;\quad &amp; f(\x)\\  </a:t>
-            </a:r>
-          </a:p>
-          <a:p>
-            <a:r>
-              <a:rPr lang="en-US" sz="1200" kern="1200" dirty="0">
-                <a:solidFill>
-                  <a:schemeClr val="tx1"/>
-                </a:solidFill>
-                <a:effectLst/>
-                <a:latin typeface="+mn-lt"/>
-                <a:ea typeface="+mn-ea"/>
-                <a:cs typeface="+mn-cs"/>
-              </a:rPr>
-              <a:t>\text{subject to}&amp;  &amp; \quad &amp; </a:t>
-            </a:r>
-            <a:r>
-              <a:rPr lang="en-US" sz="1200" kern="1200" dirty="0" err="1">
-                <a:solidFill>
-                  <a:schemeClr val="tx1"/>
-                </a:solidFill>
-                <a:effectLst/>
-                <a:latin typeface="+mn-lt"/>
-                <a:ea typeface="+mn-ea"/>
-                <a:cs typeface="+mn-cs"/>
-              </a:rPr>
-              <a:t>h_i</a:t>
-            </a:r>
-            <a:r>
-              <a:rPr lang="en-US" sz="1200" kern="1200" dirty="0">
-                <a:solidFill>
-                  <a:schemeClr val="tx1"/>
-                </a:solidFill>
-                <a:effectLst/>
-                <a:latin typeface="+mn-lt"/>
-                <a:ea typeface="+mn-ea"/>
-                <a:cs typeface="+mn-cs"/>
-              </a:rPr>
-              <a:t>(\x) = 0, \</a:t>
-            </a:r>
-            <a:r>
-              <a:rPr lang="en-US" sz="1200" kern="1200" dirty="0" err="1">
-                <a:solidFill>
-                  <a:schemeClr val="tx1"/>
-                </a:solidFill>
-                <a:effectLst/>
-                <a:latin typeface="+mn-lt"/>
-                <a:ea typeface="+mn-ea"/>
-                <a:cs typeface="+mn-cs"/>
-              </a:rPr>
-              <a:t>qquad</a:t>
-            </a:r>
-            <a:r>
-              <a:rPr lang="en-US" sz="1200" kern="1200" dirty="0">
-                <a:solidFill>
-                  <a:schemeClr val="tx1"/>
-                </a:solidFill>
-                <a:effectLst/>
-                <a:latin typeface="+mn-lt"/>
-                <a:ea typeface="+mn-ea"/>
-                <a:cs typeface="+mn-cs"/>
-              </a:rPr>
-              <a:t> </a:t>
-            </a:r>
-            <a:r>
-              <a:rPr lang="en-US" sz="1200" kern="1200" dirty="0" err="1">
-                <a:solidFill>
-                  <a:schemeClr val="tx1"/>
-                </a:solidFill>
-                <a:effectLst/>
-                <a:latin typeface="+mn-lt"/>
-                <a:ea typeface="+mn-ea"/>
-                <a:cs typeface="+mn-cs"/>
-              </a:rPr>
-              <a:t>i</a:t>
-            </a:r>
-            <a:r>
-              <a:rPr lang="en-US" sz="1200" kern="1200" dirty="0">
-                <a:solidFill>
-                  <a:schemeClr val="tx1"/>
-                </a:solidFill>
-                <a:effectLst/>
-                <a:latin typeface="+mn-lt"/>
-                <a:ea typeface="+mn-ea"/>
-                <a:cs typeface="+mn-cs"/>
-              </a:rPr>
-              <a:t>=1,\</a:t>
-            </a:r>
-            <a:r>
-              <a:rPr lang="en-US" sz="1200" kern="1200" dirty="0" err="1">
-                <a:solidFill>
-                  <a:schemeClr val="tx1"/>
-                </a:solidFill>
-                <a:effectLst/>
-                <a:latin typeface="+mn-lt"/>
-                <a:ea typeface="+mn-ea"/>
-                <a:cs typeface="+mn-cs"/>
-              </a:rPr>
-              <a:t>ldots,m</a:t>
-            </a:r>
-            <a:r>
-              <a:rPr lang="en-US" sz="1200" kern="1200" dirty="0">
-                <a:solidFill>
-                  <a:schemeClr val="tx1"/>
-                </a:solidFill>
-                <a:effectLst/>
-                <a:latin typeface="+mn-lt"/>
-                <a:ea typeface="+mn-ea"/>
-                <a:cs typeface="+mn-cs"/>
-              </a:rPr>
-              <a:t>\\</a:t>
-            </a:r>
-          </a:p>
-          <a:p>
-            <a:r>
-              <a:rPr lang="en-US" sz="1200" kern="1200" dirty="0">
-                <a:solidFill>
-                  <a:schemeClr val="tx1"/>
-                </a:solidFill>
-                <a:effectLst/>
-                <a:latin typeface="+mn-lt"/>
-                <a:ea typeface="+mn-ea"/>
-                <a:cs typeface="+mn-cs"/>
-              </a:rPr>
-              <a:t>&amp;  &amp; \quad &amp; </a:t>
-            </a:r>
-            <a:r>
-              <a:rPr lang="en-US" sz="1200" kern="1200" dirty="0" err="1">
-                <a:solidFill>
-                  <a:schemeClr val="tx1"/>
-                </a:solidFill>
-                <a:effectLst/>
-                <a:latin typeface="+mn-lt"/>
-                <a:ea typeface="+mn-ea"/>
-                <a:cs typeface="+mn-cs"/>
-              </a:rPr>
-              <a:t>g_j</a:t>
-            </a:r>
-            <a:r>
-              <a:rPr lang="en-US" sz="1200" kern="1200" dirty="0">
-                <a:solidFill>
-                  <a:schemeClr val="tx1"/>
-                </a:solidFill>
-                <a:effectLst/>
-                <a:latin typeface="+mn-lt"/>
-                <a:ea typeface="+mn-ea"/>
-                <a:cs typeface="+mn-cs"/>
-              </a:rPr>
-              <a:t>(\x) \</a:t>
-            </a:r>
-            <a:r>
-              <a:rPr lang="en-US" sz="1200" kern="1200" dirty="0" err="1">
-                <a:solidFill>
-                  <a:schemeClr val="tx1"/>
-                </a:solidFill>
-                <a:effectLst/>
-                <a:latin typeface="+mn-lt"/>
-                <a:ea typeface="+mn-ea"/>
-                <a:cs typeface="+mn-cs"/>
-              </a:rPr>
-              <a:t>leq</a:t>
-            </a:r>
-            <a:r>
-              <a:rPr lang="en-US" sz="1200" kern="1200" dirty="0">
-                <a:solidFill>
-                  <a:schemeClr val="tx1"/>
-                </a:solidFill>
-                <a:effectLst/>
-                <a:latin typeface="+mn-lt"/>
-                <a:ea typeface="+mn-ea"/>
-                <a:cs typeface="+mn-cs"/>
-              </a:rPr>
-              <a:t> 0, \</a:t>
-            </a:r>
-            <a:r>
-              <a:rPr lang="en-US" sz="1200" kern="1200" dirty="0" err="1">
-                <a:solidFill>
-                  <a:schemeClr val="tx1"/>
-                </a:solidFill>
-                <a:effectLst/>
-                <a:latin typeface="+mn-lt"/>
-                <a:ea typeface="+mn-ea"/>
-                <a:cs typeface="+mn-cs"/>
-              </a:rPr>
-              <a:t>qquad</a:t>
-            </a:r>
-            <a:r>
-              <a:rPr lang="en-US" sz="1200" kern="1200" dirty="0">
-                <a:solidFill>
-                  <a:schemeClr val="tx1"/>
-                </a:solidFill>
-                <a:effectLst/>
-                <a:latin typeface="+mn-lt"/>
-                <a:ea typeface="+mn-ea"/>
-                <a:cs typeface="+mn-cs"/>
-              </a:rPr>
-              <a:t> j=1,\</a:t>
-            </a:r>
-            <a:r>
-              <a:rPr lang="en-US" sz="1200" kern="1200" dirty="0" err="1">
-                <a:solidFill>
-                  <a:schemeClr val="tx1"/>
-                </a:solidFill>
-                <a:effectLst/>
-                <a:latin typeface="+mn-lt"/>
-                <a:ea typeface="+mn-ea"/>
-                <a:cs typeface="+mn-cs"/>
-              </a:rPr>
-              <a:t>ldots,r</a:t>
-            </a:r>
-            <a:endParaRPr lang="en-US" sz="1200" kern="1200" dirty="0">
-              <a:solidFill>
-                <a:schemeClr val="tx1"/>
-              </a:solidFill>
-              <a:effectLst/>
-              <a:latin typeface="+mn-lt"/>
-              <a:ea typeface="+mn-ea"/>
-              <a:cs typeface="+mn-cs"/>
-            </a:endParaRPr>
-          </a:p>
-          <a:p>
-            <a:r>
-              <a:rPr lang="en-US" sz="1200" kern="1200" dirty="0">
-                <a:solidFill>
-                  <a:schemeClr val="tx1"/>
-                </a:solidFill>
-                <a:effectLst/>
-                <a:latin typeface="+mn-lt"/>
-                <a:ea typeface="+mn-ea"/>
-                <a:cs typeface="+mn-cs"/>
-              </a:rPr>
-              <a:t>\end{</a:t>
-            </a:r>
-            <a:r>
-              <a:rPr lang="en-US" sz="1200" kern="1200" dirty="0" err="1">
-                <a:solidFill>
-                  <a:schemeClr val="tx1"/>
-                </a:solidFill>
-                <a:effectLst/>
-                <a:latin typeface="+mn-lt"/>
-                <a:ea typeface="+mn-ea"/>
-                <a:cs typeface="+mn-cs"/>
-              </a:rPr>
-              <a:t>alignat</a:t>
-            </a:r>
-            <a:r>
-              <a:rPr lang="en-US" sz="1200" kern="1200" dirty="0">
-                <a:solidFill>
-                  <a:schemeClr val="tx1"/>
-                </a:solidFill>
-                <a:effectLst/>
-                <a:latin typeface="+mn-lt"/>
-                <a:ea typeface="+mn-ea"/>
-                <a:cs typeface="+mn-cs"/>
-              </a:rPr>
-              <a:t>*}</a:t>
-            </a:r>
-          </a:p>
-          <a:p>
-            <a:endParaRPr lang="en-US" sz="1200" kern="1200" dirty="0">
-              <a:solidFill>
-                <a:schemeClr val="tx1"/>
-              </a:solidFill>
-              <a:effectLst/>
-              <a:latin typeface="+mn-lt"/>
-              <a:ea typeface="+mn-ea"/>
-              <a:cs typeface="+mn-cs"/>
-            </a:endParaRPr>
-          </a:p>
-          <a:p>
-            <a:r>
-              <a:rPr lang="en-US" sz="1200" kern="1200" dirty="0">
-                <a:solidFill>
-                  <a:schemeClr val="tx1"/>
-                </a:solidFill>
-                <a:effectLst/>
-                <a:latin typeface="+mn-lt"/>
-                <a:ea typeface="+mn-ea"/>
-                <a:cs typeface="+mn-cs"/>
-              </a:rPr>
-              <a:t>\begin{</a:t>
-            </a:r>
-            <a:r>
-              <a:rPr lang="en-US" sz="1200" kern="1200" dirty="0" err="1">
-                <a:solidFill>
-                  <a:schemeClr val="tx1"/>
-                </a:solidFill>
-                <a:effectLst/>
-                <a:latin typeface="+mn-lt"/>
-                <a:ea typeface="+mn-ea"/>
-                <a:cs typeface="+mn-cs"/>
-              </a:rPr>
-              <a:t>alignat</a:t>
-            </a:r>
-            <a:r>
-              <a:rPr lang="en-US" sz="1200" kern="1200" dirty="0">
-                <a:solidFill>
-                  <a:schemeClr val="tx1"/>
-                </a:solidFill>
-                <a:effectLst/>
-                <a:latin typeface="+mn-lt"/>
-                <a:ea typeface="+mn-ea"/>
-                <a:cs typeface="+mn-cs"/>
-              </a:rPr>
-              <a:t>*}{3}</a:t>
-            </a:r>
-          </a:p>
-          <a:p>
-            <a:r>
-              <a:rPr lang="en-US" sz="1200" kern="1200" dirty="0">
-                <a:solidFill>
-                  <a:schemeClr val="tx1"/>
-                </a:solidFill>
-                <a:effectLst/>
-                <a:latin typeface="+mn-lt"/>
-                <a:ea typeface="+mn-ea"/>
-                <a:cs typeface="+mn-cs"/>
-              </a:rPr>
-              <a:t>\min &amp;  &amp;\quad &amp; f(\x)\\  </a:t>
-            </a:r>
-          </a:p>
-          <a:p>
-            <a:r>
-              <a:rPr lang="en-US" sz="1200" kern="1200" dirty="0">
-                <a:solidFill>
-                  <a:schemeClr val="tx1"/>
-                </a:solidFill>
-                <a:effectLst/>
-                <a:latin typeface="+mn-lt"/>
-                <a:ea typeface="+mn-ea"/>
-                <a:cs typeface="+mn-cs"/>
-              </a:rPr>
-              <a:t>\text{subject to}&amp;  &amp; \quad &amp; \h(\x) = 0 \\</a:t>
-            </a:r>
-          </a:p>
-          <a:p>
-            <a:r>
-              <a:rPr lang="en-US" sz="1200" kern="1200" dirty="0">
-                <a:solidFill>
-                  <a:schemeClr val="tx1"/>
-                </a:solidFill>
-                <a:effectLst/>
-                <a:latin typeface="+mn-lt"/>
-                <a:ea typeface="+mn-ea"/>
-                <a:cs typeface="+mn-cs"/>
-              </a:rPr>
-              <a:t>&amp;  &amp; \quad &amp; \g(\x) \</a:t>
-            </a:r>
-            <a:r>
-              <a:rPr lang="en-US" sz="1200" kern="1200" dirty="0" err="1">
-                <a:solidFill>
-                  <a:schemeClr val="tx1"/>
-                </a:solidFill>
-                <a:effectLst/>
-                <a:latin typeface="+mn-lt"/>
-                <a:ea typeface="+mn-ea"/>
-                <a:cs typeface="+mn-cs"/>
-              </a:rPr>
-              <a:t>leq</a:t>
-            </a:r>
-            <a:r>
-              <a:rPr lang="en-US" sz="1200" kern="1200" dirty="0">
-                <a:solidFill>
-                  <a:schemeClr val="tx1"/>
-                </a:solidFill>
-                <a:effectLst/>
-                <a:latin typeface="+mn-lt"/>
-                <a:ea typeface="+mn-ea"/>
-                <a:cs typeface="+mn-cs"/>
-              </a:rPr>
-              <a:t> 0</a:t>
-            </a:r>
-          </a:p>
-          <a:p>
-            <a:r>
-              <a:rPr lang="en-US" sz="1200" kern="1200" dirty="0">
-                <a:solidFill>
-                  <a:schemeClr val="tx1"/>
-                </a:solidFill>
-                <a:effectLst/>
-                <a:latin typeface="+mn-lt"/>
-                <a:ea typeface="+mn-ea"/>
-                <a:cs typeface="+mn-cs"/>
-              </a:rPr>
-              <a:t>\end{</a:t>
-            </a:r>
-            <a:r>
-              <a:rPr lang="en-US" sz="1200" kern="1200" dirty="0" err="1">
-                <a:solidFill>
-                  <a:schemeClr val="tx1"/>
-                </a:solidFill>
-                <a:effectLst/>
-                <a:latin typeface="+mn-lt"/>
-                <a:ea typeface="+mn-ea"/>
-                <a:cs typeface="+mn-cs"/>
-              </a:rPr>
-              <a:t>alignat</a:t>
-            </a:r>
-            <a:r>
-              <a:rPr lang="en-US" sz="1200" kern="1200" dirty="0">
-                <a:solidFill>
-                  <a:schemeClr val="tx1"/>
-                </a:solidFill>
-                <a:effectLst/>
-                <a:latin typeface="+mn-lt"/>
-                <a:ea typeface="+mn-ea"/>
-                <a:cs typeface="+mn-cs"/>
-              </a:rPr>
-              <a:t>*}</a:t>
-            </a:r>
-          </a:p>
-          <a:p>
-            <a:endParaRPr lang="en-US" sz="1200" kern="1200" dirty="0">
-              <a:solidFill>
-                <a:schemeClr val="tx1"/>
-              </a:solidFill>
-              <a:effectLst/>
-              <a:latin typeface="+mn-lt"/>
-              <a:ea typeface="+mn-ea"/>
-              <a:cs typeface="+mn-cs"/>
-            </a:endParaRPr>
-          </a:p>
-          <a:p>
             <a:endParaRPr lang="en-US" dirty="0"/>
           </a:p>
         </p:txBody>
@@ -2755,446 +1494,6 @@
           <a:bodyPr/>
           <a:lstStyle/>
           <a:p>
-            <a:r>
-              <a:rPr lang="en-US" dirty="0"/>
-              <a:t>\</a:t>
-            </a:r>
-            <a:r>
-              <a:rPr lang="en-US" dirty="0" err="1"/>
-              <a:t>nabla</a:t>
-            </a:r>
-            <a:r>
-              <a:rPr lang="en-US" dirty="0"/>
-              <a:t> f(\x^*) + \sum_{</a:t>
-            </a:r>
-            <a:r>
-              <a:rPr lang="en-US" dirty="0" err="1"/>
-              <a:t>i</a:t>
-            </a:r>
-            <a:r>
-              <a:rPr lang="en-US" dirty="0"/>
-              <a:t>=1}^n \</a:t>
-            </a:r>
-            <a:r>
-              <a:rPr lang="en-US" dirty="0" err="1"/>
-              <a:t>lambda_i</a:t>
-            </a:r>
-            <a:r>
-              <a:rPr lang="en-US" dirty="0"/>
-              <a:t>^* \</a:t>
-            </a:r>
-            <a:r>
-              <a:rPr lang="en-US" dirty="0" err="1"/>
-              <a:t>nabla</a:t>
-            </a:r>
-            <a:r>
-              <a:rPr lang="en-US" dirty="0"/>
-              <a:t> </a:t>
-            </a:r>
-            <a:r>
-              <a:rPr lang="en-US" dirty="0" err="1"/>
-              <a:t>h_i</a:t>
-            </a:r>
-            <a:r>
-              <a:rPr lang="en-US" dirty="0"/>
-              <a:t>(\x^*) + \sum_{j\in A(\x^*)} \</a:t>
-            </a:r>
-            <a:r>
-              <a:rPr lang="en-US" dirty="0" err="1"/>
-              <a:t>mu_j</a:t>
-            </a:r>
-            <a:r>
-              <a:rPr lang="en-US" dirty="0"/>
-              <a:t>^*\</a:t>
-            </a:r>
-            <a:r>
-              <a:rPr lang="en-US" dirty="0" err="1"/>
-              <a:t>nabla</a:t>
-            </a:r>
-            <a:r>
-              <a:rPr lang="en-US" dirty="0"/>
-              <a:t> </a:t>
-            </a:r>
-            <a:r>
-              <a:rPr lang="en-US" dirty="0" err="1"/>
-              <a:t>g_j</a:t>
-            </a:r>
-            <a:r>
-              <a:rPr lang="en-US" dirty="0"/>
-              <a:t>(\x^*) = 0</a:t>
-            </a:r>
-          </a:p>
-          <a:p>
-            <a:endParaRPr lang="en-US" dirty="0"/>
-          </a:p>
-          <a:p>
-            <a:endParaRPr lang="en-US" dirty="0"/>
-          </a:p>
-          <a:p>
-            <a:r>
-              <a:rPr lang="en-US" sz="1200" kern="1200" dirty="0">
-                <a:solidFill>
-                  <a:schemeClr val="tx1"/>
-                </a:solidFill>
-                <a:effectLst/>
-                <a:latin typeface="+mn-lt"/>
-                <a:ea typeface="+mn-ea"/>
-                <a:cs typeface="+mn-cs"/>
-              </a:rPr>
-              <a:t>&amp;  \</a:t>
-            </a:r>
-            <a:r>
-              <a:rPr lang="en-US" sz="1200" kern="1200" dirty="0" err="1">
-                <a:solidFill>
-                  <a:schemeClr val="tx1"/>
-                </a:solidFill>
-                <a:effectLst/>
-                <a:latin typeface="+mn-lt"/>
-                <a:ea typeface="+mn-ea"/>
-                <a:cs typeface="+mn-cs"/>
-              </a:rPr>
-              <a:t>nabla</a:t>
-            </a:r>
-            <a:r>
-              <a:rPr lang="en-US" sz="1200" kern="1200" dirty="0">
-                <a:solidFill>
-                  <a:schemeClr val="tx1"/>
-                </a:solidFill>
-                <a:effectLst/>
-                <a:latin typeface="+mn-lt"/>
-                <a:ea typeface="+mn-ea"/>
-                <a:cs typeface="+mn-cs"/>
-              </a:rPr>
-              <a:t> f(\x^*) + \sum_{</a:t>
-            </a:r>
-            <a:r>
-              <a:rPr lang="en-US" sz="1200" kern="1200" dirty="0" err="1">
-                <a:solidFill>
-                  <a:schemeClr val="tx1"/>
-                </a:solidFill>
-                <a:effectLst/>
-                <a:latin typeface="+mn-lt"/>
-                <a:ea typeface="+mn-ea"/>
-                <a:cs typeface="+mn-cs"/>
-              </a:rPr>
-              <a:t>i</a:t>
-            </a:r>
-            <a:r>
-              <a:rPr lang="en-US" sz="1200" kern="1200" dirty="0">
-                <a:solidFill>
-                  <a:schemeClr val="tx1"/>
-                </a:solidFill>
-                <a:effectLst/>
-                <a:latin typeface="+mn-lt"/>
-                <a:ea typeface="+mn-ea"/>
-                <a:cs typeface="+mn-cs"/>
-              </a:rPr>
-              <a:t>=1}^n \</a:t>
-            </a:r>
-            <a:r>
-              <a:rPr lang="en-US" sz="1200" kern="1200" dirty="0" err="1">
-                <a:solidFill>
-                  <a:schemeClr val="tx1"/>
-                </a:solidFill>
-                <a:effectLst/>
-                <a:latin typeface="+mn-lt"/>
-                <a:ea typeface="+mn-ea"/>
-                <a:cs typeface="+mn-cs"/>
-              </a:rPr>
-              <a:t>lambda_i</a:t>
-            </a:r>
-            <a:r>
-              <a:rPr lang="en-US" sz="1200" kern="1200" dirty="0">
-                <a:solidFill>
-                  <a:schemeClr val="tx1"/>
-                </a:solidFill>
-                <a:effectLst/>
-                <a:latin typeface="+mn-lt"/>
-                <a:ea typeface="+mn-ea"/>
-                <a:cs typeface="+mn-cs"/>
-              </a:rPr>
-              <a:t>^* \</a:t>
-            </a:r>
-            <a:r>
-              <a:rPr lang="en-US" sz="1200" kern="1200" dirty="0" err="1">
-                <a:solidFill>
-                  <a:schemeClr val="tx1"/>
-                </a:solidFill>
-                <a:effectLst/>
-                <a:latin typeface="+mn-lt"/>
-                <a:ea typeface="+mn-ea"/>
-                <a:cs typeface="+mn-cs"/>
-              </a:rPr>
-              <a:t>nabla</a:t>
-            </a:r>
-            <a:r>
-              <a:rPr lang="en-US" sz="1200" kern="1200" dirty="0">
-                <a:solidFill>
-                  <a:schemeClr val="tx1"/>
-                </a:solidFill>
-                <a:effectLst/>
-                <a:latin typeface="+mn-lt"/>
-                <a:ea typeface="+mn-ea"/>
-                <a:cs typeface="+mn-cs"/>
-              </a:rPr>
-              <a:t> </a:t>
-            </a:r>
-            <a:r>
-              <a:rPr lang="en-US" sz="1200" kern="1200" dirty="0" err="1">
-                <a:solidFill>
-                  <a:schemeClr val="tx1"/>
-                </a:solidFill>
-                <a:effectLst/>
-                <a:latin typeface="+mn-lt"/>
-                <a:ea typeface="+mn-ea"/>
-                <a:cs typeface="+mn-cs"/>
-              </a:rPr>
-              <a:t>h_i</a:t>
-            </a:r>
-            <a:r>
-              <a:rPr lang="en-US" sz="1200" kern="1200" dirty="0">
-                <a:solidFill>
-                  <a:schemeClr val="tx1"/>
-                </a:solidFill>
-                <a:effectLst/>
-                <a:latin typeface="+mn-lt"/>
-                <a:ea typeface="+mn-ea"/>
-                <a:cs typeface="+mn-cs"/>
-              </a:rPr>
-              <a:t>(\x^*) + \sum_{j=1}^r \</a:t>
-            </a:r>
-            <a:r>
-              <a:rPr lang="en-US" sz="1200" kern="1200" dirty="0" err="1">
-                <a:solidFill>
-                  <a:schemeClr val="tx1"/>
-                </a:solidFill>
-                <a:effectLst/>
-                <a:latin typeface="+mn-lt"/>
-                <a:ea typeface="+mn-ea"/>
-                <a:cs typeface="+mn-cs"/>
-              </a:rPr>
-              <a:t>mu_j</a:t>
-            </a:r>
-            <a:r>
-              <a:rPr lang="en-US" sz="1200" kern="1200" dirty="0">
-                <a:solidFill>
-                  <a:schemeClr val="tx1"/>
-                </a:solidFill>
-                <a:effectLst/>
-                <a:latin typeface="+mn-lt"/>
-                <a:ea typeface="+mn-ea"/>
-                <a:cs typeface="+mn-cs"/>
-              </a:rPr>
-              <a:t>^*\</a:t>
-            </a:r>
-            <a:r>
-              <a:rPr lang="en-US" sz="1200" kern="1200" dirty="0" err="1">
-                <a:solidFill>
-                  <a:schemeClr val="tx1"/>
-                </a:solidFill>
-                <a:effectLst/>
-                <a:latin typeface="+mn-lt"/>
-                <a:ea typeface="+mn-ea"/>
-                <a:cs typeface="+mn-cs"/>
-              </a:rPr>
-              <a:t>nabla</a:t>
-            </a:r>
-            <a:r>
-              <a:rPr lang="en-US" sz="1200" kern="1200" dirty="0">
-                <a:solidFill>
-                  <a:schemeClr val="tx1"/>
-                </a:solidFill>
-                <a:effectLst/>
-                <a:latin typeface="+mn-lt"/>
-                <a:ea typeface="+mn-ea"/>
-                <a:cs typeface="+mn-cs"/>
-              </a:rPr>
-              <a:t> </a:t>
-            </a:r>
-            <a:r>
-              <a:rPr lang="en-US" sz="1200" kern="1200" dirty="0" err="1">
-                <a:solidFill>
-                  <a:schemeClr val="tx1"/>
-                </a:solidFill>
-                <a:effectLst/>
-                <a:latin typeface="+mn-lt"/>
-                <a:ea typeface="+mn-ea"/>
-                <a:cs typeface="+mn-cs"/>
-              </a:rPr>
-              <a:t>g_j</a:t>
-            </a:r>
-            <a:r>
-              <a:rPr lang="en-US" sz="1200" kern="1200" dirty="0">
-                <a:solidFill>
-                  <a:schemeClr val="tx1"/>
-                </a:solidFill>
-                <a:effectLst/>
-                <a:latin typeface="+mn-lt"/>
-                <a:ea typeface="+mn-ea"/>
-                <a:cs typeface="+mn-cs"/>
-              </a:rPr>
-              <a:t>(\x^*) = 0\\</a:t>
-            </a:r>
-          </a:p>
-          <a:p>
-            <a:r>
-              <a:rPr lang="en-US" sz="1200" kern="1200" dirty="0">
-                <a:solidFill>
-                  <a:schemeClr val="tx1"/>
-                </a:solidFill>
-                <a:effectLst/>
-                <a:latin typeface="+mn-lt"/>
-                <a:ea typeface="+mn-ea"/>
-                <a:cs typeface="+mn-cs"/>
-              </a:rPr>
-              <a:t>&amp;\</a:t>
-            </a:r>
-            <a:r>
-              <a:rPr lang="en-US" sz="1200" kern="1200" dirty="0" err="1">
-                <a:solidFill>
-                  <a:schemeClr val="tx1"/>
-                </a:solidFill>
-                <a:effectLst/>
-                <a:latin typeface="+mn-lt"/>
-                <a:ea typeface="+mn-ea"/>
-                <a:cs typeface="+mn-cs"/>
-              </a:rPr>
-              <a:t>mu_j</a:t>
-            </a:r>
-            <a:r>
-              <a:rPr lang="en-US" sz="1200" kern="1200" dirty="0">
-                <a:solidFill>
-                  <a:schemeClr val="tx1"/>
-                </a:solidFill>
-                <a:effectLst/>
-                <a:latin typeface="+mn-lt"/>
-                <a:ea typeface="+mn-ea"/>
-                <a:cs typeface="+mn-cs"/>
-              </a:rPr>
-              <a:t>^* = 0 \quad \</a:t>
-            </a:r>
-            <a:r>
-              <a:rPr lang="en-US" sz="1200" kern="1200" dirty="0" err="1">
-                <a:solidFill>
-                  <a:schemeClr val="tx1"/>
-                </a:solidFill>
-                <a:effectLst/>
-                <a:latin typeface="+mn-lt"/>
-                <a:ea typeface="+mn-ea"/>
-                <a:cs typeface="+mn-cs"/>
-              </a:rPr>
-              <a:t>forall</a:t>
-            </a:r>
-            <a:r>
-              <a:rPr lang="en-US" sz="1200" kern="1200" dirty="0">
-                <a:solidFill>
-                  <a:schemeClr val="tx1"/>
-                </a:solidFill>
-                <a:effectLst/>
-                <a:latin typeface="+mn-lt"/>
-                <a:ea typeface="+mn-ea"/>
-                <a:cs typeface="+mn-cs"/>
-              </a:rPr>
-              <a:t> j\</a:t>
-            </a:r>
-            <a:r>
-              <a:rPr lang="en-US" sz="1200" kern="1200" dirty="0" err="1">
-                <a:solidFill>
-                  <a:schemeClr val="tx1"/>
-                </a:solidFill>
-                <a:effectLst/>
-                <a:latin typeface="+mn-lt"/>
-                <a:ea typeface="+mn-ea"/>
-                <a:cs typeface="+mn-cs"/>
-              </a:rPr>
-              <a:t>notin</a:t>
-            </a:r>
-            <a:r>
-              <a:rPr lang="en-US" sz="1200" kern="1200" dirty="0">
-                <a:solidFill>
-                  <a:schemeClr val="tx1"/>
-                </a:solidFill>
-                <a:effectLst/>
-                <a:latin typeface="+mn-lt"/>
-                <a:ea typeface="+mn-ea"/>
-                <a:cs typeface="+mn-cs"/>
-              </a:rPr>
-              <a:t> A(\x^*) \</a:t>
-            </a:r>
-            <a:r>
-              <a:rPr lang="en-US" sz="1200" kern="1200" dirty="0" err="1">
-                <a:solidFill>
-                  <a:schemeClr val="tx1"/>
-                </a:solidFill>
-                <a:effectLst/>
-                <a:latin typeface="+mn-lt"/>
-                <a:ea typeface="+mn-ea"/>
-                <a:cs typeface="+mn-cs"/>
-              </a:rPr>
-              <a:t>qquad</a:t>
-            </a:r>
-            <a:r>
-              <a:rPr lang="en-US" sz="1200" kern="1200" dirty="0">
-                <a:solidFill>
-                  <a:schemeClr val="tx1"/>
-                </a:solidFill>
-                <a:effectLst/>
-                <a:latin typeface="+mn-lt"/>
-                <a:ea typeface="+mn-ea"/>
-                <a:cs typeface="+mn-cs"/>
-              </a:rPr>
-              <a:t> \text{(indeed $\</a:t>
-            </a:r>
-            <a:r>
-              <a:rPr lang="en-US" sz="1200" kern="1200" dirty="0" err="1">
-                <a:solidFill>
-                  <a:schemeClr val="tx1"/>
-                </a:solidFill>
-                <a:effectLst/>
-                <a:latin typeface="+mn-lt"/>
-                <a:ea typeface="+mn-ea"/>
-                <a:cs typeface="+mn-cs"/>
-              </a:rPr>
-              <a:t>mu_j</a:t>
-            </a:r>
-            <a:r>
-              <a:rPr lang="en-US" sz="1200" kern="1200" dirty="0">
-                <a:solidFill>
-                  <a:schemeClr val="tx1"/>
-                </a:solidFill>
-                <a:effectLst/>
-                <a:latin typeface="+mn-lt"/>
-                <a:ea typeface="+mn-ea"/>
-                <a:cs typeface="+mn-cs"/>
-              </a:rPr>
-              <a:t>^*\</a:t>
-            </a:r>
-            <a:r>
-              <a:rPr lang="en-US" sz="1200" kern="1200" dirty="0" err="1">
-                <a:solidFill>
-                  <a:schemeClr val="tx1"/>
-                </a:solidFill>
-                <a:effectLst/>
-                <a:latin typeface="+mn-lt"/>
-                <a:ea typeface="+mn-ea"/>
-                <a:cs typeface="+mn-cs"/>
-              </a:rPr>
-              <a:t>geq</a:t>
-            </a:r>
-            <a:r>
-              <a:rPr lang="en-US" sz="1200" kern="1200" dirty="0">
-                <a:solidFill>
-                  <a:schemeClr val="tx1"/>
-                </a:solidFill>
-                <a:effectLst/>
-                <a:latin typeface="+mn-lt"/>
-                <a:ea typeface="+mn-ea"/>
-                <a:cs typeface="+mn-cs"/>
-              </a:rPr>
-              <a:t> 0 $)} </a:t>
-            </a:r>
-          </a:p>
-          <a:p>
             <a:endParaRPr lang="en-US" dirty="0"/>
           </a:p>
         </p:txBody>
@@ -3279,631 +1578,6 @@
           <a:bodyPr/>
           <a:lstStyle/>
           <a:p>
-            <a:r>
-              <a:rPr lang="pt" sz="1200" kern="1200" dirty="0">
-                <a:solidFill>
-                  <a:schemeClr val="tx1"/>
-                </a:solidFill>
-                <a:effectLst/>
-                <a:latin typeface="+mn-lt"/>
-                <a:ea typeface="+mn-ea"/>
-                <a:cs typeface="+mn-cs"/>
-              </a:rPr>
-              <a:t>L(\</a:t>
-            </a:r>
-            <a:r>
-              <a:rPr lang="pt" sz="1200" kern="1200" dirty="0" err="1">
-                <a:solidFill>
-                  <a:schemeClr val="tx1"/>
-                </a:solidFill>
-                <a:effectLst/>
-                <a:latin typeface="+mn-lt"/>
-                <a:ea typeface="+mn-ea"/>
-                <a:cs typeface="+mn-cs"/>
-              </a:rPr>
-              <a:t>x</a:t>
-            </a:r>
-            <a:r>
-              <a:rPr lang="pt" sz="1200" kern="1200" dirty="0">
-                <a:solidFill>
-                  <a:schemeClr val="tx1"/>
-                </a:solidFill>
-                <a:effectLst/>
-                <a:latin typeface="+mn-lt"/>
-                <a:ea typeface="+mn-ea"/>
-                <a:cs typeface="+mn-cs"/>
-              </a:rPr>
-              <a:t>, \lambda, \mu):=</a:t>
-            </a:r>
-            <a:r>
-              <a:rPr lang="pt" sz="1200" kern="1200" dirty="0" err="1">
-                <a:solidFill>
-                  <a:schemeClr val="tx1"/>
-                </a:solidFill>
-                <a:effectLst/>
-                <a:latin typeface="+mn-lt"/>
-                <a:ea typeface="+mn-ea"/>
-                <a:cs typeface="+mn-cs"/>
-              </a:rPr>
-              <a:t>f</a:t>
-            </a:r>
-            <a:r>
-              <a:rPr lang="pt" sz="1200" kern="1200" dirty="0">
-                <a:solidFill>
-                  <a:schemeClr val="tx1"/>
-                </a:solidFill>
-                <a:effectLst/>
-                <a:latin typeface="+mn-lt"/>
-                <a:ea typeface="+mn-ea"/>
-                <a:cs typeface="+mn-cs"/>
-              </a:rPr>
-              <a:t>(\</a:t>
-            </a:r>
-            <a:r>
-              <a:rPr lang="pt" sz="1200" kern="1200" dirty="0" err="1">
-                <a:solidFill>
-                  <a:schemeClr val="tx1"/>
-                </a:solidFill>
-                <a:effectLst/>
-                <a:latin typeface="+mn-lt"/>
-                <a:ea typeface="+mn-ea"/>
-                <a:cs typeface="+mn-cs"/>
-              </a:rPr>
-              <a:t>x</a:t>
-            </a:r>
-            <a:r>
-              <a:rPr lang="pt" sz="1200" kern="1200" dirty="0">
-                <a:solidFill>
-                  <a:schemeClr val="tx1"/>
-                </a:solidFill>
-                <a:effectLst/>
-                <a:latin typeface="+mn-lt"/>
-                <a:ea typeface="+mn-ea"/>
-                <a:cs typeface="+mn-cs"/>
-              </a:rPr>
-              <a:t>) + \sum_{</a:t>
-            </a:r>
-            <a:r>
-              <a:rPr lang="pt" sz="1200" kern="1200" dirty="0" err="1">
-                <a:solidFill>
-                  <a:schemeClr val="tx1"/>
-                </a:solidFill>
-                <a:effectLst/>
-                <a:latin typeface="+mn-lt"/>
-                <a:ea typeface="+mn-ea"/>
-                <a:cs typeface="+mn-cs"/>
-              </a:rPr>
-              <a:t>i</a:t>
-            </a:r>
-            <a:r>
-              <a:rPr lang="pt" sz="1200" kern="1200" dirty="0">
-                <a:solidFill>
-                  <a:schemeClr val="tx1"/>
-                </a:solidFill>
-                <a:effectLst/>
-                <a:latin typeface="+mn-lt"/>
-                <a:ea typeface="+mn-ea"/>
-                <a:cs typeface="+mn-cs"/>
-              </a:rPr>
-              <a:t>=1}^</a:t>
-            </a:r>
-            <a:r>
-              <a:rPr lang="pt" sz="1200" kern="1200" dirty="0" err="1">
-                <a:solidFill>
-                  <a:schemeClr val="tx1"/>
-                </a:solidFill>
-                <a:effectLst/>
-                <a:latin typeface="+mn-lt"/>
-                <a:ea typeface="+mn-ea"/>
-                <a:cs typeface="+mn-cs"/>
-              </a:rPr>
-              <a:t>n</a:t>
-            </a:r>
-            <a:r>
-              <a:rPr lang="pt" sz="1200" kern="1200" dirty="0">
-                <a:solidFill>
-                  <a:schemeClr val="tx1"/>
-                </a:solidFill>
-                <a:effectLst/>
-                <a:latin typeface="+mn-lt"/>
-                <a:ea typeface="+mn-ea"/>
-                <a:cs typeface="+mn-cs"/>
-              </a:rPr>
-              <a:t> \</a:t>
-            </a:r>
-            <a:r>
-              <a:rPr lang="pt" sz="1200" kern="1200" dirty="0" err="1">
-                <a:solidFill>
-                  <a:schemeClr val="tx1"/>
-                </a:solidFill>
-                <a:effectLst/>
-                <a:latin typeface="+mn-lt"/>
-                <a:ea typeface="+mn-ea"/>
-                <a:cs typeface="+mn-cs"/>
-              </a:rPr>
-              <a:t>lambda_i</a:t>
-            </a:r>
-            <a:r>
-              <a:rPr lang="pt" sz="1200" kern="1200" dirty="0">
-                <a:solidFill>
-                  <a:schemeClr val="tx1"/>
-                </a:solidFill>
-                <a:effectLst/>
-                <a:latin typeface="+mn-lt"/>
-                <a:ea typeface="+mn-ea"/>
-                <a:cs typeface="+mn-cs"/>
-              </a:rPr>
-              <a:t> </a:t>
-            </a:r>
-            <a:r>
-              <a:rPr lang="pt" sz="1200" kern="1200" dirty="0" err="1">
-                <a:solidFill>
-                  <a:schemeClr val="tx1"/>
-                </a:solidFill>
-                <a:effectLst/>
-                <a:latin typeface="+mn-lt"/>
-                <a:ea typeface="+mn-ea"/>
-                <a:cs typeface="+mn-cs"/>
-              </a:rPr>
-              <a:t>h_i</a:t>
-            </a:r>
-            <a:r>
-              <a:rPr lang="pt" sz="1200" kern="1200" dirty="0">
-                <a:solidFill>
-                  <a:schemeClr val="tx1"/>
-                </a:solidFill>
-                <a:effectLst/>
-                <a:latin typeface="+mn-lt"/>
-                <a:ea typeface="+mn-ea"/>
-                <a:cs typeface="+mn-cs"/>
-              </a:rPr>
-              <a:t>(\</a:t>
-            </a:r>
-            <a:r>
-              <a:rPr lang="pt" sz="1200" kern="1200" dirty="0" err="1">
-                <a:solidFill>
-                  <a:schemeClr val="tx1"/>
-                </a:solidFill>
-                <a:effectLst/>
-                <a:latin typeface="+mn-lt"/>
-                <a:ea typeface="+mn-ea"/>
-                <a:cs typeface="+mn-cs"/>
-              </a:rPr>
-              <a:t>x</a:t>
-            </a:r>
-            <a:r>
-              <a:rPr lang="pt" sz="1200" kern="1200" dirty="0">
-                <a:solidFill>
-                  <a:schemeClr val="tx1"/>
-                </a:solidFill>
-                <a:effectLst/>
-                <a:latin typeface="+mn-lt"/>
-                <a:ea typeface="+mn-ea"/>
-                <a:cs typeface="+mn-cs"/>
-              </a:rPr>
-              <a:t>) + \sum_{</a:t>
-            </a:r>
-            <a:r>
-              <a:rPr lang="pt" sz="1200" kern="1200" dirty="0" err="1">
-                <a:solidFill>
-                  <a:schemeClr val="tx1"/>
-                </a:solidFill>
-                <a:effectLst/>
-                <a:latin typeface="+mn-lt"/>
-                <a:ea typeface="+mn-ea"/>
-                <a:cs typeface="+mn-cs"/>
-              </a:rPr>
-              <a:t>j</a:t>
-            </a:r>
-            <a:r>
-              <a:rPr lang="pt" sz="1200" kern="1200" dirty="0">
-                <a:solidFill>
-                  <a:schemeClr val="tx1"/>
-                </a:solidFill>
-                <a:effectLst/>
-                <a:latin typeface="+mn-lt"/>
-                <a:ea typeface="+mn-ea"/>
-                <a:cs typeface="+mn-cs"/>
-              </a:rPr>
-              <a:t>=1}^</a:t>
-            </a:r>
-            <a:r>
-              <a:rPr lang="pt" sz="1200" kern="1200" dirty="0" err="1">
-                <a:solidFill>
-                  <a:schemeClr val="tx1"/>
-                </a:solidFill>
-                <a:effectLst/>
-                <a:latin typeface="+mn-lt"/>
-                <a:ea typeface="+mn-ea"/>
-                <a:cs typeface="+mn-cs"/>
-              </a:rPr>
-              <a:t>r</a:t>
-            </a:r>
-            <a:r>
-              <a:rPr lang="pt" sz="1200" kern="1200" dirty="0">
-                <a:solidFill>
-                  <a:schemeClr val="tx1"/>
-                </a:solidFill>
-                <a:effectLst/>
-                <a:latin typeface="+mn-lt"/>
-                <a:ea typeface="+mn-ea"/>
-                <a:cs typeface="+mn-cs"/>
-              </a:rPr>
-              <a:t> \</a:t>
-            </a:r>
-            <a:r>
-              <a:rPr lang="pt" sz="1200" kern="1200" dirty="0" err="1">
-                <a:solidFill>
-                  <a:schemeClr val="tx1"/>
-                </a:solidFill>
-                <a:effectLst/>
-                <a:latin typeface="+mn-lt"/>
-                <a:ea typeface="+mn-ea"/>
-                <a:cs typeface="+mn-cs"/>
-              </a:rPr>
-              <a:t>mu_j</a:t>
-            </a:r>
-            <a:r>
-              <a:rPr lang="pt" sz="1200" kern="1200" dirty="0">
-                <a:solidFill>
-                  <a:schemeClr val="tx1"/>
-                </a:solidFill>
-                <a:effectLst/>
-                <a:latin typeface="+mn-lt"/>
-                <a:ea typeface="+mn-ea"/>
-                <a:cs typeface="+mn-cs"/>
-              </a:rPr>
-              <a:t> </a:t>
-            </a:r>
-            <a:r>
-              <a:rPr lang="pt" sz="1200" kern="1200" dirty="0" err="1">
-                <a:solidFill>
-                  <a:schemeClr val="tx1"/>
-                </a:solidFill>
-                <a:effectLst/>
-                <a:latin typeface="+mn-lt"/>
-                <a:ea typeface="+mn-ea"/>
-                <a:cs typeface="+mn-cs"/>
-              </a:rPr>
-              <a:t>g_j</a:t>
-            </a:r>
-            <a:r>
-              <a:rPr lang="pt" sz="1200" kern="1200" dirty="0">
-                <a:solidFill>
-                  <a:schemeClr val="tx1"/>
-                </a:solidFill>
-                <a:effectLst/>
-                <a:latin typeface="+mn-lt"/>
-                <a:ea typeface="+mn-ea"/>
-                <a:cs typeface="+mn-cs"/>
-              </a:rPr>
-              <a:t>(\</a:t>
-            </a:r>
-            <a:r>
-              <a:rPr lang="pt" sz="1200" kern="1200" dirty="0" err="1">
-                <a:solidFill>
-                  <a:schemeClr val="tx1"/>
-                </a:solidFill>
-                <a:effectLst/>
-                <a:latin typeface="+mn-lt"/>
-                <a:ea typeface="+mn-ea"/>
-                <a:cs typeface="+mn-cs"/>
-              </a:rPr>
-              <a:t>x</a:t>
-            </a:r>
-            <a:r>
-              <a:rPr lang="pt" sz="1200" kern="1200" dirty="0">
-                <a:solidFill>
-                  <a:schemeClr val="tx1"/>
-                </a:solidFill>
-                <a:effectLst/>
-                <a:latin typeface="+mn-lt"/>
-                <a:ea typeface="+mn-ea"/>
-                <a:cs typeface="+mn-cs"/>
-              </a:rPr>
-              <a:t>) </a:t>
-            </a:r>
-          </a:p>
-          <a:p>
-            <a:endParaRPr lang="pt" sz="1200" kern="1200" dirty="0">
-              <a:solidFill>
-                <a:schemeClr val="tx1"/>
-              </a:solidFill>
-              <a:effectLst/>
-              <a:latin typeface="+mn-lt"/>
-              <a:ea typeface="+mn-ea"/>
-              <a:cs typeface="+mn-cs"/>
-            </a:endParaRPr>
-          </a:p>
-          <a:p>
-            <a:r>
-              <a:rPr lang="en-US" sz="1200" kern="1200" dirty="0">
-                <a:solidFill>
-                  <a:schemeClr val="tx1"/>
-                </a:solidFill>
-                <a:effectLst/>
-                <a:latin typeface="+mn-lt"/>
-                <a:ea typeface="+mn-ea"/>
-                <a:cs typeface="+mn-cs"/>
-              </a:rPr>
-              <a:t>\begin{equation*}</a:t>
-            </a:r>
-          </a:p>
-          <a:p>
-            <a:r>
-              <a:rPr lang="en-US" sz="1200" kern="1200" dirty="0">
-                <a:solidFill>
-                  <a:schemeClr val="tx1"/>
-                </a:solidFill>
-                <a:effectLst/>
-                <a:latin typeface="+mn-lt"/>
-                <a:ea typeface="+mn-ea"/>
-                <a:cs typeface="+mn-cs"/>
-              </a:rPr>
-              <a:t>\begin{split}</a:t>
-            </a:r>
-          </a:p>
-          <a:p>
-            <a:r>
-              <a:rPr lang="en-US" sz="1200" kern="1200" dirty="0">
-                <a:solidFill>
-                  <a:schemeClr val="tx1"/>
-                </a:solidFill>
-                <a:effectLst/>
-                <a:latin typeface="+mn-lt"/>
-                <a:ea typeface="+mn-ea"/>
-                <a:cs typeface="+mn-cs"/>
-              </a:rPr>
-              <a:t>&amp; \</a:t>
-            </a:r>
-            <a:r>
-              <a:rPr lang="en-US" sz="1200" kern="1200" dirty="0" err="1">
-                <a:solidFill>
-                  <a:schemeClr val="tx1"/>
-                </a:solidFill>
-                <a:effectLst/>
-                <a:latin typeface="+mn-lt"/>
-                <a:ea typeface="+mn-ea"/>
-                <a:cs typeface="+mn-cs"/>
-              </a:rPr>
-              <a:t>nabla</a:t>
-            </a:r>
-            <a:r>
-              <a:rPr lang="en-US" sz="1200" kern="1200" dirty="0">
-                <a:solidFill>
-                  <a:schemeClr val="tx1"/>
-                </a:solidFill>
-                <a:effectLst/>
-                <a:latin typeface="+mn-lt"/>
-                <a:ea typeface="+mn-ea"/>
-                <a:cs typeface="+mn-cs"/>
-              </a:rPr>
-              <a:t>_{\x}L(\x^*, \lambda^*, \mu^*)=0\\</a:t>
-            </a:r>
-          </a:p>
-          <a:p>
-            <a:r>
-              <a:rPr lang="en-US" sz="1200" kern="1200" dirty="0">
-                <a:solidFill>
-                  <a:schemeClr val="tx1"/>
-                </a:solidFill>
-                <a:effectLst/>
-                <a:latin typeface="+mn-lt"/>
-                <a:ea typeface="+mn-ea"/>
-                <a:cs typeface="+mn-cs"/>
-              </a:rPr>
-              <a:t>&amp; \</a:t>
-            </a:r>
-            <a:r>
-              <a:rPr lang="en-US" sz="1200" kern="1200" dirty="0" err="1">
-                <a:solidFill>
-                  <a:schemeClr val="tx1"/>
-                </a:solidFill>
-                <a:effectLst/>
-                <a:latin typeface="+mn-lt"/>
-                <a:ea typeface="+mn-ea"/>
-                <a:cs typeface="+mn-cs"/>
-              </a:rPr>
-              <a:t>mu_j</a:t>
-            </a:r>
-            <a:r>
-              <a:rPr lang="en-US" sz="1200" kern="1200" dirty="0">
-                <a:solidFill>
-                  <a:schemeClr val="tx1"/>
-                </a:solidFill>
-                <a:effectLst/>
-                <a:latin typeface="+mn-lt"/>
-                <a:ea typeface="+mn-ea"/>
-                <a:cs typeface="+mn-cs"/>
-              </a:rPr>
-              <a:t>^*\</a:t>
-            </a:r>
-            <a:r>
-              <a:rPr lang="en-US" sz="1200" kern="1200" dirty="0" err="1">
-                <a:solidFill>
-                  <a:schemeClr val="tx1"/>
-                </a:solidFill>
-                <a:effectLst/>
-                <a:latin typeface="+mn-lt"/>
-                <a:ea typeface="+mn-ea"/>
-                <a:cs typeface="+mn-cs"/>
-              </a:rPr>
-              <a:t>geq</a:t>
-            </a:r>
-            <a:r>
-              <a:rPr lang="en-US" sz="1200" kern="1200" dirty="0">
-                <a:solidFill>
-                  <a:schemeClr val="tx1"/>
-                </a:solidFill>
-                <a:effectLst/>
-                <a:latin typeface="+mn-lt"/>
-                <a:ea typeface="+mn-ea"/>
-                <a:cs typeface="+mn-cs"/>
-              </a:rPr>
-              <a:t> 0, \quad j=1, \</a:t>
-            </a:r>
-            <a:r>
-              <a:rPr lang="en-US" sz="1200" kern="1200" dirty="0" err="1">
-                <a:solidFill>
-                  <a:schemeClr val="tx1"/>
-                </a:solidFill>
-                <a:effectLst/>
-                <a:latin typeface="+mn-lt"/>
-                <a:ea typeface="+mn-ea"/>
-                <a:cs typeface="+mn-cs"/>
-              </a:rPr>
-              <a:t>ldots</a:t>
-            </a:r>
-            <a:r>
-              <a:rPr lang="en-US" sz="1200" kern="1200" dirty="0">
-                <a:solidFill>
-                  <a:schemeClr val="tx1"/>
-                </a:solidFill>
-                <a:effectLst/>
-                <a:latin typeface="+mn-lt"/>
-                <a:ea typeface="+mn-ea"/>
-                <a:cs typeface="+mn-cs"/>
-              </a:rPr>
-              <a:t>, r\\</a:t>
-            </a:r>
-          </a:p>
-          <a:p>
-            <a:r>
-              <a:rPr lang="en-US" sz="1200" kern="1200" dirty="0">
-                <a:solidFill>
-                  <a:schemeClr val="tx1"/>
-                </a:solidFill>
-                <a:effectLst/>
-                <a:latin typeface="+mn-lt"/>
-                <a:ea typeface="+mn-ea"/>
-                <a:cs typeface="+mn-cs"/>
-              </a:rPr>
-              <a:t>&amp; \</a:t>
-            </a:r>
-            <a:r>
-              <a:rPr lang="en-US" sz="1200" kern="1200" dirty="0" err="1">
-                <a:solidFill>
-                  <a:schemeClr val="tx1"/>
-                </a:solidFill>
-                <a:effectLst/>
-                <a:latin typeface="+mn-lt"/>
-                <a:ea typeface="+mn-ea"/>
-                <a:cs typeface="+mn-cs"/>
-              </a:rPr>
-              <a:t>mu_j</a:t>
-            </a:r>
-            <a:r>
-              <a:rPr lang="en-US" sz="1200" kern="1200" dirty="0">
-                <a:solidFill>
-                  <a:schemeClr val="tx1"/>
-                </a:solidFill>
-                <a:effectLst/>
-                <a:latin typeface="+mn-lt"/>
-                <a:ea typeface="+mn-ea"/>
-                <a:cs typeface="+mn-cs"/>
-              </a:rPr>
-              <a:t>^* = 0 \</a:t>
-            </a:r>
-            <a:r>
-              <a:rPr lang="en-US" sz="1200" kern="1200" dirty="0" err="1">
-                <a:solidFill>
-                  <a:schemeClr val="tx1"/>
-                </a:solidFill>
-                <a:effectLst/>
-                <a:latin typeface="+mn-lt"/>
-                <a:ea typeface="+mn-ea"/>
-                <a:cs typeface="+mn-cs"/>
-              </a:rPr>
-              <a:t>qquad</a:t>
-            </a:r>
-            <a:r>
-              <a:rPr lang="en-US" sz="1200" kern="1200" dirty="0">
-                <a:solidFill>
-                  <a:schemeClr val="tx1"/>
-                </a:solidFill>
-                <a:effectLst/>
-                <a:latin typeface="+mn-lt"/>
-                <a:ea typeface="+mn-ea"/>
-                <a:cs typeface="+mn-cs"/>
-              </a:rPr>
-              <a:t> \</a:t>
-            </a:r>
-            <a:r>
-              <a:rPr lang="en-US" sz="1200" kern="1200" dirty="0" err="1">
-                <a:solidFill>
-                  <a:schemeClr val="tx1"/>
-                </a:solidFill>
-                <a:effectLst/>
-                <a:latin typeface="+mn-lt"/>
-                <a:ea typeface="+mn-ea"/>
-                <a:cs typeface="+mn-cs"/>
-              </a:rPr>
-              <a:t>forall</a:t>
-            </a:r>
-            <a:r>
-              <a:rPr lang="en-US" sz="1200" kern="1200" dirty="0">
-                <a:solidFill>
-                  <a:schemeClr val="tx1"/>
-                </a:solidFill>
-                <a:effectLst/>
-                <a:latin typeface="+mn-lt"/>
-                <a:ea typeface="+mn-ea"/>
-                <a:cs typeface="+mn-cs"/>
-              </a:rPr>
-              <a:t> j\</a:t>
-            </a:r>
-            <a:r>
-              <a:rPr lang="en-US" sz="1200" kern="1200" dirty="0" err="1">
-                <a:solidFill>
-                  <a:schemeClr val="tx1"/>
-                </a:solidFill>
-                <a:effectLst/>
-                <a:latin typeface="+mn-lt"/>
-                <a:ea typeface="+mn-ea"/>
-                <a:cs typeface="+mn-cs"/>
-              </a:rPr>
-              <a:t>notin</a:t>
-            </a:r>
-            <a:r>
-              <a:rPr lang="en-US" sz="1200" kern="1200" dirty="0">
-                <a:solidFill>
-                  <a:schemeClr val="tx1"/>
-                </a:solidFill>
-                <a:effectLst/>
-                <a:latin typeface="+mn-lt"/>
-                <a:ea typeface="+mn-ea"/>
-                <a:cs typeface="+mn-cs"/>
-              </a:rPr>
-              <a:t> A(\x^*)</a:t>
-            </a:r>
-          </a:p>
-          <a:p>
-            <a:r>
-              <a:rPr lang="en-US" sz="1200" kern="1200" dirty="0">
-                <a:solidFill>
-                  <a:schemeClr val="tx1"/>
-                </a:solidFill>
-                <a:effectLst/>
-                <a:latin typeface="+mn-lt"/>
-                <a:ea typeface="+mn-ea"/>
-                <a:cs typeface="+mn-cs"/>
-              </a:rPr>
-              <a:t>\end{split}</a:t>
-            </a:r>
-          </a:p>
-          <a:p>
-            <a:r>
-              <a:rPr lang="en-US" sz="1200" kern="1200" dirty="0">
-                <a:solidFill>
-                  <a:schemeClr val="tx1"/>
-                </a:solidFill>
-                <a:effectLst/>
-                <a:latin typeface="+mn-lt"/>
-                <a:ea typeface="+mn-ea"/>
-                <a:cs typeface="+mn-cs"/>
-              </a:rPr>
-              <a:t>\end{equation*}</a:t>
-            </a:r>
             <a:endParaRPr lang="pt" sz="1200" kern="1200" dirty="0">
               <a:solidFill>
                 <a:schemeClr val="tx1"/>
@@ -3996,38 +1670,6 @@
           <a:bodyPr/>
           <a:lstStyle/>
           <a:p>
-            <a:r>
-              <a:rPr lang="en-US" dirty="0"/>
-              <a:t>f(\x^{k+1})\</a:t>
-            </a:r>
-            <a:r>
-              <a:rPr lang="en-US" dirty="0" err="1"/>
-              <a:t>leq</a:t>
-            </a:r>
-            <a:r>
-              <a:rPr lang="en-US" dirty="0"/>
-              <a:t> f(\</a:t>
-            </a:r>
-            <a:r>
-              <a:rPr lang="en-US" dirty="0" err="1"/>
-              <a:t>x^k</a:t>
-            </a:r>
-            <a:r>
-              <a:rPr lang="en-US" dirty="0"/>
-              <a:t>), \</a:t>
-            </a:r>
-            <a:r>
-              <a:rPr lang="en-US" dirty="0" err="1"/>
-              <a:t>qquad</a:t>
-            </a:r>
-            <a:r>
-              <a:rPr lang="en-US" dirty="0"/>
-              <a:t> k=0, 1, \</a:t>
-            </a:r>
-            <a:r>
-              <a:rPr lang="en-US" dirty="0" err="1"/>
-              <a:t>ldots</a:t>
-            </a:r>
             <a:endParaRPr lang="en-US" dirty="0"/>
           </a:p>
         </p:txBody>
@@ -4112,225 +1754,6 @@
           <a:bodyPr/>
           <a:lstStyle/>
           <a:p>
-            <a:br>
-              <a:rPr lang="en-US" sz="1200" kern="1200" dirty="0">
-                <a:solidFill>
-                  <a:schemeClr val="tx1"/>
-                </a:solidFill>
-                <a:effectLst/>
-                <a:latin typeface="+mn-lt"/>
-                <a:ea typeface="+mn-ea"/>
-                <a:cs typeface="+mn-cs"/>
-              </a:rPr>
-            </a:br>
-            <a:endParaRPr lang="en-US" sz="1200" kern="1200" dirty="0">
-              <a:solidFill>
-                <a:schemeClr val="tx1"/>
-              </a:solidFill>
-              <a:effectLst/>
-              <a:latin typeface="+mn-lt"/>
-              <a:ea typeface="+mn-ea"/>
-              <a:cs typeface="+mn-cs"/>
-            </a:endParaRPr>
-          </a:p>
-          <a:p>
-            <a:r>
-              <a:rPr lang="en-US" sz="1200" kern="1200" dirty="0">
-                <a:solidFill>
-                  <a:schemeClr val="tx1"/>
-                </a:solidFill>
-                <a:effectLst/>
-                <a:latin typeface="+mn-lt"/>
-                <a:ea typeface="+mn-ea"/>
-                <a:cs typeface="+mn-cs"/>
-              </a:rPr>
-              <a:t>\begin{</a:t>
-            </a:r>
-            <a:r>
-              <a:rPr lang="en-US" sz="1200" kern="1200" dirty="0" err="1">
-                <a:solidFill>
-                  <a:schemeClr val="tx1"/>
-                </a:solidFill>
-                <a:effectLst/>
-                <a:latin typeface="+mn-lt"/>
-                <a:ea typeface="+mn-ea"/>
-                <a:cs typeface="+mn-cs"/>
-              </a:rPr>
-              <a:t>alignat</a:t>
-            </a:r>
-            <a:r>
-              <a:rPr lang="en-US" sz="1200" kern="1200" dirty="0">
-                <a:solidFill>
-                  <a:schemeClr val="tx1"/>
-                </a:solidFill>
-                <a:effectLst/>
-                <a:latin typeface="+mn-lt"/>
-                <a:ea typeface="+mn-ea"/>
-                <a:cs typeface="+mn-cs"/>
-              </a:rPr>
-              <a:t>*}{3}</a:t>
-            </a:r>
-          </a:p>
-          <a:p>
-            <a:r>
-              <a:rPr lang="en-US" sz="1200" kern="1200" dirty="0">
-                <a:solidFill>
-                  <a:schemeClr val="tx1"/>
-                </a:solidFill>
-                <a:effectLst/>
-                <a:latin typeface="+mn-lt"/>
-                <a:ea typeface="+mn-ea"/>
-                <a:cs typeface="+mn-cs"/>
-              </a:rPr>
-              <a:t>\min &amp;  &amp;\quad &amp; f(\x)\\  </a:t>
-            </a:r>
-          </a:p>
-          <a:p>
-            <a:r>
-              <a:rPr lang="en-US" sz="1200" kern="1200" dirty="0">
-                <a:solidFill>
-                  <a:schemeClr val="tx1"/>
-                </a:solidFill>
-                <a:effectLst/>
-                <a:latin typeface="+mn-lt"/>
-                <a:ea typeface="+mn-ea"/>
-                <a:cs typeface="+mn-cs"/>
-              </a:rPr>
-              <a:t>\text{subject to}&amp;  &amp; \quad &amp; </a:t>
-            </a:r>
-            <a:r>
-              <a:rPr lang="en-US" sz="1200" kern="1200" dirty="0" err="1">
-                <a:solidFill>
-                  <a:schemeClr val="tx1"/>
-                </a:solidFill>
-                <a:effectLst/>
-                <a:latin typeface="+mn-lt"/>
-                <a:ea typeface="+mn-ea"/>
-                <a:cs typeface="+mn-cs"/>
-              </a:rPr>
-              <a:t>h_i</a:t>
-            </a:r>
-            <a:r>
-              <a:rPr lang="en-US" sz="1200" kern="1200" dirty="0">
-                <a:solidFill>
-                  <a:schemeClr val="tx1"/>
-                </a:solidFill>
-                <a:effectLst/>
-                <a:latin typeface="+mn-lt"/>
-                <a:ea typeface="+mn-ea"/>
-                <a:cs typeface="+mn-cs"/>
-              </a:rPr>
-              <a:t>(\x) = 0, \</a:t>
-            </a:r>
-            <a:r>
-              <a:rPr lang="en-US" sz="1200" kern="1200" dirty="0" err="1">
-                <a:solidFill>
-                  <a:schemeClr val="tx1"/>
-                </a:solidFill>
-                <a:effectLst/>
-                <a:latin typeface="+mn-lt"/>
-                <a:ea typeface="+mn-ea"/>
-                <a:cs typeface="+mn-cs"/>
-              </a:rPr>
-              <a:t>qquad</a:t>
-            </a:r>
-            <a:r>
-              <a:rPr lang="en-US" sz="1200" kern="1200" dirty="0">
-                <a:solidFill>
-                  <a:schemeClr val="tx1"/>
-                </a:solidFill>
-                <a:effectLst/>
-                <a:latin typeface="+mn-lt"/>
-                <a:ea typeface="+mn-ea"/>
-                <a:cs typeface="+mn-cs"/>
-              </a:rPr>
-              <a:t> </a:t>
-            </a:r>
-            <a:r>
-              <a:rPr lang="en-US" sz="1200" kern="1200" dirty="0" err="1">
-                <a:solidFill>
-                  <a:schemeClr val="tx1"/>
-                </a:solidFill>
-                <a:effectLst/>
-                <a:latin typeface="+mn-lt"/>
-                <a:ea typeface="+mn-ea"/>
-                <a:cs typeface="+mn-cs"/>
-              </a:rPr>
-              <a:t>i</a:t>
-            </a:r>
-            <a:r>
-              <a:rPr lang="en-US" sz="1200" kern="1200" dirty="0">
-                <a:solidFill>
-                  <a:schemeClr val="tx1"/>
-                </a:solidFill>
-                <a:effectLst/>
-                <a:latin typeface="+mn-lt"/>
-                <a:ea typeface="+mn-ea"/>
-                <a:cs typeface="+mn-cs"/>
-              </a:rPr>
-              <a:t>=1,\</a:t>
-            </a:r>
-            <a:r>
-              <a:rPr lang="en-US" sz="1200" kern="1200" dirty="0" err="1">
-                <a:solidFill>
-                  <a:schemeClr val="tx1"/>
-                </a:solidFill>
-                <a:effectLst/>
-                <a:latin typeface="+mn-lt"/>
-                <a:ea typeface="+mn-ea"/>
-                <a:cs typeface="+mn-cs"/>
-              </a:rPr>
-              <a:t>ldots,m</a:t>
-            </a:r>
-            <a:endParaRPr lang="en-US" sz="1200" kern="1200" dirty="0">
-              <a:solidFill>
-                <a:schemeClr val="tx1"/>
-              </a:solidFill>
-              <a:effectLst/>
-              <a:latin typeface="+mn-lt"/>
-              <a:ea typeface="+mn-ea"/>
-              <a:cs typeface="+mn-cs"/>
-            </a:endParaRPr>
-          </a:p>
-          <a:p>
-            <a:r>
-              <a:rPr lang="en-US" sz="1200" kern="1200" dirty="0">
-                <a:solidFill>
-                  <a:schemeClr val="tx1"/>
-                </a:solidFill>
-                <a:effectLst/>
-                <a:latin typeface="+mn-lt"/>
-                <a:ea typeface="+mn-ea"/>
-                <a:cs typeface="+mn-cs"/>
-              </a:rPr>
-              <a:t>\end{</a:t>
-            </a:r>
-            <a:r>
-              <a:rPr lang="en-US" sz="1200" kern="1200" dirty="0" err="1">
-                <a:solidFill>
-                  <a:schemeClr val="tx1"/>
-                </a:solidFill>
-                <a:effectLst/>
-                <a:latin typeface="+mn-lt"/>
-                <a:ea typeface="+mn-ea"/>
-                <a:cs typeface="+mn-cs"/>
-              </a:rPr>
-              <a:t>alignat</a:t>
-            </a:r>
-            <a:r>
-              <a:rPr lang="en-US" sz="1200" kern="1200" dirty="0">
-                <a:solidFill>
-                  <a:schemeClr val="tx1"/>
-                </a:solidFill>
-                <a:effectLst/>
-                <a:latin typeface="+mn-lt"/>
-                <a:ea typeface="+mn-ea"/>
-                <a:cs typeface="+mn-cs"/>
-              </a:rPr>
-              <a:t>*}</a:t>
-            </a:r>
-          </a:p>
-          <a:p>
             <a:endParaRPr lang="en-US" dirty="0"/>
           </a:p>
         </p:txBody>
@@ -4415,236 +1838,6 @@
           <a:bodyPr/>
           <a:lstStyle/>
           <a:p>
-            <a:pPr marL="0" marR="0" lvl="0" indent="0" algn="l" defTabSz="914400" rtl="0" eaLnBrk="1" fontAlgn="auto" latinLnBrk="0" hangingPunct="1">
-              <a:lnSpc>
-                <a:spcPct val="100000"/>
-              </a:lnSpc>
-              <a:spcBef>
-                <a:spcPts val="0"/>
-              </a:spcBef>
-              <a:spcAft>
-                <a:spcPts val="0"/>
-              </a:spcAft>
-              <a:buClrTx/>
-              <a:buSzTx/>
-              <a:buFontTx/>
-              <a:buNone/>
-              <a:tabLst/>
-              <a:defRPr/>
-            </a:pPr>
-            <a:r>
-              <a:rPr lang="en-US" sz="1200" kern="1200" dirty="0">
-                <a:solidFill>
-                  <a:schemeClr val="tx1"/>
-                </a:solidFill>
-                <a:effectLst/>
-                <a:latin typeface="+mn-lt"/>
-                <a:ea typeface="+mn-ea"/>
-                <a:cs typeface="+mn-cs"/>
-              </a:rPr>
-              <a:t>\x_{\alpha} = \x - \alpha \</a:t>
-            </a:r>
-            <a:r>
-              <a:rPr lang="en-US" sz="1200" kern="1200" dirty="0" err="1">
-                <a:solidFill>
-                  <a:schemeClr val="tx1"/>
-                </a:solidFill>
-                <a:effectLst/>
-                <a:latin typeface="+mn-lt"/>
-                <a:ea typeface="+mn-ea"/>
-                <a:cs typeface="+mn-cs"/>
-              </a:rPr>
-              <a:t>nabla</a:t>
-            </a:r>
-            <a:r>
-              <a:rPr lang="en-US" sz="1200" kern="1200" dirty="0">
-                <a:solidFill>
-                  <a:schemeClr val="tx1"/>
-                </a:solidFill>
-                <a:effectLst/>
-                <a:latin typeface="+mn-lt"/>
-                <a:ea typeface="+mn-ea"/>
-                <a:cs typeface="+mn-cs"/>
-              </a:rPr>
-              <a:t> f(\x), \</a:t>
-            </a:r>
-            <a:r>
-              <a:rPr lang="en-US" sz="1200" kern="1200" dirty="0" err="1">
-                <a:solidFill>
-                  <a:schemeClr val="tx1"/>
-                </a:solidFill>
-                <a:effectLst/>
-                <a:latin typeface="+mn-lt"/>
-                <a:ea typeface="+mn-ea"/>
-                <a:cs typeface="+mn-cs"/>
-              </a:rPr>
-              <a:t>qquad</a:t>
-            </a:r>
-            <a:r>
-              <a:rPr lang="en-US" sz="1200" kern="1200" dirty="0">
-                <a:solidFill>
-                  <a:schemeClr val="tx1"/>
-                </a:solidFill>
-                <a:effectLst/>
-                <a:latin typeface="+mn-lt"/>
-                <a:ea typeface="+mn-ea"/>
-                <a:cs typeface="+mn-cs"/>
-              </a:rPr>
-              <a:t> \</a:t>
-            </a:r>
-            <a:r>
-              <a:rPr lang="en-US" sz="1200" kern="1200" dirty="0" err="1">
-                <a:solidFill>
-                  <a:schemeClr val="tx1"/>
-                </a:solidFill>
-                <a:effectLst/>
-                <a:latin typeface="+mn-lt"/>
-                <a:ea typeface="+mn-ea"/>
-                <a:cs typeface="+mn-cs"/>
-              </a:rPr>
-              <a:t>forall</a:t>
-            </a:r>
-            <a:r>
-              <a:rPr lang="en-US" sz="1200" kern="1200" dirty="0">
-                <a:solidFill>
-                  <a:schemeClr val="tx1"/>
-                </a:solidFill>
-                <a:effectLst/>
-                <a:latin typeface="+mn-lt"/>
-                <a:ea typeface="+mn-ea"/>
-                <a:cs typeface="+mn-cs"/>
-              </a:rPr>
-              <a:t> \alpha \</a:t>
-            </a:r>
-            <a:r>
-              <a:rPr lang="en-US" sz="1200" kern="1200" dirty="0" err="1">
-                <a:solidFill>
-                  <a:schemeClr val="tx1"/>
-                </a:solidFill>
-                <a:effectLst/>
-                <a:latin typeface="+mn-lt"/>
-                <a:ea typeface="+mn-ea"/>
-                <a:cs typeface="+mn-cs"/>
-              </a:rPr>
-              <a:t>geq</a:t>
-            </a:r>
-            <a:r>
-              <a:rPr lang="en-US" sz="1200" kern="1200" dirty="0">
-                <a:solidFill>
-                  <a:schemeClr val="tx1"/>
-                </a:solidFill>
-                <a:effectLst/>
-                <a:latin typeface="+mn-lt"/>
-                <a:ea typeface="+mn-ea"/>
-                <a:cs typeface="+mn-cs"/>
-              </a:rPr>
-              <a:t> 0</a:t>
-            </a:r>
-          </a:p>
-          <a:p>
-            <a:pPr marL="0" marR="0" lvl="0" indent="0" algn="l" defTabSz="914400" rtl="0" eaLnBrk="1" fontAlgn="auto" latinLnBrk="0" hangingPunct="1">
-              <a:lnSpc>
-                <a:spcPct val="100000"/>
-              </a:lnSpc>
-              <a:spcBef>
-                <a:spcPts val="0"/>
-              </a:spcBef>
-              <a:spcAft>
-                <a:spcPts val="0"/>
-              </a:spcAft>
-              <a:buClrTx/>
-              <a:buSzTx/>
-              <a:buFontTx/>
-              <a:buNone/>
-              <a:tabLst/>
-              <a:defRPr/>
-            </a:pPr>
-            <a:r>
-              <a:rPr lang="en-US" sz="1200" kern="1200" dirty="0">
-                <a:solidFill>
-                  <a:schemeClr val="tx1"/>
-                </a:solidFill>
-                <a:effectLst/>
-                <a:latin typeface="+mn-lt"/>
-                <a:ea typeface="+mn-ea"/>
-                <a:cs typeface="+mn-cs"/>
-              </a:rPr>
-              <a:t>f(\x_{\alpha})\</a:t>
-            </a:r>
-            <a:r>
-              <a:rPr lang="en-US" sz="1200" kern="1200" dirty="0" err="1">
-                <a:solidFill>
-                  <a:schemeClr val="tx1"/>
-                </a:solidFill>
-                <a:effectLst/>
-                <a:latin typeface="+mn-lt"/>
-                <a:ea typeface="+mn-ea"/>
-                <a:cs typeface="+mn-cs"/>
-              </a:rPr>
-              <a:t>approx</a:t>
-            </a:r>
-            <a:r>
-              <a:rPr lang="en-US" sz="1200" kern="1200" dirty="0">
-                <a:solidFill>
-                  <a:schemeClr val="tx1"/>
-                </a:solidFill>
-                <a:effectLst/>
-                <a:latin typeface="+mn-lt"/>
-                <a:ea typeface="+mn-ea"/>
-                <a:cs typeface="+mn-cs"/>
-              </a:rPr>
-              <a:t> f(\x) + \</a:t>
-            </a:r>
-            <a:r>
-              <a:rPr lang="en-US" sz="1200" kern="1200" dirty="0" err="1">
-                <a:solidFill>
-                  <a:schemeClr val="tx1"/>
-                </a:solidFill>
-                <a:effectLst/>
-                <a:latin typeface="+mn-lt"/>
-                <a:ea typeface="+mn-ea"/>
-                <a:cs typeface="+mn-cs"/>
-              </a:rPr>
-              <a:t>nabla</a:t>
-            </a:r>
-            <a:r>
-              <a:rPr lang="en-US" sz="1200" kern="1200" dirty="0">
-                <a:solidFill>
-                  <a:schemeClr val="tx1"/>
-                </a:solidFill>
-                <a:effectLst/>
-                <a:latin typeface="+mn-lt"/>
-                <a:ea typeface="+mn-ea"/>
-                <a:cs typeface="+mn-cs"/>
-              </a:rPr>
-              <a:t> f(\x)^{\prime} (\x_{\alpha}- \x)  = f(\x) - \alpha \| \</a:t>
-            </a:r>
-            <a:r>
-              <a:rPr lang="en-US" sz="1200" kern="1200" dirty="0" err="1">
-                <a:solidFill>
-                  <a:schemeClr val="tx1"/>
-                </a:solidFill>
-                <a:effectLst/>
-                <a:latin typeface="+mn-lt"/>
-                <a:ea typeface="+mn-ea"/>
-                <a:cs typeface="+mn-cs"/>
-              </a:rPr>
-              <a:t>nabla</a:t>
-            </a:r>
-            <a:r>
-              <a:rPr lang="en-US" sz="1200" kern="1200" dirty="0">
-                <a:solidFill>
-                  <a:schemeClr val="tx1"/>
-                </a:solidFill>
-                <a:effectLst/>
-                <a:latin typeface="+mn-lt"/>
-                <a:ea typeface="+mn-ea"/>
-                <a:cs typeface="+mn-cs"/>
-              </a:rPr>
-              <a:t> f(\x)\|^2</a:t>
-            </a:r>
-          </a:p>
-          <a:p>
             <a:endParaRPr lang="en-US" dirty="0"/>
           </a:p>
         </p:txBody>
@@ -4729,233 +1922,6 @@
           <a:bodyPr/>
           <a:lstStyle/>
           <a:p>
-            <a:pPr marL="0" marR="0" lvl="0" indent="0" algn="l" defTabSz="914400" rtl="0" eaLnBrk="1" fontAlgn="auto" latinLnBrk="0" hangingPunct="1">
-              <a:lnSpc>
-                <a:spcPct val="100000"/>
-              </a:lnSpc>
-              <a:spcBef>
-                <a:spcPts val="0"/>
-              </a:spcBef>
-              <a:spcAft>
-                <a:spcPts val="0"/>
-              </a:spcAft>
-              <a:buClrTx/>
-              <a:buSzTx/>
-              <a:buFontTx/>
-              <a:buNone/>
-              <a:tabLst/>
-              <a:defRPr/>
-            </a:pPr>
-            <a:r>
-              <a:rPr lang="en-US" sz="1200" kern="1200" dirty="0">
-                <a:solidFill>
-                  <a:schemeClr val="tx1"/>
-                </a:solidFill>
-                <a:effectLst/>
-                <a:latin typeface="+mn-lt"/>
-                <a:ea typeface="+mn-ea"/>
-                <a:cs typeface="+mn-cs"/>
-              </a:rPr>
-              <a:t>\x_{\alpha} = \x + \alpha \, \</a:t>
-            </a:r>
-            <a:r>
-              <a:rPr lang="en-US" sz="1200" kern="1200" dirty="0" err="1">
-                <a:solidFill>
-                  <a:schemeClr val="tx1"/>
-                </a:solidFill>
-                <a:effectLst/>
-                <a:latin typeface="+mn-lt"/>
-                <a:ea typeface="+mn-ea"/>
-                <a:cs typeface="+mn-cs"/>
-              </a:rPr>
-              <a:t>dd</a:t>
-            </a:r>
-            <a:r>
-              <a:rPr lang="en-US" sz="1200" kern="1200" dirty="0">
-                <a:solidFill>
-                  <a:schemeClr val="tx1"/>
-                </a:solidFill>
-                <a:effectLst/>
-                <a:latin typeface="+mn-lt"/>
-                <a:ea typeface="+mn-ea"/>
-                <a:cs typeface="+mn-cs"/>
-              </a:rPr>
-              <a:t>, \</a:t>
-            </a:r>
-            <a:r>
-              <a:rPr lang="en-US" sz="1200" kern="1200" dirty="0" err="1">
-                <a:solidFill>
-                  <a:schemeClr val="tx1"/>
-                </a:solidFill>
-                <a:effectLst/>
-                <a:latin typeface="+mn-lt"/>
-                <a:ea typeface="+mn-ea"/>
-                <a:cs typeface="+mn-cs"/>
-              </a:rPr>
-              <a:t>qquad</a:t>
-            </a:r>
-            <a:r>
-              <a:rPr lang="en-US" sz="1200" kern="1200" dirty="0">
-                <a:solidFill>
-                  <a:schemeClr val="tx1"/>
-                </a:solidFill>
-                <a:effectLst/>
-                <a:latin typeface="+mn-lt"/>
-                <a:ea typeface="+mn-ea"/>
-                <a:cs typeface="+mn-cs"/>
-              </a:rPr>
-              <a:t> \</a:t>
-            </a:r>
-            <a:r>
-              <a:rPr lang="en-US" sz="1200" kern="1200" dirty="0" err="1">
-                <a:solidFill>
-                  <a:schemeClr val="tx1"/>
-                </a:solidFill>
-                <a:effectLst/>
-                <a:latin typeface="+mn-lt"/>
-                <a:ea typeface="+mn-ea"/>
-                <a:cs typeface="+mn-cs"/>
-              </a:rPr>
-              <a:t>forall</a:t>
-            </a:r>
-            <a:r>
-              <a:rPr lang="en-US" sz="1200" kern="1200" dirty="0">
-                <a:solidFill>
-                  <a:schemeClr val="tx1"/>
-                </a:solidFill>
-                <a:effectLst/>
-                <a:latin typeface="+mn-lt"/>
-                <a:ea typeface="+mn-ea"/>
-                <a:cs typeface="+mn-cs"/>
-              </a:rPr>
-              <a:t> \alpha \</a:t>
-            </a:r>
-            <a:r>
-              <a:rPr lang="en-US" sz="1200" kern="1200" dirty="0" err="1">
-                <a:solidFill>
-                  <a:schemeClr val="tx1"/>
-                </a:solidFill>
-                <a:effectLst/>
-                <a:latin typeface="+mn-lt"/>
-                <a:ea typeface="+mn-ea"/>
-                <a:cs typeface="+mn-cs"/>
-              </a:rPr>
-              <a:t>geq</a:t>
-            </a:r>
-            <a:r>
-              <a:rPr lang="en-US" sz="1200" kern="1200" dirty="0">
-                <a:solidFill>
-                  <a:schemeClr val="tx1"/>
-                </a:solidFill>
-                <a:effectLst/>
-                <a:latin typeface="+mn-lt"/>
-                <a:ea typeface="+mn-ea"/>
-                <a:cs typeface="+mn-cs"/>
-              </a:rPr>
-              <a:t> 0</a:t>
-            </a:r>
-          </a:p>
-          <a:p>
-            <a:pPr marL="0" marR="0" lvl="0" indent="0" algn="l" defTabSz="914400" rtl="0" eaLnBrk="1" fontAlgn="auto" latinLnBrk="0" hangingPunct="1">
-              <a:lnSpc>
-                <a:spcPct val="100000"/>
-              </a:lnSpc>
-              <a:spcBef>
-                <a:spcPts val="0"/>
-              </a:spcBef>
-              <a:spcAft>
-                <a:spcPts val="0"/>
-              </a:spcAft>
-              <a:buClrTx/>
-              <a:buSzTx/>
-              <a:buFontTx/>
-              <a:buNone/>
-              <a:tabLst/>
-              <a:defRPr/>
-            </a:pPr>
-            <a:r>
-              <a:rPr lang="en-US" sz="1200" kern="1200" dirty="0">
-                <a:solidFill>
-                  <a:schemeClr val="tx1"/>
-                </a:solidFill>
-                <a:effectLst/>
-                <a:latin typeface="+mn-lt"/>
-                <a:ea typeface="+mn-ea"/>
-                <a:cs typeface="+mn-cs"/>
-              </a:rPr>
-              <a:t>f(\x_{\alpha})\</a:t>
-            </a:r>
-            <a:r>
-              <a:rPr lang="en-US" sz="1200" kern="1200" dirty="0" err="1">
-                <a:solidFill>
-                  <a:schemeClr val="tx1"/>
-                </a:solidFill>
-                <a:effectLst/>
-                <a:latin typeface="+mn-lt"/>
-                <a:ea typeface="+mn-ea"/>
-                <a:cs typeface="+mn-cs"/>
-              </a:rPr>
-              <a:t>approx</a:t>
-            </a:r>
-            <a:r>
-              <a:rPr lang="en-US" sz="1200" kern="1200" dirty="0">
-                <a:solidFill>
-                  <a:schemeClr val="tx1"/>
-                </a:solidFill>
-                <a:effectLst/>
-                <a:latin typeface="+mn-lt"/>
-                <a:ea typeface="+mn-ea"/>
-                <a:cs typeface="+mn-cs"/>
-              </a:rPr>
-              <a:t> f(\x)+\alpha \</a:t>
-            </a:r>
-            <a:r>
-              <a:rPr lang="en-US" sz="1200" kern="1200" dirty="0" err="1">
-                <a:solidFill>
-                  <a:schemeClr val="tx1"/>
-                </a:solidFill>
-                <a:effectLst/>
-                <a:latin typeface="+mn-lt"/>
-                <a:ea typeface="+mn-ea"/>
-                <a:cs typeface="+mn-cs"/>
-              </a:rPr>
-              <a:t>nabla</a:t>
-            </a:r>
-            <a:r>
-              <a:rPr lang="en-US" sz="1200" kern="1200" dirty="0">
-                <a:solidFill>
-                  <a:schemeClr val="tx1"/>
-                </a:solidFill>
-                <a:effectLst/>
-                <a:latin typeface="+mn-lt"/>
-                <a:ea typeface="+mn-ea"/>
-                <a:cs typeface="+mn-cs"/>
-              </a:rPr>
-              <a:t> f(\x)^{\prime}\</a:t>
-            </a:r>
-            <a:r>
-              <a:rPr lang="en-US" sz="1200" kern="1200" dirty="0" err="1">
-                <a:solidFill>
-                  <a:schemeClr val="tx1"/>
-                </a:solidFill>
-                <a:effectLst/>
-                <a:latin typeface="+mn-lt"/>
-                <a:ea typeface="+mn-ea"/>
-                <a:cs typeface="+mn-cs"/>
-              </a:rPr>
-              <a:t>dd</a:t>
-            </a:r>
-            <a:endParaRPr lang="en-US" sz="1200" kern="1200" dirty="0">
-              <a:solidFill>
-                <a:schemeClr val="tx1"/>
-              </a:solidFill>
-              <a:effectLst/>
-              <a:latin typeface="+mn-lt"/>
-              <a:ea typeface="+mn-ea"/>
-              <a:cs typeface="+mn-cs"/>
-            </a:endParaRPr>
-          </a:p>
-          <a:p>
             <a:endParaRPr lang="en-US" dirty="0"/>
           </a:p>
         </p:txBody>
@@ -5040,233 +2006,6 @@
           <a:bodyPr/>
           <a:lstStyle/>
           <a:p>
-            <a:pPr marL="0" marR="0" lvl="0" indent="0" algn="l" defTabSz="914400" rtl="0" eaLnBrk="1" fontAlgn="auto" latinLnBrk="0" hangingPunct="1">
-              <a:lnSpc>
-                <a:spcPct val="100000"/>
-              </a:lnSpc>
-              <a:spcBef>
-                <a:spcPts val="0"/>
-              </a:spcBef>
-              <a:spcAft>
-                <a:spcPts val="0"/>
-              </a:spcAft>
-              <a:buClrTx/>
-              <a:buSzTx/>
-              <a:buFontTx/>
-              <a:buNone/>
-              <a:tabLst/>
-              <a:defRPr/>
-            </a:pPr>
-            <a:r>
-              <a:rPr lang="en-US" sz="1200" kern="1200" dirty="0">
-                <a:solidFill>
-                  <a:schemeClr val="tx1"/>
-                </a:solidFill>
-                <a:effectLst/>
-                <a:latin typeface="+mn-lt"/>
-                <a:ea typeface="+mn-ea"/>
-                <a:cs typeface="+mn-cs"/>
-              </a:rPr>
-              <a:t>\x^{k+1} = \x^{k} + \</a:t>
-            </a:r>
-            <a:r>
-              <a:rPr lang="en-US" sz="1200" kern="1200" dirty="0" err="1">
-                <a:solidFill>
-                  <a:schemeClr val="tx1"/>
-                </a:solidFill>
-                <a:effectLst/>
-                <a:latin typeface="+mn-lt"/>
-                <a:ea typeface="+mn-ea"/>
-                <a:cs typeface="+mn-cs"/>
-              </a:rPr>
-              <a:t>alpha^k</a:t>
-            </a:r>
-            <a:r>
-              <a:rPr lang="en-US" sz="1200" kern="1200" dirty="0">
-                <a:solidFill>
-                  <a:schemeClr val="tx1"/>
-                </a:solidFill>
-                <a:effectLst/>
-                <a:latin typeface="+mn-lt"/>
-                <a:ea typeface="+mn-ea"/>
-                <a:cs typeface="+mn-cs"/>
-              </a:rPr>
-              <a:t> \, \</a:t>
-            </a:r>
-            <a:r>
-              <a:rPr lang="en-US" sz="1200" kern="1200" dirty="0" err="1">
-                <a:solidFill>
-                  <a:schemeClr val="tx1"/>
-                </a:solidFill>
-                <a:effectLst/>
-                <a:latin typeface="+mn-lt"/>
-                <a:ea typeface="+mn-ea"/>
-                <a:cs typeface="+mn-cs"/>
-              </a:rPr>
-              <a:t>dd^k</a:t>
-            </a:r>
-            <a:r>
-              <a:rPr lang="en-US" sz="1200" kern="1200" dirty="0">
-                <a:solidFill>
-                  <a:schemeClr val="tx1"/>
-                </a:solidFill>
-                <a:effectLst/>
-                <a:latin typeface="+mn-lt"/>
-                <a:ea typeface="+mn-ea"/>
-                <a:cs typeface="+mn-cs"/>
-              </a:rPr>
-              <a:t>, \</a:t>
-            </a:r>
-            <a:r>
-              <a:rPr lang="en-US" sz="1200" kern="1200" dirty="0" err="1">
-                <a:solidFill>
-                  <a:schemeClr val="tx1"/>
-                </a:solidFill>
-                <a:effectLst/>
-                <a:latin typeface="+mn-lt"/>
-                <a:ea typeface="+mn-ea"/>
-                <a:cs typeface="+mn-cs"/>
-              </a:rPr>
-              <a:t>qquad</a:t>
-            </a:r>
-            <a:r>
-              <a:rPr lang="en-US" sz="1200" kern="1200" dirty="0">
-                <a:solidFill>
-                  <a:schemeClr val="tx1"/>
-                </a:solidFill>
-                <a:effectLst/>
-                <a:latin typeface="+mn-lt"/>
-                <a:ea typeface="+mn-ea"/>
-                <a:cs typeface="+mn-cs"/>
-              </a:rPr>
-              <a:t> k=0,1,\</a:t>
-            </a:r>
-            <a:r>
-              <a:rPr lang="en-US" sz="1200" kern="1200" dirty="0" err="1">
-                <a:solidFill>
-                  <a:schemeClr val="tx1"/>
-                </a:solidFill>
-                <a:effectLst/>
-                <a:latin typeface="+mn-lt"/>
-                <a:ea typeface="+mn-ea"/>
-                <a:cs typeface="+mn-cs"/>
-              </a:rPr>
-              <a:t>ldots</a:t>
-            </a:r>
-            <a:endParaRPr lang="en-US" sz="1200" kern="1200" dirty="0">
-              <a:solidFill>
-                <a:schemeClr val="tx1"/>
-              </a:solidFill>
-              <a:effectLst/>
-              <a:latin typeface="+mn-lt"/>
-              <a:ea typeface="+mn-ea"/>
-              <a:cs typeface="+mn-cs"/>
-            </a:endParaRPr>
-          </a:p>
-          <a:p>
-            <a:pPr marL="0" marR="0" lvl="0" indent="0" algn="l" defTabSz="914400" rtl="0" eaLnBrk="1" fontAlgn="auto" latinLnBrk="0" hangingPunct="1">
-              <a:lnSpc>
-                <a:spcPct val="100000"/>
-              </a:lnSpc>
-              <a:spcBef>
-                <a:spcPts val="0"/>
-              </a:spcBef>
-              <a:spcAft>
-                <a:spcPts val="0"/>
-              </a:spcAft>
-              <a:buClrTx/>
-              <a:buSzTx/>
-              <a:buFontTx/>
-              <a:buNone/>
-              <a:tabLst/>
-              <a:defRPr/>
-            </a:pPr>
-            <a:r>
-              <a:rPr lang="en-US" sz="1200" kern="1200" dirty="0">
-                <a:solidFill>
-                  <a:schemeClr val="tx1"/>
-                </a:solidFill>
-                <a:effectLst/>
-                <a:latin typeface="+mn-lt"/>
-                <a:ea typeface="+mn-ea"/>
-                <a:cs typeface="+mn-cs"/>
-              </a:rPr>
-              <a:t>\</a:t>
-            </a:r>
-            <a:r>
-              <a:rPr lang="en-US" sz="1200" kern="1200" dirty="0" err="1">
-                <a:solidFill>
-                  <a:schemeClr val="tx1"/>
-                </a:solidFill>
-                <a:effectLst/>
-                <a:latin typeface="+mn-lt"/>
-                <a:ea typeface="+mn-ea"/>
-                <a:cs typeface="+mn-cs"/>
-              </a:rPr>
-              <a:t>nabla</a:t>
-            </a:r>
-            <a:r>
-              <a:rPr lang="en-US" sz="1200" kern="1200" dirty="0">
-                <a:solidFill>
-                  <a:schemeClr val="tx1"/>
-                </a:solidFill>
-                <a:effectLst/>
-                <a:latin typeface="+mn-lt"/>
-                <a:ea typeface="+mn-ea"/>
-                <a:cs typeface="+mn-cs"/>
-              </a:rPr>
-              <a:t> f(\</a:t>
-            </a:r>
-            <a:r>
-              <a:rPr lang="en-US" sz="1200" kern="1200" dirty="0" err="1">
-                <a:solidFill>
-                  <a:schemeClr val="tx1"/>
-                </a:solidFill>
-                <a:effectLst/>
-                <a:latin typeface="+mn-lt"/>
-                <a:ea typeface="+mn-ea"/>
-                <a:cs typeface="+mn-cs"/>
-              </a:rPr>
-              <a:t>x^k</a:t>
-            </a:r>
-            <a:r>
-              <a:rPr lang="en-US" sz="1200" kern="1200" dirty="0">
-                <a:solidFill>
-                  <a:schemeClr val="tx1"/>
-                </a:solidFill>
-                <a:effectLst/>
-                <a:latin typeface="+mn-lt"/>
-                <a:ea typeface="+mn-ea"/>
-                <a:cs typeface="+mn-cs"/>
-              </a:rPr>
-              <a:t>)^{\prime}\</a:t>
-            </a:r>
-            <a:r>
-              <a:rPr lang="en-US" sz="1200" kern="1200" dirty="0" err="1">
-                <a:solidFill>
-                  <a:schemeClr val="tx1"/>
-                </a:solidFill>
-                <a:effectLst/>
-                <a:latin typeface="+mn-lt"/>
-                <a:ea typeface="+mn-ea"/>
-                <a:cs typeface="+mn-cs"/>
-              </a:rPr>
-              <a:t>dd^k</a:t>
-            </a:r>
-            <a:r>
-              <a:rPr lang="en-US" sz="1200" kern="1200" dirty="0">
-                <a:solidFill>
-                  <a:schemeClr val="tx1"/>
-                </a:solidFill>
-                <a:effectLst/>
-                <a:latin typeface="+mn-lt"/>
-                <a:ea typeface="+mn-ea"/>
-                <a:cs typeface="+mn-cs"/>
-              </a:rPr>
-              <a:t>&lt;0</a:t>
-            </a:r>
-          </a:p>
-          <a:p>
             <a:endParaRPr lang="en-US" dirty="0"/>
           </a:p>
         </p:txBody>
@@ -5351,178 +2090,6 @@
           <a:bodyPr/>
           <a:lstStyle/>
           <a:p>
-            <a:pPr marL="0" marR="0" lvl="0" indent="0" algn="l" defTabSz="914400" rtl="0" eaLnBrk="1" fontAlgn="auto" latinLnBrk="0" hangingPunct="1">
-              <a:lnSpc>
-                <a:spcPct val="100000"/>
-              </a:lnSpc>
-              <a:spcBef>
-                <a:spcPts val="0"/>
-              </a:spcBef>
-              <a:spcAft>
-                <a:spcPts val="0"/>
-              </a:spcAft>
-              <a:buClrTx/>
-              <a:buSzTx/>
-              <a:buFontTx/>
-              <a:buNone/>
-              <a:tabLst/>
-              <a:defRPr/>
-            </a:pPr>
-            <a:r>
-              <a:rPr lang="en-US" sz="1200" kern="1200" dirty="0">
-                <a:solidFill>
-                  <a:schemeClr val="tx1"/>
-                </a:solidFill>
-                <a:effectLst/>
-                <a:latin typeface="+mn-lt"/>
-                <a:ea typeface="+mn-ea"/>
-                <a:cs typeface="+mn-cs"/>
-              </a:rPr>
-              <a:t>f(\</a:t>
-            </a:r>
-            <a:r>
-              <a:rPr lang="en-US" sz="1200" kern="1200" dirty="0" err="1">
-                <a:solidFill>
-                  <a:schemeClr val="tx1"/>
-                </a:solidFill>
-                <a:effectLst/>
-                <a:latin typeface="+mn-lt"/>
-                <a:ea typeface="+mn-ea"/>
-                <a:cs typeface="+mn-cs"/>
-              </a:rPr>
-              <a:t>x^k</a:t>
-            </a:r>
-            <a:r>
-              <a:rPr lang="en-US" sz="1200" kern="1200" dirty="0">
-                <a:solidFill>
-                  <a:schemeClr val="tx1"/>
-                </a:solidFill>
-                <a:effectLst/>
-                <a:latin typeface="+mn-lt"/>
-                <a:ea typeface="+mn-ea"/>
-                <a:cs typeface="+mn-cs"/>
-              </a:rPr>
-              <a:t> +  \</a:t>
-            </a:r>
-            <a:r>
-              <a:rPr lang="en-US" sz="1200" kern="1200" dirty="0" err="1">
-                <a:solidFill>
-                  <a:schemeClr val="tx1"/>
-                </a:solidFill>
-                <a:effectLst/>
-                <a:latin typeface="+mn-lt"/>
-                <a:ea typeface="+mn-ea"/>
-                <a:cs typeface="+mn-cs"/>
-              </a:rPr>
-              <a:t>alpha^k</a:t>
-            </a:r>
-            <a:r>
-              <a:rPr lang="en-US" sz="1200" kern="1200" dirty="0">
-                <a:solidFill>
-                  <a:schemeClr val="tx1"/>
-                </a:solidFill>
-                <a:effectLst/>
-                <a:latin typeface="+mn-lt"/>
-                <a:ea typeface="+mn-ea"/>
-                <a:cs typeface="+mn-cs"/>
-              </a:rPr>
-              <a:t> \, \</a:t>
-            </a:r>
-            <a:r>
-              <a:rPr lang="en-US" sz="1200" kern="1200" dirty="0" err="1">
-                <a:solidFill>
-                  <a:schemeClr val="tx1"/>
-                </a:solidFill>
-                <a:effectLst/>
-                <a:latin typeface="+mn-lt"/>
-                <a:ea typeface="+mn-ea"/>
-                <a:cs typeface="+mn-cs"/>
-              </a:rPr>
-              <a:t>dd^k</a:t>
-            </a:r>
-            <a:r>
-              <a:rPr lang="en-US" sz="1200" kern="1200" dirty="0">
-                <a:solidFill>
-                  <a:schemeClr val="tx1"/>
-                </a:solidFill>
-                <a:effectLst/>
-                <a:latin typeface="+mn-lt"/>
-                <a:ea typeface="+mn-ea"/>
-                <a:cs typeface="+mn-cs"/>
-              </a:rPr>
-              <a:t>)&lt;f(\</a:t>
-            </a:r>
-            <a:r>
-              <a:rPr lang="en-US" sz="1200" kern="1200" dirty="0" err="1">
-                <a:solidFill>
-                  <a:schemeClr val="tx1"/>
-                </a:solidFill>
-                <a:effectLst/>
-                <a:latin typeface="+mn-lt"/>
-                <a:ea typeface="+mn-ea"/>
-                <a:cs typeface="+mn-cs"/>
-              </a:rPr>
-              <a:t>x^k</a:t>
-            </a:r>
-            <a:r>
-              <a:rPr lang="en-US" sz="1200" kern="1200" dirty="0">
-                <a:solidFill>
-                  <a:schemeClr val="tx1"/>
-                </a:solidFill>
-                <a:effectLst/>
-                <a:latin typeface="+mn-lt"/>
-                <a:ea typeface="+mn-ea"/>
-                <a:cs typeface="+mn-cs"/>
-              </a:rPr>
-              <a:t>), \</a:t>
-            </a:r>
-            <a:r>
-              <a:rPr lang="en-US" sz="1200" kern="1200" dirty="0" err="1">
-                <a:solidFill>
-                  <a:schemeClr val="tx1"/>
-                </a:solidFill>
-                <a:effectLst/>
-                <a:latin typeface="+mn-lt"/>
-                <a:ea typeface="+mn-ea"/>
-                <a:cs typeface="+mn-cs"/>
-              </a:rPr>
-              <a:t>qquad</a:t>
-            </a:r>
-            <a:r>
-              <a:rPr lang="en-US" sz="1200" kern="1200" dirty="0">
-                <a:solidFill>
-                  <a:schemeClr val="tx1"/>
-                </a:solidFill>
-                <a:effectLst/>
-                <a:latin typeface="+mn-lt"/>
-                <a:ea typeface="+mn-ea"/>
-                <a:cs typeface="+mn-cs"/>
-              </a:rPr>
-              <a:t> k=0,1,\</a:t>
-            </a:r>
-            <a:r>
-              <a:rPr lang="en-US" sz="1200" kern="1200" dirty="0" err="1">
-                <a:solidFill>
-                  <a:schemeClr val="tx1"/>
-                </a:solidFill>
-                <a:effectLst/>
-                <a:latin typeface="+mn-lt"/>
-                <a:ea typeface="+mn-ea"/>
-                <a:cs typeface="+mn-cs"/>
-              </a:rPr>
-              <a:t>ldots</a:t>
-            </a:r>
-            <a:endParaRPr lang="en-US" sz="1200" kern="1200" dirty="0">
-              <a:solidFill>
-                <a:schemeClr val="tx1"/>
-              </a:solidFill>
-              <a:effectLst/>
-              <a:latin typeface="+mn-lt"/>
-              <a:ea typeface="+mn-ea"/>
-              <a:cs typeface="+mn-cs"/>
-            </a:endParaRPr>
-          </a:p>
-          <a:p>
             <a:endParaRPr lang="en-US" dirty="0"/>
           </a:p>
         </p:txBody>
@@ -5607,402 +2174,6 @@
           <a:bodyPr/>
           <a:lstStyle/>
           <a:p>
-            <a:pPr marL="0" marR="0" lvl="0" indent="0" algn="l" defTabSz="914400" rtl="0" eaLnBrk="1" fontAlgn="auto" latinLnBrk="0" hangingPunct="1">
-              <a:lnSpc>
-                <a:spcPct val="100000"/>
-              </a:lnSpc>
-              <a:spcBef>
-                <a:spcPts val="0"/>
-              </a:spcBef>
-              <a:spcAft>
-                <a:spcPts val="0"/>
-              </a:spcAft>
-              <a:buClrTx/>
-              <a:buSzTx/>
-              <a:buFontTx/>
-              <a:buNone/>
-              <a:tabLst/>
-              <a:defRPr/>
-            </a:pPr>
-            <a:r>
-              <a:rPr lang="en-US" sz="1200" kern="1200" dirty="0">
-                <a:solidFill>
-                  <a:schemeClr val="tx1"/>
-                </a:solidFill>
-                <a:effectLst/>
-                <a:latin typeface="+mn-lt"/>
-                <a:ea typeface="+mn-ea"/>
-                <a:cs typeface="+mn-cs"/>
-              </a:rPr>
-              <a:t>\</a:t>
-            </a:r>
-            <a:r>
-              <a:rPr lang="en-US" sz="1200" kern="1200" dirty="0" err="1">
-                <a:solidFill>
-                  <a:schemeClr val="tx1"/>
-                </a:solidFill>
-                <a:effectLst/>
-                <a:latin typeface="+mn-lt"/>
-                <a:ea typeface="+mn-ea"/>
-                <a:cs typeface="+mn-cs"/>
-              </a:rPr>
-              <a:t>dd^k</a:t>
-            </a:r>
-            <a:r>
-              <a:rPr lang="en-US" sz="1200" kern="1200" dirty="0">
-                <a:solidFill>
-                  <a:schemeClr val="tx1"/>
-                </a:solidFill>
-                <a:effectLst/>
-                <a:latin typeface="+mn-lt"/>
-                <a:ea typeface="+mn-ea"/>
-                <a:cs typeface="+mn-cs"/>
-              </a:rPr>
-              <a:t> = -</a:t>
-            </a:r>
-            <a:r>
-              <a:rPr lang="en-US" sz="1200" kern="1200" dirty="0" err="1">
-                <a:solidFill>
-                  <a:schemeClr val="tx1"/>
-                </a:solidFill>
-                <a:effectLst/>
-                <a:latin typeface="+mn-lt"/>
-                <a:ea typeface="+mn-ea"/>
-                <a:cs typeface="+mn-cs"/>
-              </a:rPr>
-              <a:t>D^k</a:t>
-            </a:r>
-            <a:r>
-              <a:rPr lang="en-US" sz="1200" kern="1200" dirty="0">
-                <a:solidFill>
-                  <a:schemeClr val="tx1"/>
-                </a:solidFill>
-                <a:effectLst/>
-                <a:latin typeface="+mn-lt"/>
-                <a:ea typeface="+mn-ea"/>
-                <a:cs typeface="+mn-cs"/>
-              </a:rPr>
-              <a:t> \</a:t>
-            </a:r>
-            <a:r>
-              <a:rPr lang="en-US" sz="1200" kern="1200" dirty="0" err="1">
-                <a:solidFill>
-                  <a:schemeClr val="tx1"/>
-                </a:solidFill>
-                <a:effectLst/>
-                <a:latin typeface="+mn-lt"/>
-                <a:ea typeface="+mn-ea"/>
-                <a:cs typeface="+mn-cs"/>
-              </a:rPr>
-              <a:t>nabla</a:t>
-            </a:r>
-            <a:r>
-              <a:rPr lang="en-US" sz="1200" kern="1200" dirty="0">
-                <a:solidFill>
-                  <a:schemeClr val="tx1"/>
-                </a:solidFill>
-                <a:effectLst/>
-                <a:latin typeface="+mn-lt"/>
-                <a:ea typeface="+mn-ea"/>
-                <a:cs typeface="+mn-cs"/>
-              </a:rPr>
-              <a:t> f(\</a:t>
-            </a:r>
-            <a:r>
-              <a:rPr lang="en-US" sz="1200" kern="1200" dirty="0" err="1">
-                <a:solidFill>
-                  <a:schemeClr val="tx1"/>
-                </a:solidFill>
-                <a:effectLst/>
-                <a:latin typeface="+mn-lt"/>
-                <a:ea typeface="+mn-ea"/>
-                <a:cs typeface="+mn-cs"/>
-              </a:rPr>
-              <a:t>x^k</a:t>
-            </a:r>
-            <a:r>
-              <a:rPr lang="en-US" sz="1200" kern="1200" dirty="0">
-                <a:solidFill>
-                  <a:schemeClr val="tx1"/>
-                </a:solidFill>
-                <a:effectLst/>
-                <a:latin typeface="+mn-lt"/>
-                <a:ea typeface="+mn-ea"/>
-                <a:cs typeface="+mn-cs"/>
-              </a:rPr>
-              <a:t>), \</a:t>
-            </a:r>
-            <a:r>
-              <a:rPr lang="en-US" sz="1200" kern="1200" dirty="0" err="1">
-                <a:solidFill>
-                  <a:schemeClr val="tx1"/>
-                </a:solidFill>
-                <a:effectLst/>
-                <a:latin typeface="+mn-lt"/>
-                <a:ea typeface="+mn-ea"/>
-                <a:cs typeface="+mn-cs"/>
-              </a:rPr>
-              <a:t>qquad</a:t>
-            </a:r>
-            <a:r>
-              <a:rPr lang="en-US" sz="1200" kern="1200" dirty="0">
-                <a:solidFill>
-                  <a:schemeClr val="tx1"/>
-                </a:solidFill>
-                <a:effectLst/>
-                <a:latin typeface="+mn-lt"/>
-                <a:ea typeface="+mn-ea"/>
-                <a:cs typeface="+mn-cs"/>
-              </a:rPr>
-              <a:t> \text{where } </a:t>
-            </a:r>
-            <a:r>
-              <a:rPr lang="en-US" sz="1200" kern="1200" dirty="0" err="1">
-                <a:solidFill>
-                  <a:schemeClr val="tx1"/>
-                </a:solidFill>
-                <a:effectLst/>
-                <a:latin typeface="+mn-lt"/>
-                <a:ea typeface="+mn-ea"/>
-                <a:cs typeface="+mn-cs"/>
-              </a:rPr>
-              <a:t>D^k</a:t>
-            </a:r>
-            <a:r>
-              <a:rPr lang="en-US" sz="1200" kern="1200" dirty="0">
-                <a:solidFill>
-                  <a:schemeClr val="tx1"/>
-                </a:solidFill>
-                <a:effectLst/>
-                <a:latin typeface="+mn-lt"/>
-                <a:ea typeface="+mn-ea"/>
-                <a:cs typeface="+mn-cs"/>
-              </a:rPr>
-              <a:t>&gt;0</a:t>
-            </a:r>
-          </a:p>
-          <a:p>
-            <a:pPr marL="0" marR="0" lvl="0" indent="0" algn="l" defTabSz="914400" rtl="0" eaLnBrk="1" fontAlgn="auto" latinLnBrk="0" hangingPunct="1">
-              <a:lnSpc>
-                <a:spcPct val="100000"/>
-              </a:lnSpc>
-              <a:spcBef>
-                <a:spcPts val="0"/>
-              </a:spcBef>
-              <a:spcAft>
-                <a:spcPts val="0"/>
-              </a:spcAft>
-              <a:buClrTx/>
-              <a:buSzTx/>
-              <a:buFontTx/>
-              <a:buNone/>
-              <a:tabLst/>
-              <a:defRPr/>
-            </a:pPr>
-            <a:r>
-              <a:rPr lang="en-US" sz="1200" kern="1200" dirty="0" err="1">
-                <a:solidFill>
-                  <a:schemeClr val="tx1"/>
-                </a:solidFill>
-                <a:effectLst/>
-                <a:latin typeface="+mn-lt"/>
-                <a:ea typeface="+mn-ea"/>
-                <a:cs typeface="+mn-cs"/>
-              </a:rPr>
-              <a:t>D^k</a:t>
-            </a:r>
-            <a:r>
-              <a:rPr lang="en-US" sz="1200" kern="1200" dirty="0">
-                <a:solidFill>
-                  <a:schemeClr val="tx1"/>
-                </a:solidFill>
-                <a:effectLst/>
-                <a:latin typeface="+mn-lt"/>
-                <a:ea typeface="+mn-ea"/>
-                <a:cs typeface="+mn-cs"/>
-              </a:rPr>
-              <a:t> = I</a:t>
-            </a:r>
-          </a:p>
-          <a:p>
-            <a:pPr marL="0" marR="0" lvl="0" indent="0" algn="l" defTabSz="914400" rtl="0" eaLnBrk="1" fontAlgn="auto" latinLnBrk="0" hangingPunct="1">
-              <a:lnSpc>
-                <a:spcPct val="100000"/>
-              </a:lnSpc>
-              <a:spcBef>
-                <a:spcPts val="0"/>
-              </a:spcBef>
-              <a:spcAft>
-                <a:spcPts val="0"/>
-              </a:spcAft>
-              <a:buClrTx/>
-              <a:buSzTx/>
-              <a:buFontTx/>
-              <a:buNone/>
-              <a:tabLst/>
-              <a:defRPr/>
-            </a:pPr>
-            <a:endParaRPr lang="en-US" sz="1200" kern="1200" dirty="0">
-              <a:solidFill>
-                <a:schemeClr val="tx1"/>
-              </a:solidFill>
-              <a:effectLst/>
-              <a:latin typeface="+mn-lt"/>
-              <a:ea typeface="+mn-ea"/>
-              <a:cs typeface="+mn-cs"/>
-            </a:endParaRPr>
-          </a:p>
-          <a:p>
-            <a:pPr marL="0" marR="0" lvl="0" indent="0" algn="l" defTabSz="914400" rtl="0" eaLnBrk="1" fontAlgn="auto" latinLnBrk="0" hangingPunct="1">
-              <a:lnSpc>
-                <a:spcPct val="100000"/>
-              </a:lnSpc>
-              <a:spcBef>
-                <a:spcPts val="0"/>
-              </a:spcBef>
-              <a:spcAft>
-                <a:spcPts val="0"/>
-              </a:spcAft>
-              <a:buClrTx/>
-              <a:buSzTx/>
-              <a:buFontTx/>
-              <a:buNone/>
-              <a:tabLst/>
-              <a:defRPr/>
-            </a:pPr>
-            <a:r>
-              <a:rPr lang="en-US" sz="1200" kern="1200" dirty="0" err="1">
-                <a:solidFill>
-                  <a:schemeClr val="tx1"/>
-                </a:solidFill>
-                <a:effectLst/>
-                <a:latin typeface="+mn-lt"/>
-                <a:ea typeface="+mn-ea"/>
-                <a:cs typeface="+mn-cs"/>
-              </a:rPr>
-              <a:t>D^k</a:t>
-            </a:r>
-            <a:r>
-              <a:rPr lang="en-US" sz="1200" kern="1200" dirty="0">
-                <a:solidFill>
-                  <a:schemeClr val="tx1"/>
-                </a:solidFill>
-                <a:effectLst/>
-                <a:latin typeface="+mn-lt"/>
-                <a:ea typeface="+mn-ea"/>
-                <a:cs typeface="+mn-cs"/>
-              </a:rPr>
-              <a:t> = \left(\nabla^2f(\</a:t>
-            </a:r>
-            <a:r>
-              <a:rPr lang="en-US" sz="1200" kern="1200" dirty="0" err="1">
-                <a:solidFill>
-                  <a:schemeClr val="tx1"/>
-                </a:solidFill>
-                <a:effectLst/>
-                <a:latin typeface="+mn-lt"/>
-                <a:ea typeface="+mn-ea"/>
-                <a:cs typeface="+mn-cs"/>
-              </a:rPr>
-              <a:t>x^k</a:t>
-            </a:r>
-            <a:r>
-              <a:rPr lang="en-US" sz="1200" kern="1200" dirty="0">
-                <a:solidFill>
-                  <a:schemeClr val="tx1"/>
-                </a:solidFill>
-                <a:effectLst/>
-                <a:latin typeface="+mn-lt"/>
-                <a:ea typeface="+mn-ea"/>
-                <a:cs typeface="+mn-cs"/>
-              </a:rPr>
-              <a:t>)\right)^{-1}</a:t>
-            </a:r>
-          </a:p>
-          <a:p>
-            <a:pPr marL="0" marR="0" lvl="0" indent="0" algn="l" defTabSz="914400" rtl="0" eaLnBrk="1" fontAlgn="auto" latinLnBrk="0" hangingPunct="1">
-              <a:lnSpc>
-                <a:spcPct val="100000"/>
-              </a:lnSpc>
-              <a:spcBef>
-                <a:spcPts val="0"/>
-              </a:spcBef>
-              <a:spcAft>
-                <a:spcPts val="0"/>
-              </a:spcAft>
-              <a:buClrTx/>
-              <a:buSzTx/>
-              <a:buFontTx/>
-              <a:buNone/>
-              <a:tabLst/>
-              <a:defRPr/>
-            </a:pPr>
-            <a:endParaRPr lang="en-US" sz="1200" kern="1200" dirty="0">
-              <a:solidFill>
-                <a:schemeClr val="tx1"/>
-              </a:solidFill>
-              <a:effectLst/>
-              <a:latin typeface="+mn-lt"/>
-              <a:ea typeface="+mn-ea"/>
-              <a:cs typeface="+mn-cs"/>
-            </a:endParaRPr>
-          </a:p>
-          <a:p>
-            <a:pPr marL="0" marR="0" lvl="0" indent="0" algn="l" defTabSz="914400" rtl="0" eaLnBrk="1" fontAlgn="auto" latinLnBrk="0" hangingPunct="1">
-              <a:lnSpc>
-                <a:spcPct val="100000"/>
-              </a:lnSpc>
-              <a:spcBef>
-                <a:spcPts val="0"/>
-              </a:spcBef>
-              <a:spcAft>
-                <a:spcPts val="0"/>
-              </a:spcAft>
-              <a:buClrTx/>
-              <a:buSzTx/>
-              <a:buFontTx/>
-              <a:buNone/>
-              <a:tabLst/>
-              <a:defRPr/>
-            </a:pPr>
-            <a:r>
-              <a:rPr lang="es-ES" sz="1200" kern="1200" dirty="0">
-                <a:solidFill>
-                  <a:schemeClr val="tx1"/>
-                </a:solidFill>
-                <a:effectLst/>
-                <a:latin typeface="+mn-lt"/>
-                <a:ea typeface="+mn-ea"/>
-                <a:cs typeface="+mn-cs"/>
-              </a:rPr>
-              <a:t>\nabla^2f(\</a:t>
-            </a:r>
-            <a:r>
-              <a:rPr lang="es-ES" sz="1200" kern="1200" dirty="0" err="1">
-                <a:solidFill>
-                  <a:schemeClr val="tx1"/>
-                </a:solidFill>
-                <a:effectLst/>
-                <a:latin typeface="+mn-lt"/>
-                <a:ea typeface="+mn-ea"/>
-                <a:cs typeface="+mn-cs"/>
-              </a:rPr>
-              <a:t>x^k</a:t>
-            </a:r>
-            <a:r>
-              <a:rPr lang="es-ES" sz="1200" kern="1200" dirty="0">
-                <a:solidFill>
-                  <a:schemeClr val="tx1"/>
-                </a:solidFill>
-                <a:effectLst/>
-                <a:latin typeface="+mn-lt"/>
-                <a:ea typeface="+mn-ea"/>
-                <a:cs typeface="+mn-cs"/>
-              </a:rPr>
-              <a:t>)&gt;0</a:t>
-            </a:r>
-          </a:p>
-          <a:p>
             <a:endParaRPr lang="en-US" dirty="0"/>
           </a:p>
         </p:txBody>
@@ -6086,181 +2257,6 @@
         <p:txBody>
           <a:bodyPr/>
           <a:lstStyle/>
-          <a:p>
-            <a:pPr marL="0" marR="0" lvl="0" indent="0" algn="l" defTabSz="914400" rtl="0" eaLnBrk="1" fontAlgn="auto" latinLnBrk="0" hangingPunct="1">
-              <a:lnSpc>
-                <a:spcPct val="100000"/>
-              </a:lnSpc>
-              <a:spcBef>
-                <a:spcPts val="0"/>
-              </a:spcBef>
-              <a:spcAft>
-                <a:spcPts val="0"/>
-              </a:spcAft>
-              <a:buClrTx/>
-              <a:buSzTx/>
-              <a:buFontTx/>
-              <a:buNone/>
-              <a:tabLst/>
-              <a:defRPr/>
-            </a:pPr>
-            <a:r>
-              <a:rPr lang="en-US" sz="1200" kern="1200" dirty="0">
-                <a:solidFill>
-                  <a:schemeClr val="tx1"/>
-                </a:solidFill>
-                <a:effectLst/>
-                <a:latin typeface="+mn-lt"/>
-                <a:ea typeface="+mn-ea"/>
-                <a:cs typeface="+mn-cs"/>
-              </a:rPr>
-              <a:t>  f(\</a:t>
-            </a:r>
-            <a:r>
-              <a:rPr lang="en-US" sz="1200" kern="1200" dirty="0" err="1">
-                <a:solidFill>
-                  <a:schemeClr val="tx1"/>
-                </a:solidFill>
-                <a:effectLst/>
-                <a:latin typeface="+mn-lt"/>
-                <a:ea typeface="+mn-ea"/>
-                <a:cs typeface="+mn-cs"/>
-              </a:rPr>
-              <a:t>x^k</a:t>
-            </a:r>
-            <a:r>
-              <a:rPr lang="en-US" sz="1200" kern="1200" dirty="0">
-                <a:solidFill>
-                  <a:schemeClr val="tx1"/>
-                </a:solidFill>
-                <a:effectLst/>
-                <a:latin typeface="+mn-lt"/>
-                <a:ea typeface="+mn-ea"/>
-                <a:cs typeface="+mn-cs"/>
-              </a:rPr>
-              <a:t> + \</a:t>
-            </a:r>
-            <a:r>
-              <a:rPr lang="en-US" sz="1200" kern="1200" dirty="0" err="1">
-                <a:solidFill>
-                  <a:schemeClr val="tx1"/>
-                </a:solidFill>
-                <a:effectLst/>
-                <a:latin typeface="+mn-lt"/>
-                <a:ea typeface="+mn-ea"/>
-                <a:cs typeface="+mn-cs"/>
-              </a:rPr>
-              <a:t>alpha^k</a:t>
-            </a:r>
-            <a:r>
-              <a:rPr lang="en-US" sz="1200" kern="1200" dirty="0">
-                <a:solidFill>
-                  <a:schemeClr val="tx1"/>
-                </a:solidFill>
-                <a:effectLst/>
-                <a:latin typeface="+mn-lt"/>
-                <a:ea typeface="+mn-ea"/>
-                <a:cs typeface="+mn-cs"/>
-              </a:rPr>
-              <a:t>\</a:t>
-            </a:r>
-            <a:r>
-              <a:rPr lang="en-US" sz="1200" kern="1200" dirty="0" err="1">
-                <a:solidFill>
-                  <a:schemeClr val="tx1"/>
-                </a:solidFill>
-                <a:effectLst/>
-                <a:latin typeface="+mn-lt"/>
-                <a:ea typeface="+mn-ea"/>
-                <a:cs typeface="+mn-cs"/>
-              </a:rPr>
-              <a:t>dd^k</a:t>
-            </a:r>
-            <a:r>
-              <a:rPr lang="en-US" sz="1200" kern="1200" dirty="0">
-                <a:solidFill>
-                  <a:schemeClr val="tx1"/>
-                </a:solidFill>
-                <a:effectLst/>
-                <a:latin typeface="+mn-lt"/>
-                <a:ea typeface="+mn-ea"/>
-                <a:cs typeface="+mn-cs"/>
-              </a:rPr>
-              <a:t>) = \min_{\alpha\</a:t>
-            </a:r>
-            <a:r>
-              <a:rPr lang="en-US" sz="1200" kern="1200" dirty="0" err="1">
-                <a:solidFill>
-                  <a:schemeClr val="tx1"/>
-                </a:solidFill>
-                <a:effectLst/>
-                <a:latin typeface="+mn-lt"/>
-                <a:ea typeface="+mn-ea"/>
-                <a:cs typeface="+mn-cs"/>
-              </a:rPr>
-              <a:t>geq</a:t>
-            </a:r>
-            <a:r>
-              <a:rPr lang="en-US" sz="1200" kern="1200" dirty="0">
-                <a:solidFill>
-                  <a:schemeClr val="tx1"/>
-                </a:solidFill>
-                <a:effectLst/>
-                <a:latin typeface="+mn-lt"/>
-                <a:ea typeface="+mn-ea"/>
-                <a:cs typeface="+mn-cs"/>
-              </a:rPr>
-              <a:t> 0}\,  f(\</a:t>
-            </a:r>
-            <a:r>
-              <a:rPr lang="en-US" sz="1200" kern="1200" dirty="0" err="1">
-                <a:solidFill>
-                  <a:schemeClr val="tx1"/>
-                </a:solidFill>
-                <a:effectLst/>
-                <a:latin typeface="+mn-lt"/>
-                <a:ea typeface="+mn-ea"/>
-                <a:cs typeface="+mn-cs"/>
-              </a:rPr>
-              <a:t>x^k</a:t>
-            </a:r>
-            <a:r>
-              <a:rPr lang="en-US" sz="1200" kern="1200" dirty="0">
-                <a:solidFill>
-                  <a:schemeClr val="tx1"/>
-                </a:solidFill>
-                <a:effectLst/>
-                <a:latin typeface="+mn-lt"/>
-                <a:ea typeface="+mn-ea"/>
-                <a:cs typeface="+mn-cs"/>
-              </a:rPr>
-              <a:t> + \alpha \</a:t>
-            </a:r>
-            <a:r>
-              <a:rPr lang="en-US" sz="1200" kern="1200" dirty="0" err="1">
-                <a:solidFill>
-                  <a:schemeClr val="tx1"/>
-                </a:solidFill>
-                <a:effectLst/>
-                <a:latin typeface="+mn-lt"/>
-                <a:ea typeface="+mn-ea"/>
-                <a:cs typeface="+mn-cs"/>
-              </a:rPr>
-              <a:t>dd^k</a:t>
-            </a:r>
-            <a:r>
-              <a:rPr lang="en-US" sz="1200" kern="1200" dirty="0">
-                <a:solidFill>
-                  <a:schemeClr val="tx1"/>
-                </a:solidFill>
-                <a:effectLst/>
-                <a:latin typeface="+mn-lt"/>
-                <a:ea typeface="+mn-ea"/>
-                <a:cs typeface="+mn-cs"/>
-              </a:rPr>
-              <a:t>)</a:t>
-            </a:r>
-          </a:p>
           <a:p>
             <a:endParaRPr lang="en-US" dirty="0"/>
           </a:p>
@@ -6528,7 +2524,7 @@
           <a:p>
             <a:fld id="{85231C86-9EFB-5144-B03B-BBD8D1A0FCAE}" type="datetime1">
               <a:rPr lang="en-US" smtClean="0"/>
-              <a:t>4/5/26</a:t>
+              <a:t>8/13/26</a:t>
             </a:fld>
             <a:endParaRPr lang="en-US" dirty="0"/>
           </a:p>
@@ -6804,7 +2800,7 @@
           <a:p>
             <a:fld id="{5FA01E9C-DCF5-9347-847D-229229AD1E07}" type="datetime1">
               <a:rPr lang="en-US" smtClean="0"/>
-              <a:t>4/5/26</a:t>
+              <a:t>8/13/26</a:t>
             </a:fld>
             <a:endParaRPr lang="en-US"/>
           </a:p>
@@ -7075,7 +3071,7 @@
           <a:p>
             <a:fld id="{0EC03135-6BF6-1D45-A4B3-F4BFF1D040D2}" type="datetime1">
               <a:rPr lang="en-US" smtClean="0"/>
-              <a:t>4/5/26</a:t>
+              <a:t>8/13/26</a:t>
             </a:fld>
             <a:endParaRPr lang="en-US"/>
           </a:p>
@@ -7702,7 +3698,7 @@
                     <m:sSup>
                       <m:sSupPr>
                         <m:ctrlPr>
-                          <a:rPr lang="en-US" b="0" i="1" smtClean="0">
+                          <a:rPr lang="en-US" b="1" i="0" smtClean="0">
                             <a:latin typeface="Cambria Math" panose="02040503050406030204" pitchFamily="18" charset="0"/>
                           </a:rPr>
                         </m:ctrlPr>
@@ -7885,7 +3881,7 @@
                       <m:naryPr>
                         <m:chr m:val="∑"/>
                         <m:ctrlPr>
-                          <a:rPr lang="en-US" i="1" smtClean="0">
+                          <a:rPr lang="en-US" b="0" i="1" smtClean="0">
                             <a:latin typeface="Cambria Math" panose="02040503050406030204" pitchFamily="18" charset="0"/>
                           </a:rPr>
                         </m:ctrlPr>
@@ -8036,7 +4032,7 @@
           <a:p>
             <a:fld id="{C401543A-1260-F948-BFF4-A3854D4354E7}" type="datetime1">
               <a:rPr lang="en-US" smtClean="0"/>
-              <a:t>4/5/26</a:t>
+              <a:t>8/13/26</a:t>
             </a:fld>
             <a:endParaRPr lang="en-US"/>
           </a:p>
@@ -8291,7 +4287,7 @@
           <a:p>
             <a:fld id="{0E8DD085-A157-1C46-BD97-4CC0246D96AE}" type="datetime1">
               <a:rPr lang="en-US" smtClean="0"/>
-              <a:t>4/5/26</a:t>
+              <a:t>8/13/26</a:t>
             </a:fld>
             <a:endParaRPr lang="en-US"/>
           </a:p>
@@ -8548,7 +4544,7 @@
           <a:p>
             <a:fld id="{770F4295-FC82-8648-ABC0-4ADE73D13CAD}" type="datetime1">
               <a:rPr lang="en-US" smtClean="0"/>
-              <a:t>4/5/26</a:t>
+              <a:t>8/13/26</a:t>
             </a:fld>
             <a:endParaRPr lang="en-US"/>
           </a:p>
@@ -8873,7 +4869,7 @@
           <a:p>
             <a:fld id="{1B9B3ADA-D79D-4047-B9DB-A2DE7AFD3ABF}" type="datetime1">
               <a:rPr lang="en-US" smtClean="0"/>
-              <a:t>4/5/26</a:t>
+              <a:t>8/13/26</a:t>
             </a:fld>
             <a:endParaRPr lang="en-US"/>
           </a:p>
@@ -9076,7 +5072,7 @@
                           <a:rPr lang="en-US" b="0" i="1" smtClean="0">
                             <a:latin typeface="Cambria Math" panose="02040503050406030204" pitchFamily="18" charset="0"/>
                           </a:rPr>
-                          <m:t>h</m:t>
+                          <m:t>ℎ</m:t>
                         </m:r>
                       </m:e>
                       <m:sub>
@@ -9206,7 +5202,7 @@
                     <m:sSub>
                       <m:sSubPr>
                         <m:ctrlPr>
-                          <a:rPr lang="en-US" i="1" smtClean="0">
+                          <a:rPr lang="en-US" b="0" i="1" smtClean="0">
                             <a:latin typeface="Cambria Math" panose="02040503050406030204" pitchFamily="18" charset="0"/>
                             <a:sym typeface="Wingdings" pitchFamily="2" charset="2"/>
                           </a:rPr>
@@ -9218,7 +5214,7 @@
                             <a:latin typeface="Cambria Math" panose="02040503050406030204" pitchFamily="18" charset="0"/>
                             <a:sym typeface="Wingdings" pitchFamily="2" charset="2"/>
                           </a:rPr>
-                          <m:t>h</m:t>
+                          <m:t>ℎ</m:t>
                         </m:r>
                       </m:e>
                       <m:sub>
@@ -9248,7 +5244,7 @@
                     <m:sSub>
                       <m:sSubPr>
                         <m:ctrlPr>
-                          <a:rPr lang="en-US" i="1" smtClean="0">
+                          <a:rPr lang="en-US" b="0" i="1" smtClean="0">
                             <a:latin typeface="Cambria Math" panose="02040503050406030204" pitchFamily="18" charset="0"/>
                             <a:sym typeface="Wingdings" pitchFamily="2" charset="2"/>
                           </a:rPr>
@@ -9260,7 +5256,7 @@
                             <a:latin typeface="Cambria Math" panose="02040503050406030204" pitchFamily="18" charset="0"/>
                             <a:sym typeface="Wingdings" pitchFamily="2" charset="2"/>
                           </a:rPr>
-                          <m:t>h</m:t>
+                          <m:t>ℎ</m:t>
                         </m:r>
                       </m:e>
                       <m:sub>
@@ -9416,7 +5412,7 @@
           <a:p>
             <a:fld id="{1872ED0B-9317-1D4D-8D46-959662E6F2DD}" type="datetime1">
               <a:rPr lang="en-US" smtClean="0"/>
-              <a:t>4/5/26</a:t>
+              <a:t>8/13/26</a:t>
             </a:fld>
             <a:endParaRPr lang="en-US"/>
           </a:p>
@@ -9656,7 +5652,7 @@
                     <m:sSup>
                       <m:sSupPr>
                         <m:ctrlPr>
-                          <a:rPr lang="en-US" b="1" i="1" smtClean="0">
+                          <a:rPr lang="en-US" b="1" i="0" smtClean="0">
                             <a:latin typeface="Cambria Math" panose="02040503050406030204" pitchFamily="18" charset="0"/>
                           </a:rPr>
                         </m:ctrlPr>
@@ -9943,7 +5939,7 @@
           <a:p>
             <a:fld id="{61903DFE-D486-164C-9320-128F2F912A60}" type="datetime1">
               <a:rPr lang="en-US" smtClean="0"/>
-              <a:t>4/5/26</a:t>
+              <a:t>8/13/26</a:t>
             </a:fld>
             <a:endParaRPr lang="en-US"/>
           </a:p>
@@ -10166,7 +6162,7 @@
           <a:p>
             <a:fld id="{1F133CC6-3368-1C48-B3F0-10C0DC0A886A}" type="datetime1">
               <a:rPr lang="en-US" smtClean="0"/>
-              <a:t>4/5/26</a:t>
+              <a:t>8/13/26</a:t>
             </a:fld>
             <a:endParaRPr lang="en-US"/>
           </a:p>
@@ -10463,7 +6459,7 @@
                     <m:sSup>
                       <m:sSupPr>
                         <m:ctrlPr>
-                          <a:rPr lang="en-US" b="1" i="1" smtClean="0">
+                          <a:rPr lang="en-US" b="1" i="0" smtClean="0">
                             <a:latin typeface="Cambria Math" panose="02040503050406030204" pitchFamily="18" charset="0"/>
                           </a:rPr>
                         </m:ctrlPr>
@@ -10769,7 +6765,7 @@
                     <m:sSup>
                       <m:sSupPr>
                         <m:ctrlPr>
-                          <a:rPr lang="en-US" sz="2800" b="1" i="1" smtClean="0">
+                          <a:rPr lang="en-US" sz="2800" b="1" i="0" smtClean="0">
                             <a:latin typeface="Cambria Math" panose="02040503050406030204" pitchFamily="18" charset="0"/>
                           </a:rPr>
                         </m:ctrlPr>
@@ -10872,7 +6868,7 @@
           <a:p>
             <a:fld id="{607705E9-B184-AF46-B11C-A77D9CB8FD5A}" type="datetime1">
               <a:rPr lang="en-US" smtClean="0"/>
-              <a:t>4/5/26</a:t>
+              <a:t>8/13/26</a:t>
             </a:fld>
             <a:endParaRPr lang="en-US"/>
           </a:p>
@@ -11182,7 +7178,7 @@
                     <m:sSup>
                       <m:sSupPr>
                         <m:ctrlPr>
-                          <a:rPr lang="en-US" sz="2600" b="0" i="1" smtClean="0">
+                          <a:rPr lang="en-US" sz="2600" b="1" i="0" smtClean="0">
                             <a:latin typeface="Cambria Math" panose="02040503050406030204" pitchFamily="18" charset="0"/>
                             <a:ea typeface="Cambria Math" panose="02040503050406030204" pitchFamily="18" charset="0"/>
                           </a:rPr>
@@ -11228,7 +7224,7 @@
                     <m:sSup>
                       <m:sSupPr>
                         <m:ctrlPr>
-                          <a:rPr lang="en-US" sz="2600" i="1">
+                          <a:rPr lang="en-US" sz="2600" b="1">
                             <a:latin typeface="Cambria Math" panose="02040503050406030204" pitchFamily="18" charset="0"/>
                             <a:ea typeface="Cambria Math" panose="02040503050406030204" pitchFamily="18" charset="0"/>
                           </a:rPr>
@@ -11304,7 +7300,7 @@
                     <m:sSup>
                       <m:sSupPr>
                         <m:ctrlPr>
-                          <a:rPr lang="en-US" sz="2600" i="1">
+                          <a:rPr lang="en-US" sz="2600" b="1">
                             <a:latin typeface="Cambria Math" panose="02040503050406030204" pitchFamily="18" charset="0"/>
                             <a:ea typeface="Cambria Math" panose="02040503050406030204" pitchFamily="18" charset="0"/>
                           </a:rPr>
@@ -11431,7 +7427,7 @@
                     <m:sSup>
                       <m:sSupPr>
                         <m:ctrlPr>
-                          <a:rPr lang="en-US" sz="2600" i="1">
+                          <a:rPr lang="en-US" sz="2600" b="1">
                             <a:latin typeface="Cambria Math" panose="02040503050406030204" pitchFamily="18" charset="0"/>
                             <a:ea typeface="Cambria Math" panose="02040503050406030204" pitchFamily="18" charset="0"/>
                           </a:rPr>
@@ -11500,7 +7496,7 @@
                     <m:d>
                       <m:dPr>
                         <m:ctrlPr>
-                          <a:rPr lang="en-US" sz="2600" b="1" i="1" smtClean="0">
+                          <a:rPr lang="en-US" sz="2600" b="1" i="0" smtClean="0">
                             <a:latin typeface="Cambria Math" panose="02040503050406030204" pitchFamily="18" charset="0"/>
                           </a:rPr>
                         </m:ctrlPr>
@@ -11551,7 +7547,7 @@
                     <m:sSup>
                       <m:sSupPr>
                         <m:ctrlPr>
-                          <a:rPr lang="en-US" sz="2600" b="0" i="1" smtClean="0">
+                          <a:rPr lang="en-US" sz="2600" i="1">
                             <a:latin typeface="Cambria Math" panose="02040503050406030204" pitchFamily="18" charset="0"/>
                             <a:ea typeface="Cambria Math" panose="02040503050406030204" pitchFamily="18" charset="0"/>
                           </a:rPr>
@@ -11571,7 +7567,7 @@
                             <m:sSup>
                               <m:sSupPr>
                                 <m:ctrlPr>
-                                  <a:rPr lang="en-US" sz="2600" i="1">
+                                  <a:rPr lang="en-US" sz="2600" b="1">
                                     <a:latin typeface="Cambria Math" panose="02040503050406030204" pitchFamily="18" charset="0"/>
                                     <a:ea typeface="Cambria Math" panose="02040503050406030204" pitchFamily="18" charset="0"/>
                                   </a:rPr>
@@ -11797,7 +7793,7 @@
           <a:p>
             <a:fld id="{0BD2686F-EC65-AE4C-B490-4E24755F9D9A}" type="datetime1">
               <a:rPr lang="en-US" smtClean="0"/>
-              <a:t>4/5/26</a:t>
+              <a:t>8/13/26</a:t>
             </a:fld>
             <a:endParaRPr lang="en-US"/>
           </a:p>
@@ -12056,7 +8052,7 @@
                     <m:sSup>
                       <m:sSupPr>
                         <m:ctrlPr>
-                          <a:rPr lang="en-US" i="1">
+                          <a:rPr lang="en-US" b="1">
                             <a:latin typeface="Cambria Math" panose="02040503050406030204" pitchFamily="18" charset="0"/>
                             <a:ea typeface="Cambria Math" panose="02040503050406030204" pitchFamily="18" charset="0"/>
                           </a:rPr>
@@ -12125,7 +8121,7 @@
                     <m:d>
                       <m:dPr>
                         <m:ctrlPr>
-                          <a:rPr lang="en-US" b="1" i="1">
+                          <a:rPr lang="en-US" b="1">
                             <a:latin typeface="Cambria Math" panose="02040503050406030204" pitchFamily="18" charset="0"/>
                           </a:rPr>
                         </m:ctrlPr>
@@ -12178,7 +8174,7 @@
                           <a:rPr lang="en-US" b="0" i="1" smtClean="0">
                             <a:latin typeface="Cambria Math" panose="02040503050406030204" pitchFamily="18" charset="0"/>
                           </a:rPr>
-                          <m:t>h</m:t>
+                          <m:t>ℎ</m:t>
                         </m:r>
                       </m:e>
                       <m:sub>
@@ -12199,7 +8195,7 @@
                     <m:sSup>
                       <m:sSupPr>
                         <m:ctrlPr>
-                          <a:rPr lang="en-US" b="1" i="1" smtClean="0">
+                          <a:rPr lang="en-US" b="1" i="0" smtClean="0">
                             <a:latin typeface="Cambria Math" panose="02040503050406030204" pitchFamily="18" charset="0"/>
                           </a:rPr>
                         </m:ctrlPr>
@@ -12249,7 +8245,7 @@
                           <a:rPr lang="en-US" i="1">
                             <a:latin typeface="Cambria Math" panose="02040503050406030204" pitchFamily="18" charset="0"/>
                           </a:rPr>
-                          <m:t>h</m:t>
+                          <m:t>ℎ</m:t>
                         </m:r>
                       </m:e>
                       <m:sub>
@@ -12270,7 +8266,7 @@
                     <m:sSup>
                       <m:sSupPr>
                         <m:ctrlPr>
-                          <a:rPr lang="en-US" b="1" i="1">
+                          <a:rPr lang="en-US" b="1">
                             <a:latin typeface="Cambria Math" panose="02040503050406030204" pitchFamily="18" charset="0"/>
                           </a:rPr>
                         </m:ctrlPr>
@@ -12585,7 +8581,7 @@
           <a:p>
             <a:fld id="{FC53656A-060B-3B4E-A9C6-A5D89B7858FA}" type="datetime1">
               <a:rPr lang="en-US" smtClean="0"/>
-              <a:t>4/5/26</a:t>
+              <a:t>8/13/26</a:t>
             </a:fld>
             <a:endParaRPr lang="en-US"/>
           </a:p>
@@ -12820,7 +8816,7 @@
           <a:p>
             <a:fld id="{3129B05A-3EA6-E045-B5A9-8432AD1539F7}" type="datetime1">
               <a:rPr lang="en-US" smtClean="0"/>
-              <a:t>4/5/26</a:t>
+              <a:t>8/13/26</a:t>
             </a:fld>
             <a:endParaRPr lang="en-US"/>
           </a:p>
@@ -12989,7 +8985,7 @@
                             <m:begChr m:val="{"/>
                             <m:endChr m:val="}"/>
                             <m:ctrlPr>
-                              <a:rPr lang="en-US" b="0" i="1" smtClean="0">
+                              <a:rPr lang="en-US" b="0" i="0" smtClean="0">
                                 <a:latin typeface="Cambria Math" panose="02040503050406030204" pitchFamily="18" charset="0"/>
                               </a:rPr>
                             </m:ctrlPr>
@@ -13017,7 +9013,7 @@
                                   <a:rPr lang="en-US" b="0" i="1" smtClean="0">
                                     <a:latin typeface="Cambria Math" panose="02040503050406030204" pitchFamily="18" charset="0"/>
                                   </a:rPr>
-                                  <m:t>h</m:t>
+                                  <m:t>ℎ</m:t>
                                 </m:r>
                               </m:e>
                               <m:sub>
@@ -13032,7 +9028,7 @@
                             <m:d>
                               <m:dPr>
                                 <m:ctrlPr>
-                                  <a:rPr lang="en-US" b="0" i="1" smtClean="0">
+                                  <a:rPr lang="en-US" b="1" i="0" smtClean="0">
                                     <a:latin typeface="Cambria Math" panose="02040503050406030204" pitchFamily="18" charset="0"/>
                                   </a:rPr>
                                 </m:ctrlPr>
@@ -13326,7 +9322,7 @@
           <a:p>
             <a:fld id="{28C792C2-CC7D-7E4B-AE96-AE7A566AE49D}" type="datetime1">
               <a:rPr lang="en-US" smtClean="0"/>
-              <a:t>4/5/26</a:t>
+              <a:t>8/13/26</a:t>
             </a:fld>
             <a:endParaRPr lang="en-US"/>
           </a:p>
@@ -13629,7 +9625,7 @@
                     <m:sSup>
                       <m:sSupPr>
                         <m:ctrlPr>
-                          <a:rPr lang="en-US" b="1" i="1" smtClean="0">
+                          <a:rPr lang="en-US" b="1" i="0" smtClean="0">
                             <a:latin typeface="Cambria Math" panose="02040503050406030204" pitchFamily="18" charset="0"/>
                           </a:rPr>
                         </m:ctrlPr>
@@ -13960,7 +9956,7 @@
           <a:p>
             <a:fld id="{7FC303EB-6E66-D742-B6F6-C6B88E550B3E}" type="datetime1">
               <a:rPr lang="en-US" smtClean="0"/>
-              <a:t>4/5/26</a:t>
+              <a:t>8/13/26</a:t>
             </a:fld>
             <a:endParaRPr lang="en-US"/>
           </a:p>
@@ -14279,7 +10275,7 @@
           <a:p>
             <a:fld id="{06AB4ECA-B152-C34B-A3B4-E175B923F3D2}" type="datetime1">
               <a:rPr lang="en-US" smtClean="0"/>
-              <a:t>4/5/26</a:t>
+              <a:t>8/13/26</a:t>
             </a:fld>
             <a:endParaRPr lang="en-US"/>
           </a:p>
@@ -14457,7 +10453,7 @@
                           <a:rPr lang="en-US" i="1" dirty="0" smtClean="0">
                             <a:latin typeface="Cambria Math" panose="02040503050406030204" pitchFamily="18" charset="0"/>
                           </a:rPr>
-                          <m:t>h</m:t>
+                          <m:t>ℎ</m:t>
                         </m:r>
                       </m:e>
                       <m:sub>
@@ -14712,7 +10708,7 @@
           <a:p>
             <a:fld id="{3F36D7FF-4BA8-B843-9E4A-C36EA8099767}" type="datetime1">
               <a:rPr lang="en-US" smtClean="0"/>
-              <a:t>4/5/26</a:t>
+              <a:t>8/13/26</a:t>
             </a:fld>
             <a:endParaRPr lang="en-US"/>
           </a:p>
@@ -15068,7 +11064,7 @@
                     <m:sSup>
                       <m:sSupPr>
                         <m:ctrlPr>
-                          <a:rPr lang="en-US" b="1" i="1" smtClean="0">
+                          <a:rPr lang="en-US" b="1" i="0" smtClean="0">
                             <a:latin typeface="Cambria Math" panose="02040503050406030204" pitchFamily="18" charset="0"/>
                           </a:rPr>
                         </m:ctrlPr>
@@ -15104,7 +11100,7 @@
                     <m:sSup>
                       <m:sSupPr>
                         <m:ctrlPr>
-                          <a:rPr lang="en-US" b="1" i="1">
+                          <a:rPr lang="en-US" b="1">
                             <a:latin typeface="Cambria Math" panose="02040503050406030204" pitchFamily="18" charset="0"/>
                           </a:rPr>
                         </m:ctrlPr>
@@ -15289,7 +11285,7 @@
           <a:p>
             <a:fld id="{A5062052-3457-0B49-B9CA-CD46D84FCB6B}" type="datetime1">
               <a:rPr lang="en-US" smtClean="0"/>
-              <a:t>4/5/26</a:t>
+              <a:t>8/13/26</a:t>
             </a:fld>
             <a:endParaRPr lang="en-US"/>
           </a:p>
@@ -15526,7 +11522,7 @@
                     <m:sSup>
                       <m:sSupPr>
                         <m:ctrlPr>
-                          <a:rPr lang="en-US" b="1" i="1" smtClean="0">
+                          <a:rPr lang="en-US" b="1" i="0" smtClean="0">
                             <a:latin typeface="Cambria Math" panose="02040503050406030204" pitchFamily="18" charset="0"/>
                           </a:rPr>
                         </m:ctrlPr>
@@ -15559,7 +11555,7 @@
                     <m:sSup>
                       <m:sSupPr>
                         <m:ctrlPr>
-                          <a:rPr lang="en-US" b="1" i="1">
+                          <a:rPr lang="en-US" b="1">
                             <a:latin typeface="Cambria Math" panose="02040503050406030204" pitchFamily="18" charset="0"/>
                           </a:rPr>
                         </m:ctrlPr>
@@ -15734,7 +11730,7 @@
           <a:p>
             <a:fld id="{F2E2B567-D178-DA4B-A057-3DCA12BDE0A8}" type="datetime1">
               <a:rPr lang="en-US" smtClean="0"/>
-              <a:t>4/5/26</a:t>
+              <a:t>8/13/26</a:t>
             </a:fld>
             <a:endParaRPr lang="en-US"/>
           </a:p>
@@ -15830,7 +11826,7 @@
                     <m:sSup>
                       <m:sSupPr>
                         <m:ctrlPr>
-                          <a:rPr lang="en-US" b="1" i="1">
+                          <a:rPr lang="en-US" b="1">
                             <a:latin typeface="Cambria Math" panose="02040503050406030204" pitchFamily="18" charset="0"/>
                           </a:rPr>
                         </m:ctrlPr>
@@ -16009,7 +12005,7 @@
                     <m:sSup>
                       <m:sSupPr>
                         <m:ctrlPr>
-                          <a:rPr lang="en-US" b="1" i="1" smtClean="0">
+                          <a:rPr lang="en-US" b="1" i="0" smtClean="0">
                             <a:latin typeface="Cambria Math" panose="02040503050406030204" pitchFamily="18" charset="0"/>
                           </a:rPr>
                         </m:ctrlPr>
@@ -16217,7 +12213,7 @@
           <a:p>
             <a:fld id="{19790282-714B-6946-9BD8-EB9B3598FF3D}" type="datetime1">
               <a:rPr lang="en-US" smtClean="0"/>
-              <a:t>4/5/26</a:t>
+              <a:t>8/13/26</a:t>
             </a:fld>
             <a:endParaRPr lang="en-US"/>
           </a:p>
@@ -16285,8 +12281,8 @@
           </a:p>
         </p:txBody>
       </p:sp>
-      <mc:AlternateContent xmlns:mc="http://schemas.openxmlformats.org/markup-compatibility/2006">
-        <mc:Choice xmlns:a14="http://schemas.microsoft.com/office/drawing/2010/main" Requires="a14">
+      <mc:AlternateContent xmlns:mc="http://schemas.openxmlformats.org/markup-compatibility/2006" xmlns:a14="http://schemas.microsoft.com/office/drawing/2010/main">
+        <mc:Choice Requires="a14">
           <p:sp>
             <p:nvSpPr>
               <p:cNvPr id="3" name="Content Placeholder 2">
@@ -16395,7 +12391,7 @@
                     <m:sSup>
                       <m:sSupPr>
                         <m:ctrlPr>
-                          <a:rPr lang="en-US" sz="2600" b="1" i="1">
+                          <a:rPr lang="en-US" sz="2600" b="1">
                             <a:latin typeface="Cambria Math" panose="02040503050406030204" pitchFamily="18" charset="0"/>
                           </a:rPr>
                         </m:ctrlPr>
@@ -16461,7 +12457,7 @@
                             <a:latin typeface="Cambria Math" panose="02040503050406030204" pitchFamily="18" charset="0"/>
                             <a:ea typeface="Source Sans Pro" panose="020B0503030403020204" pitchFamily="34" charset="0"/>
                           </a:rPr>
-                          <m:t>h</m:t>
+                          <m:t>ℎ</m:t>
                         </m:r>
                       </m:e>
                       <m:sub>
@@ -16566,7 +12562,7 @@
                     <m:sSup>
                       <m:sSupPr>
                         <m:ctrlPr>
-                          <a:rPr lang="en-US" sz="2600" b="1" i="1">
+                          <a:rPr lang="en-US" sz="2600" b="1">
                             <a:latin typeface="Cambria Math" panose="02040503050406030204" pitchFamily="18" charset="0"/>
                           </a:rPr>
                         </m:ctrlPr>
@@ -16739,7 +12735,7 @@
                         <m:sSubSup>
                           <m:sSubSupPr>
                             <m:ctrlPr>
-                              <a:rPr lang="en-US" sz="2600" i="1" dirty="0">
+                              <a:rPr lang="en-US" sz="2600" b="0" i="1" dirty="0" smtClean="0">
                                 <a:latin typeface="Cambria Math" panose="02040503050406030204" pitchFamily="18" charset="0"/>
                                 <a:ea typeface="Source Sans Pro" panose="020B0503030403020204" pitchFamily="34" charset="0"/>
                               </a:rPr>
@@ -16783,7 +12779,7 @@
                         <m:sSubSup>
                           <m:sSubSupPr>
                             <m:ctrlPr>
-                              <a:rPr lang="en-US" sz="2600" i="1" dirty="0">
+                              <a:rPr lang="en-US" sz="2600" b="0" i="1" dirty="0" smtClean="0">
                                 <a:latin typeface="Cambria Math" panose="02040503050406030204" pitchFamily="18" charset="0"/>
                                 <a:ea typeface="Source Sans Pro" panose="020B0503030403020204" pitchFamily="34" charset="0"/>
                               </a:rPr>
@@ -16839,7 +12835,7 @@
             </p:txBody>
           </p:sp>
         </mc:Choice>
-        <mc:Fallback>
+        <mc:Fallback xmlns="">
           <p:sp>
             <p:nvSpPr>
               <p:cNvPr id="3" name="Content Placeholder 2">
@@ -17047,7 +13043,7 @@
           <a:p>
             <a:fld id="{B5655EDD-AD83-5644-904C-5618626E1E14}" type="datetime1">
               <a:rPr lang="en-US" smtClean="0"/>
-              <a:t>4/5/26</a:t>
+              <a:t>8/13/26</a:t>
             </a:fld>
             <a:endParaRPr lang="en-US"/>
           </a:p>
@@ -17266,7 +13262,7 @@
           <a:p>
             <a:fld id="{18BADBCC-A848-334E-9461-BE3A7D70BC3D}" type="datetime1">
               <a:rPr lang="en-US" smtClean="0"/>
-              <a:t>4/5/26</a:t>
+              <a:t>8/13/26</a:t>
             </a:fld>
             <a:endParaRPr lang="en-US"/>
           </a:p>
@@ -17305,14 +13301,11 @@
                 <a:pPr/>
                 <a14:m>
                   <m:oMathPara xmlns:m="http://schemas.openxmlformats.org/officeDocument/2006/math">
-                    <m:oMathParaPr>
-                      <m:jc m:val="centerGroup"/>
-                    </m:oMathParaPr>
-                    <m:oMath xmlns:m="http://schemas.openxmlformats.org/officeDocument/2006/math">
+                    <m:oMath>
                       <m:func>
                         <m:funcPr>
                           <m:ctrlPr>
-                            <a:rPr lang="en-US" sz="2800" b="0" i="1" smtClean="0">
+                            <a:rPr lang="en-US" sz="2800" b="0" i="0" smtClean="0">
                               <a:latin typeface="Cambria Math" panose="02040503050406030204" pitchFamily="18" charset="0"/>
                             </a:rPr>
                           </m:ctrlPr>
@@ -17439,13 +13432,7 @@
                       <a:rPr lang="en-US" sz="2800" b="0" i="0" smtClean="0">
                         <a:latin typeface="Cambria Math" panose="02040503050406030204" pitchFamily="18" charset="0"/>
                       </a:rPr>
-                      <m:t>. </m:t>
-                    </m:r>
-                    <m:r>
-                      <a:rPr lang="en-US" sz="2800" b="0" i="1" smtClean="0">
-                        <a:latin typeface="Cambria Math" panose="02040503050406030204" pitchFamily="18" charset="0"/>
-                      </a:rPr>
-                      <m:t>  2</m:t>
+                      <m:t>.   2</m:t>
                     </m:r>
                     <m:r>
                       <a:rPr lang="en-US" sz="2800" b="0" i="1" smtClean="0">
@@ -17689,7 +13676,7 @@
           <a:p>
             <a:fld id="{05CD4EB9-C208-4749-B319-F94610A42C12}" type="datetime1">
               <a:rPr lang="en-US" smtClean="0"/>
-              <a:t>4/5/26</a:t>
+              <a:t>8/13/26</a:t>
             </a:fld>
             <a:endParaRPr lang="en-US"/>
           </a:p>
@@ -17970,7 +13957,7 @@
           <a:p>
             <a:fld id="{119C75E3-35BA-D347-A202-EE4D8D1E0C91}" type="datetime1">
               <a:rPr lang="en-US" smtClean="0"/>
-              <a:t>4/5/26</a:t>
+              <a:t>8/13/26</a:t>
             </a:fld>
             <a:endParaRPr lang="en-US"/>
           </a:p>
@@ -18173,8 +14160,9 @@
                     <m:sSup>
                       <m:sSupPr>
                         <m:ctrlPr>
-                          <a:rPr lang="en-US" b="0" i="1" smtClean="0">
-                            <a:latin typeface="Cambria Math" panose="02040503050406030204" pitchFamily="18" charset="0"/>
+                          <a:rPr lang="en-US" b="1" i="0" smtClean="0">
+                            <a:latin typeface="Source Sans Pro" panose="020B0503030403020204" pitchFamily="34" charset="0"/>
+                            <a:ea typeface="Source Sans Pro" panose="020B0503030403020204" pitchFamily="34" charset="0"/>
                           </a:rPr>
                         </m:ctrlPr>
                       </m:sSupPr>
@@ -18213,8 +14201,9 @@
                     <m:sSup>
                       <m:sSupPr>
                         <m:ctrlPr>
-                          <a:rPr lang="en-US" i="1">
-                            <a:latin typeface="Cambria Math" panose="02040503050406030204" pitchFamily="18" charset="0"/>
+                          <a:rPr lang="en-US" b="1" i="0">
+                            <a:latin typeface="Source Sans Pro" panose="020B0503030403020204" pitchFamily="34" charset="0"/>
+                            <a:ea typeface="Source Sans Pro" panose="020B0503030403020204" pitchFamily="34" charset="0"/>
                           </a:rPr>
                         </m:ctrlPr>
                       </m:sSupPr>
@@ -18223,7 +14212,7 @@
                           <m:rPr>
                             <m:nor/>
                           </m:rPr>
-                          <a:rPr lang="en-US" b="1">
+                          <a:rPr lang="en-US" b="1" i="0">
                             <a:latin typeface="Source Sans Pro" panose="020B0503030403020204" pitchFamily="34" charset="0"/>
                             <a:ea typeface="Source Sans Pro" panose="020B0503030403020204" pitchFamily="34" charset="0"/>
                           </a:rPr>
@@ -18248,8 +14237,9 @@
                     <m:sSup>
                       <m:sSupPr>
                         <m:ctrlPr>
-                          <a:rPr lang="en-US" i="1" smtClean="0">
-                            <a:latin typeface="Cambria Math" panose="02040503050406030204" pitchFamily="18" charset="0"/>
+                          <a:rPr lang="en-US" b="1" i="0">
+                            <a:latin typeface="Source Sans Pro" panose="020B0503030403020204" pitchFamily="34" charset="0"/>
+                            <a:ea typeface="Source Sans Pro" panose="020B0503030403020204" pitchFamily="34" charset="0"/>
                           </a:rPr>
                         </m:ctrlPr>
                       </m:sSupPr>
@@ -18258,7 +14248,7 @@
                           <m:rPr>
                             <m:nor/>
                           </m:rPr>
-                          <a:rPr lang="en-US" b="1">
+                          <a:rPr lang="en-US" b="1" i="0">
                             <a:latin typeface="Source Sans Pro" panose="020B0503030403020204" pitchFamily="34" charset="0"/>
                             <a:ea typeface="Source Sans Pro" panose="020B0503030403020204" pitchFamily="34" charset="0"/>
                           </a:rPr>
@@ -18439,7 +14429,7 @@
           <a:p>
             <a:fld id="{932392C0-CB95-624A-8E80-531009381255}" type="datetime1">
               <a:rPr lang="en-US" smtClean="0"/>
-              <a:t>4/5/26</a:t>
+              <a:t>8/13/26</a:t>
             </a:fld>
             <a:endParaRPr lang="en-US"/>
           </a:p>
@@ -18702,7 +14692,7 @@
                     <m:d>
                       <m:dPr>
                         <m:ctrlPr>
-                          <a:rPr lang="en-US" i="1">
+                          <a:rPr lang="en-US" b="1" i="0" smtClean="0">
                             <a:latin typeface="Cambria Math" panose="02040503050406030204" pitchFamily="18" charset="0"/>
                             <a:ea typeface="Cambria Math" panose="02040503050406030204" pitchFamily="18" charset="0"/>
                           </a:rPr>
@@ -18854,7 +14844,7 @@
                     <m:sSub>
                       <m:sSubPr>
                         <m:ctrlPr>
-                          <a:rPr lang="en-US" b="1" i="1" smtClean="0">
+                          <a:rPr lang="en-US" b="1" i="0" smtClean="0">
                             <a:latin typeface="Cambria Math" panose="02040503050406030204" pitchFamily="18" charset="0"/>
                           </a:rPr>
                         </m:ctrlPr>
@@ -18993,7 +14983,7 @@
           <a:p>
             <a:fld id="{2AB195FA-B37D-574E-9B3A-E29DF30A8026}" type="datetime1">
               <a:rPr lang="en-US" smtClean="0"/>
-              <a:t>4/5/26</a:t>
+              <a:t>8/13/26</a:t>
             </a:fld>
             <a:endParaRPr lang="en-US"/>
           </a:p>
@@ -19241,7 +15231,7 @@
                     <m:sSup>
                       <m:sSupPr>
                         <m:ctrlPr>
-                          <a:rPr lang="en-US" b="1" i="1" smtClean="0">
+                          <a:rPr lang="en-US" i="1">
                             <a:latin typeface="Cambria Math" panose="02040503050406030204" pitchFamily="18" charset="0"/>
                             <a:ea typeface="Cambria Math" panose="02040503050406030204" pitchFamily="18" charset="0"/>
                           </a:rPr>
@@ -19251,7 +15241,7 @@
                         <m:d>
                           <m:dPr>
                             <m:ctrlPr>
-                              <a:rPr lang="en-US" i="1">
+                              <a:rPr lang="en-US" b="1">
                                 <a:latin typeface="Cambria Math" panose="02040503050406030204" pitchFamily="18" charset="0"/>
                                 <a:ea typeface="Cambria Math" panose="02040503050406030204" pitchFamily="18" charset="0"/>
                               </a:rPr>
@@ -19581,7 +15571,7 @@
           <a:p>
             <a:fld id="{7FB3CF7F-2957-FE42-996C-F2362BD16EA6}" type="datetime1">
               <a:rPr lang="en-US" smtClean="0"/>
-              <a:t>4/5/26</a:t>
+              <a:t>8/13/26</a:t>
             </a:fld>
             <a:endParaRPr lang="en-US"/>
           </a:p>
@@ -19840,7 +15830,7 @@
                     <m:d>
                       <m:dPr>
                         <m:ctrlPr>
-                          <a:rPr lang="en-US" i="1">
+                          <a:rPr lang="en-US" b="1" i="1" smtClean="0">
                             <a:latin typeface="Cambria Math" panose="02040503050406030204" pitchFamily="18" charset="0"/>
                             <a:ea typeface="Cambria Math" panose="02040503050406030204" pitchFamily="18" charset="0"/>
                           </a:rPr>
@@ -19850,7 +15840,7 @@
                         <m:sSup>
                           <m:sSupPr>
                             <m:ctrlPr>
-                              <a:rPr lang="en-US" b="1" i="1" smtClean="0">
+                              <a:rPr lang="en-US" b="1">
                                 <a:latin typeface="Cambria Math" panose="02040503050406030204" pitchFamily="18" charset="0"/>
                                 <a:ea typeface="Cambria Math" panose="02040503050406030204" pitchFamily="18" charset="0"/>
                               </a:rPr>
@@ -19901,7 +15891,7 @@
                     <m:sSup>
                       <m:sSupPr>
                         <m:ctrlPr>
-                          <a:rPr lang="en-US" b="1" i="1" smtClean="0">
+                          <a:rPr lang="en-US" b="1" i="0" smtClean="0">
                             <a:latin typeface="Cambria Math" panose="02040503050406030204" pitchFamily="18" charset="0"/>
                           </a:rPr>
                         </m:ctrlPr>
@@ -20067,7 +16057,7 @@
           <a:p>
             <a:fld id="{11926849-6CBC-7549-91D8-CA0AFE3EC778}" type="datetime1">
               <a:rPr lang="en-US" smtClean="0"/>
-              <a:t>4/5/26</a:t>
+              <a:t>8/13/26</a:t>
             </a:fld>
             <a:endParaRPr lang="en-US"/>
           </a:p>
@@ -20387,7 +16377,7 @@
           <a:p>
             <a:fld id="{9B0782A4-9CFA-5349-B03E-B89B88D50CD6}" type="datetime1">
               <a:rPr lang="en-US" smtClean="0"/>
-              <a:t>4/5/26</a:t>
+              <a:t>8/13/26</a:t>
             </a:fld>
             <a:endParaRPr lang="en-US"/>
           </a:p>
@@ -20602,7 +16592,7 @@
                     <m:sSup>
                       <m:sSupPr>
                         <m:ctrlPr>
-                          <a:rPr lang="en-US" b="1" i="1" smtClean="0">
+                          <a:rPr lang="en-US" i="1">
                             <a:latin typeface="Cambria Math" panose="02040503050406030204" pitchFamily="18" charset="0"/>
                             <a:ea typeface="Cambria Math" panose="02040503050406030204" pitchFamily="18" charset="0"/>
                           </a:rPr>
@@ -20612,7 +16602,7 @@
                         <m:d>
                           <m:dPr>
                             <m:ctrlPr>
-                              <a:rPr lang="en-US" i="1">
+                              <a:rPr lang="en-US" b="1" i="1">
                                 <a:latin typeface="Cambria Math" panose="02040503050406030204" pitchFamily="18" charset="0"/>
                                 <a:ea typeface="Cambria Math" panose="02040503050406030204" pitchFamily="18" charset="0"/>
                               </a:rPr>
@@ -20622,7 +16612,7 @@
                             <m:sSup>
                               <m:sSupPr>
                                 <m:ctrlPr>
-                                  <a:rPr lang="en-US" b="1" i="1">
+                                  <a:rPr lang="en-US" b="1">
                                     <a:latin typeface="Cambria Math" panose="02040503050406030204" pitchFamily="18" charset="0"/>
                                     <a:ea typeface="Cambria Math" panose="02040503050406030204" pitchFamily="18" charset="0"/>
                                   </a:rPr>
@@ -20663,7 +16653,7 @@
                     <m:sSup>
                       <m:sSupPr>
                         <m:ctrlPr>
-                          <a:rPr lang="en-US" b="1" i="1" smtClean="0">
+                          <a:rPr lang="en-US" b="1" i="0" smtClean="0">
                             <a:latin typeface="Cambria Math" panose="02040503050406030204" pitchFamily="18" charset="0"/>
                             <a:ea typeface="Cambria Math" panose="02040503050406030204" pitchFamily="18" charset="0"/>
                           </a:rPr>
@@ -20862,7 +16852,7 @@
           <a:p>
             <a:fld id="{1079C38E-F704-9945-BA8E-D7051D24C6F5}" type="datetime1">
               <a:rPr lang="en-US" smtClean="0"/>
-              <a:t>4/5/26</a:t>
+              <a:t>8/13/26</a:t>
             </a:fld>
             <a:endParaRPr lang="en-US"/>
           </a:p>
@@ -21553,12 +17543,6 @@
 </file>
 
 <file path=customXml/item1.xml><?xml version="1.0" encoding="utf-8"?>
-<p:properties xmlns:p="http://schemas.microsoft.com/office/2006/metadata/properties" xmlns:xsi="http://www.w3.org/2001/XMLSchema-instance" xmlns:pc="http://schemas.microsoft.com/office/infopath/2007/PartnerControls">
-  <documentManagement/>
-</p:properties>
-</file>
-
-<file path=customXml/item2.xml><?xml version="1.0" encoding="utf-8"?>
 <ct:contentTypeSchema xmlns:ct="http://schemas.microsoft.com/office/2006/metadata/contentType" xmlns:ma="http://schemas.microsoft.com/office/2006/metadata/properties/metaAttributes" ct:_="" ma:_="" ma:contentTypeName="Document" ma:contentTypeID="0x0101001AFBB6EF975807449194B44213CB1385" ma:contentTypeVersion="5" ma:contentTypeDescription="Create a new document." ma:contentTypeScope="" ma:versionID="6297688411df770d7ba805098bf03ebd">
   <xsd:schema xmlns:xsd="http://www.w3.org/2001/XMLSchema" xmlns:xs="http://www.w3.org/2001/XMLSchema" xmlns:p="http://schemas.microsoft.com/office/2006/metadata/properties" xmlns:ns3="d1af692f-475c-46b5-a87d-a47813ac8995" xmlns:ns4="ec38afac-11fd-4f05-b2a5-9d8ac7fc116b" targetNamespace="http://schemas.microsoft.com/office/2006/metadata/properties" ma:root="true" ma:fieldsID="a8acf1f0a3134d6bce4e4716f1f754da" ns3:_="" ns4:_="">
     <xsd:import namespace="d1af692f-475c-46b5-a87d-a47813ac8995"/>
@@ -21729,6 +17713,12 @@
 </ct:contentTypeSchema>
 </file>
 
+<file path=customXml/item2.xml><?xml version="1.0" encoding="utf-8"?>
+<p:properties xmlns:p="http://schemas.microsoft.com/office/2006/metadata/properties" xmlns:xsi="http://www.w3.org/2001/XMLSchema-instance" xmlns:pc="http://schemas.microsoft.com/office/infopath/2007/PartnerControls">
+  <documentManagement/>
+</p:properties>
+</file>
+
 <file path=customXml/item3.xml><?xml version="1.0" encoding="utf-8"?>
 <?mso-contentType ?>
 <FormTemplates xmlns="http://schemas.microsoft.com/sharepoint/v3/contenttype/forms">
@@ -21739,23 +17729,6 @@
 </file>
 
 <file path=customXml/itemProps1.xml><?xml version="1.0" encoding="utf-8"?>
-<ds:datastoreItem xmlns:ds="http://schemas.openxmlformats.org/officeDocument/2006/customXml" ds:itemID="{78CB83D5-2EE8-47D4-AFCF-D63C8BDC6812}">
-  <ds:schemaRefs>
-    <ds:schemaRef ds:uri="http://schemas.microsoft.com/office/2006/documentManagement/types"/>
-    <ds:schemaRef ds:uri="d1af692f-475c-46b5-a87d-a47813ac8995"/>
-    <ds:schemaRef ds:uri="http://purl.org/dc/elements/1.1/"/>
-    <ds:schemaRef ds:uri="http://www.w3.org/XML/1998/namespace"/>
-    <ds:schemaRef ds:uri="http://purl.org/dc/dcmitype/"/>
-    <ds:schemaRef ds:uri="http://purl.org/dc/terms/"/>
-    <ds:schemaRef ds:uri="http://schemas.microsoft.com/office/2006/metadata/properties"/>
-    <ds:schemaRef ds:uri="http://schemas.microsoft.com/office/infopath/2007/PartnerControls"/>
-    <ds:schemaRef ds:uri="http://schemas.openxmlformats.org/package/2006/metadata/core-properties"/>
-    <ds:schemaRef ds:uri="ec38afac-11fd-4f05-b2a5-9d8ac7fc116b"/>
-  </ds:schemaRefs>
-</ds:datastoreItem>
-</file>
-
-<file path=customXml/itemProps2.xml><?xml version="1.0" encoding="utf-8"?>
 <ds:datastoreItem xmlns:ds="http://schemas.openxmlformats.org/officeDocument/2006/customXml" ds:itemID="{F2332D03-EC2A-4FE5-A5AD-095462B0EFDC}">
   <ds:schemaRefs>
     <ds:schemaRef ds:uri="http://schemas.microsoft.com/office/2006/metadata/contentType"/>
@@ -21774,6 +17747,23 @@
 </ds:datastoreItem>
 </file>
 
+<file path=customXml/itemProps2.xml><?xml version="1.0" encoding="utf-8"?>
+<ds:datastoreItem xmlns:ds="http://schemas.openxmlformats.org/officeDocument/2006/customXml" ds:itemID="{78CB83D5-2EE8-47D4-AFCF-D63C8BDC6812}">
+  <ds:schemaRefs>
+    <ds:schemaRef ds:uri="http://schemas.microsoft.com/office/infopath/2007/PartnerControls"/>
+    <ds:schemaRef ds:uri="http://schemas.microsoft.com/office/2006/metadata/properties"/>
+    <ds:schemaRef ds:uri="http://purl.org/dc/elements/1.1/"/>
+    <ds:schemaRef ds:uri="d1af692f-475c-46b5-a87d-a47813ac8995"/>
+    <ds:schemaRef ds:uri="http://purl.org/dc/dcmitype/"/>
+    <ds:schemaRef ds:uri="http://purl.org/dc/terms/"/>
+    <ds:schemaRef ds:uri="http://www.w3.org/XML/1998/namespace"/>
+    <ds:schemaRef ds:uri="http://schemas.microsoft.com/office/2006/documentManagement/types"/>
+    <ds:schemaRef ds:uri="ec38afac-11fd-4f05-b2a5-9d8ac7fc116b"/>
+    <ds:schemaRef ds:uri="http://schemas.openxmlformats.org/package/2006/metadata/core-properties"/>
+  </ds:schemaRefs>
+</ds:datastoreItem>
+</file>
+
 <file path=customXml/itemProps3.xml><?xml version="1.0" encoding="utf-8"?>
 <ds:datastoreItem xmlns:ds="http://schemas.openxmlformats.org/officeDocument/2006/customXml" ds:itemID="{B0539871-AE47-4AFD-9001-55C4038F95BF}">
   <ds:schemaRefs>
